--- a/Presentation.pptx
+++ b/Presentation.pptx
@@ -7,23 +7,36 @@
   <p:sldIdLst>
     <p:sldId id="256" r:id="rId2"/>
     <p:sldId id="279" r:id="rId3"/>
-    <p:sldId id="280" r:id="rId4"/>
-    <p:sldId id="281" r:id="rId5"/>
-    <p:sldId id="268" r:id="rId6"/>
-    <p:sldId id="267" r:id="rId7"/>
-    <p:sldId id="266" r:id="rId8"/>
-    <p:sldId id="265" r:id="rId9"/>
-    <p:sldId id="260" r:id="rId10"/>
-    <p:sldId id="269" r:id="rId11"/>
-    <p:sldId id="270" r:id="rId12"/>
-    <p:sldId id="271" r:id="rId13"/>
-    <p:sldId id="278" r:id="rId14"/>
-    <p:sldId id="273" r:id="rId15"/>
-    <p:sldId id="275" r:id="rId16"/>
-    <p:sldId id="276" r:id="rId17"/>
-    <p:sldId id="277" r:id="rId18"/>
-    <p:sldId id="274" r:id="rId19"/>
-    <p:sldId id="264" r:id="rId20"/>
+    <p:sldId id="289" r:id="rId4"/>
+    <p:sldId id="268" r:id="rId5"/>
+    <p:sldId id="267" r:id="rId6"/>
+    <p:sldId id="301" r:id="rId7"/>
+    <p:sldId id="303" r:id="rId8"/>
+    <p:sldId id="302" r:id="rId9"/>
+    <p:sldId id="299" r:id="rId10"/>
+    <p:sldId id="300" r:id="rId11"/>
+    <p:sldId id="265" r:id="rId12"/>
+    <p:sldId id="283" r:id="rId13"/>
+    <p:sldId id="284" r:id="rId14"/>
+    <p:sldId id="286" r:id="rId15"/>
+    <p:sldId id="298" r:id="rId16"/>
+    <p:sldId id="277" r:id="rId17"/>
+    <p:sldId id="285" r:id="rId18"/>
+    <p:sldId id="292" r:id="rId19"/>
+    <p:sldId id="293" r:id="rId20"/>
+    <p:sldId id="294" r:id="rId21"/>
+    <p:sldId id="295" r:id="rId22"/>
+    <p:sldId id="296" r:id="rId23"/>
+    <p:sldId id="304" r:id="rId24"/>
+    <p:sldId id="305" r:id="rId25"/>
+    <p:sldId id="297" r:id="rId26"/>
+    <p:sldId id="269" r:id="rId27"/>
+    <p:sldId id="287" r:id="rId28"/>
+    <p:sldId id="288" r:id="rId29"/>
+    <p:sldId id="278" r:id="rId30"/>
+    <p:sldId id="273" r:id="rId31"/>
+    <p:sldId id="274" r:id="rId32"/>
+    <p:sldId id="306" r:id="rId33"/>
   </p:sldIdLst>
   <p:sldSz cx="12192000" cy="6858000"/>
   <p:notesSz cx="6858000" cy="9144000"/>
@@ -129,24 +142,40 @@
           <p14:sldIdLst>
             <p14:sldId id="256"/>
             <p14:sldId id="279"/>
-            <p14:sldId id="280"/>
-            <p14:sldId id="281"/>
+            <p14:sldId id="289"/>
             <p14:sldId id="268"/>
             <p14:sldId id="267"/>
-            <p14:sldId id="266"/>
+            <p14:sldId id="301"/>
+            <p14:sldId id="303"/>
+            <p14:sldId id="302"/>
+            <p14:sldId id="299"/>
+            <p14:sldId id="300"/>
             <p14:sldId id="265"/>
-            <p14:sldId id="260"/>
+            <p14:sldId id="283"/>
+            <p14:sldId id="284"/>
+            <p14:sldId id="286"/>
+            <p14:sldId id="298"/>
+            <p14:sldId id="277"/>
+            <p14:sldId id="285"/>
+            <p14:sldId id="292"/>
+            <p14:sldId id="293"/>
+            <p14:sldId id="294"/>
+            <p14:sldId id="295"/>
+            <p14:sldId id="296"/>
+            <p14:sldId id="304"/>
+            <p14:sldId id="305"/>
+            <p14:sldId id="297"/>
             <p14:sldId id="269"/>
-            <p14:sldId id="270"/>
-            <p14:sldId id="271"/>
+            <p14:sldId id="287"/>
+            <p14:sldId id="288"/>
             <p14:sldId id="278"/>
             <p14:sldId id="273"/>
-            <p14:sldId id="275"/>
-            <p14:sldId id="276"/>
-            <p14:sldId id="277"/>
             <p14:sldId id="274"/>
-            <p14:sldId id="264"/>
+            <p14:sldId id="306"/>
           </p14:sldIdLst>
+        </p14:section>
+        <p14:section name="Untitled Section" id="{09F9965A-AF59-4B5B-8AB8-E10C0A21D5B2}">
+          <p14:sldIdLst/>
         </p14:section>
       </p14:sectionLst>
     </p:ext>
@@ -345,7 +374,7 @@
           <a:p>
             <a:fld id="{1911A471-1EBE-42C9-92BD-28F69F826B9B}" type="datetimeFigureOut">
               <a:rPr lang="en-IN" smtClean="0"/>
-              <a:t>19-05-2026</a:t>
+              <a:t>20-05-2026</a:t>
             </a:fld>
             <a:endParaRPr lang="en-IN"/>
           </a:p>
@@ -490,6 +519,18 @@
   <p:clrMapOvr>
     <a:masterClrMapping/>
   </p:clrMapOvr>
+  <mc:AlternateContent xmlns:mc="http://schemas.openxmlformats.org/markup-compatibility/2006">
+    <mc:Choice xmlns:p159="http://schemas.microsoft.com/office/powerpoint/2015/09/main" Requires="p159">
+      <p:transition xmlns:p14="http://schemas.microsoft.com/office/powerpoint/2010/main" spd="slow" p14:dur="2000">
+        <p159:morph option="byObject"/>
+      </p:transition>
+    </mc:Choice>
+    <mc:Fallback>
+      <p:transition spd="slow">
+        <p:fade/>
+      </p:transition>
+    </mc:Fallback>
+  </mc:AlternateContent>
 </p:sldLayout>
 </file>
 
@@ -683,7 +724,7 @@
           <a:p>
             <a:fld id="{1911A471-1EBE-42C9-92BD-28F69F826B9B}" type="datetimeFigureOut">
               <a:rPr lang="en-IN" smtClean="0"/>
-              <a:t>19-05-2026</a:t>
+              <a:t>20-05-2026</a:t>
             </a:fld>
             <a:endParaRPr lang="en-IN"/>
           </a:p>
@@ -828,6 +869,18 @@
   <p:clrMapOvr>
     <a:masterClrMapping/>
   </p:clrMapOvr>
+  <mc:AlternateContent xmlns:mc="http://schemas.openxmlformats.org/markup-compatibility/2006">
+    <mc:Choice xmlns:p159="http://schemas.microsoft.com/office/powerpoint/2015/09/main" Requires="p159">
+      <p:transition xmlns:p14="http://schemas.microsoft.com/office/powerpoint/2010/main" spd="slow" p14:dur="2000">
+        <p159:morph option="byObject"/>
+      </p:transition>
+    </mc:Choice>
+    <mc:Fallback>
+      <p:transition spd="slow">
+        <p:fade/>
+      </p:transition>
+    </mc:Fallback>
+  </mc:AlternateContent>
 </p:sldLayout>
 </file>
 
@@ -1084,7 +1137,7 @@
           <a:p>
             <a:fld id="{1911A471-1EBE-42C9-92BD-28F69F826B9B}" type="datetimeFigureOut">
               <a:rPr lang="en-IN" smtClean="0"/>
-              <a:t>19-05-2026</a:t>
+              <a:t>20-05-2026</a:t>
             </a:fld>
             <a:endParaRPr lang="en-IN"/>
           </a:p>
@@ -1305,6 +1358,18 @@
   <p:clrMapOvr>
     <a:masterClrMapping/>
   </p:clrMapOvr>
+  <mc:AlternateContent xmlns:mc="http://schemas.openxmlformats.org/markup-compatibility/2006">
+    <mc:Choice xmlns:p159="http://schemas.microsoft.com/office/powerpoint/2015/09/main" Requires="p159">
+      <p:transition xmlns:p14="http://schemas.microsoft.com/office/powerpoint/2010/main" spd="slow" p14:dur="2000">
+        <p159:morph option="byObject"/>
+      </p:transition>
+    </mc:Choice>
+    <mc:Fallback>
+      <p:transition spd="slow">
+        <p:fade/>
+      </p:transition>
+    </mc:Fallback>
+  </mc:AlternateContent>
 </p:sldLayout>
 </file>
 
@@ -1420,7 +1485,7 @@
           <a:p>
             <a:fld id="{1911A471-1EBE-42C9-92BD-28F69F826B9B}" type="datetimeFigureOut">
               <a:rPr lang="en-IN" smtClean="0"/>
-              <a:t>19-05-2026</a:t>
+              <a:t>20-05-2026</a:t>
             </a:fld>
             <a:endParaRPr lang="en-IN"/>
           </a:p>
@@ -1565,6 +1630,18 @@
   <p:clrMapOvr>
     <a:masterClrMapping/>
   </p:clrMapOvr>
+  <mc:AlternateContent xmlns:mc="http://schemas.openxmlformats.org/markup-compatibility/2006">
+    <mc:Choice xmlns:p159="http://schemas.microsoft.com/office/powerpoint/2015/09/main" Requires="p159">
+      <p:transition xmlns:p14="http://schemas.microsoft.com/office/powerpoint/2010/main" spd="slow" p14:dur="2000">
+        <p159:morph option="byObject"/>
+      </p:transition>
+    </mc:Choice>
+    <mc:Fallback>
+      <p:transition spd="slow">
+        <p:fade/>
+      </p:transition>
+    </mc:Fallback>
+  </mc:AlternateContent>
 </p:sldLayout>
 </file>
 
@@ -1740,7 +1817,7 @@
           <a:p>
             <a:fld id="{1911A471-1EBE-42C9-92BD-28F69F826B9B}" type="datetimeFigureOut">
               <a:rPr lang="en-IN" smtClean="0"/>
-              <a:t>19-05-2026</a:t>
+              <a:t>20-05-2026</a:t>
             </a:fld>
             <a:endParaRPr lang="en-IN"/>
           </a:p>
@@ -1961,6 +2038,18 @@
   <p:clrMapOvr>
     <a:masterClrMapping/>
   </p:clrMapOvr>
+  <mc:AlternateContent xmlns:mc="http://schemas.openxmlformats.org/markup-compatibility/2006">
+    <mc:Choice xmlns:p159="http://schemas.microsoft.com/office/powerpoint/2015/09/main" Requires="p159">
+      <p:transition xmlns:p14="http://schemas.microsoft.com/office/powerpoint/2010/main" spd="slow" p14:dur="2000">
+        <p159:morph option="byObject"/>
+      </p:transition>
+    </mc:Choice>
+    <mc:Fallback>
+      <p:transition spd="slow">
+        <p:fade/>
+      </p:transition>
+    </mc:Fallback>
+  </mc:AlternateContent>
 </p:sldLayout>
 </file>
 
@@ -2136,7 +2225,7 @@
           <a:p>
             <a:fld id="{1911A471-1EBE-42C9-92BD-28F69F826B9B}" type="datetimeFigureOut">
               <a:rPr lang="en-IN" smtClean="0"/>
-              <a:t>19-05-2026</a:t>
+              <a:t>20-05-2026</a:t>
             </a:fld>
             <a:endParaRPr lang="en-IN"/>
           </a:p>
@@ -2281,6 +2370,18 @@
   <p:clrMapOvr>
     <a:masterClrMapping/>
   </p:clrMapOvr>
+  <mc:AlternateContent xmlns:mc="http://schemas.openxmlformats.org/markup-compatibility/2006">
+    <mc:Choice xmlns:p159="http://schemas.microsoft.com/office/powerpoint/2015/09/main" Requires="p159">
+      <p:transition xmlns:p14="http://schemas.microsoft.com/office/powerpoint/2010/main" spd="slow" p14:dur="2000">
+        <p159:morph option="byObject"/>
+      </p:transition>
+    </mc:Choice>
+    <mc:Fallback>
+      <p:transition spd="slow">
+        <p:fade/>
+      </p:transition>
+    </mc:Fallback>
+  </mc:AlternateContent>
 </p:sldLayout>
 </file>
 
@@ -2393,7 +2494,7 @@
           <a:p>
             <a:fld id="{1911A471-1EBE-42C9-92BD-28F69F826B9B}" type="datetimeFigureOut">
               <a:rPr lang="en-IN" smtClean="0"/>
-              <a:t>19-05-2026</a:t>
+              <a:t>20-05-2026</a:t>
             </a:fld>
             <a:endParaRPr lang="en-IN"/>
           </a:p>
@@ -2533,6 +2634,18 @@
   <p:clrMapOvr>
     <a:masterClrMapping/>
   </p:clrMapOvr>
+  <mc:AlternateContent xmlns:mc="http://schemas.openxmlformats.org/markup-compatibility/2006">
+    <mc:Choice xmlns:p159="http://schemas.microsoft.com/office/powerpoint/2015/09/main" Requires="p159">
+      <p:transition xmlns:p14="http://schemas.microsoft.com/office/powerpoint/2010/main" spd="slow" p14:dur="2000">
+        <p159:morph option="byObject"/>
+      </p:transition>
+    </mc:Choice>
+    <mc:Fallback>
+      <p:transition spd="slow">
+        <p:fade/>
+      </p:transition>
+    </mc:Fallback>
+  </mc:AlternateContent>
 </p:sldLayout>
 </file>
 
@@ -2655,7 +2768,7 @@
           <a:p>
             <a:fld id="{1911A471-1EBE-42C9-92BD-28F69F826B9B}" type="datetimeFigureOut">
               <a:rPr lang="en-IN" smtClean="0"/>
-              <a:t>19-05-2026</a:t>
+              <a:t>20-05-2026</a:t>
             </a:fld>
             <a:endParaRPr lang="en-IN"/>
           </a:p>
@@ -2795,6 +2908,18 @@
   <p:clrMapOvr>
     <a:masterClrMapping/>
   </p:clrMapOvr>
+  <mc:AlternateContent xmlns:mc="http://schemas.openxmlformats.org/markup-compatibility/2006">
+    <mc:Choice xmlns:p159="http://schemas.microsoft.com/office/powerpoint/2015/09/main" Requires="p159">
+      <p:transition xmlns:p14="http://schemas.microsoft.com/office/powerpoint/2010/main" spd="slow" p14:dur="2000">
+        <p159:morph option="byObject"/>
+      </p:transition>
+    </mc:Choice>
+    <mc:Fallback>
+      <p:transition spd="slow">
+        <p:fade/>
+      </p:transition>
+    </mc:Fallback>
+  </mc:AlternateContent>
 </p:sldLayout>
 </file>
 
@@ -2917,7 +3042,7 @@
           <a:p>
             <a:fld id="{1911A471-1EBE-42C9-92BD-28F69F826B9B}" type="datetimeFigureOut">
               <a:rPr lang="en-IN" smtClean="0"/>
-              <a:t>19-05-2026</a:t>
+              <a:t>20-05-2026</a:t>
             </a:fld>
             <a:endParaRPr lang="en-IN"/>
           </a:p>
@@ -3057,6 +3182,18 @@
   <p:clrMapOvr>
     <a:masterClrMapping/>
   </p:clrMapOvr>
+  <mc:AlternateContent xmlns:mc="http://schemas.openxmlformats.org/markup-compatibility/2006">
+    <mc:Choice xmlns:p159="http://schemas.microsoft.com/office/powerpoint/2015/09/main" Requires="p159">
+      <p:transition xmlns:p14="http://schemas.microsoft.com/office/powerpoint/2010/main" spd="slow" p14:dur="2000">
+        <p159:morph option="byObject"/>
+      </p:transition>
+    </mc:Choice>
+    <mc:Fallback>
+      <p:transition spd="slow">
+        <p:fade/>
+      </p:transition>
+    </mc:Fallback>
+  </mc:AlternateContent>
 </p:sldLayout>
 </file>
 
@@ -3246,7 +3383,7 @@
           <a:p>
             <a:fld id="{1911A471-1EBE-42C9-92BD-28F69F826B9B}" type="datetimeFigureOut">
               <a:rPr lang="en-IN" smtClean="0"/>
-              <a:t>19-05-2026</a:t>
+              <a:t>20-05-2026</a:t>
             </a:fld>
             <a:endParaRPr lang="en-IN"/>
           </a:p>
@@ -3391,6 +3528,18 @@
   <p:clrMapOvr>
     <a:masterClrMapping/>
   </p:clrMapOvr>
+  <mc:AlternateContent xmlns:mc="http://schemas.openxmlformats.org/markup-compatibility/2006">
+    <mc:Choice xmlns:p159="http://schemas.microsoft.com/office/powerpoint/2015/09/main" Requires="p159">
+      <p:transition xmlns:p14="http://schemas.microsoft.com/office/powerpoint/2010/main" spd="slow" p14:dur="2000">
+        <p159:morph option="byObject"/>
+      </p:transition>
+    </mc:Choice>
+    <mc:Fallback>
+      <p:transition spd="slow">
+        <p:fade/>
+      </p:transition>
+    </mc:Fallback>
+  </mc:AlternateContent>
 </p:sldLayout>
 </file>
 
@@ -3569,7 +3718,7 @@
           <a:p>
             <a:fld id="{1911A471-1EBE-42C9-92BD-28F69F826B9B}" type="datetimeFigureOut">
               <a:rPr lang="en-IN" smtClean="0"/>
-              <a:t>19-05-2026</a:t>
+              <a:t>20-05-2026</a:t>
             </a:fld>
             <a:endParaRPr lang="en-IN"/>
           </a:p>
@@ -3714,6 +3863,18 @@
   <p:clrMapOvr>
     <a:masterClrMapping/>
   </p:clrMapOvr>
+  <mc:AlternateContent xmlns:mc="http://schemas.openxmlformats.org/markup-compatibility/2006">
+    <mc:Choice xmlns:p159="http://schemas.microsoft.com/office/powerpoint/2015/09/main" Requires="p159">
+      <p:transition xmlns:p14="http://schemas.microsoft.com/office/powerpoint/2010/main" spd="slow" p14:dur="2000">
+        <p159:morph option="byObject"/>
+      </p:transition>
+    </mc:Choice>
+    <mc:Fallback>
+      <p:transition spd="slow">
+        <p:fade/>
+      </p:transition>
+    </mc:Fallback>
+  </mc:AlternateContent>
 </p:sldLayout>
 </file>
 
@@ -4026,7 +4187,7 @@
           <a:p>
             <a:fld id="{1911A471-1EBE-42C9-92BD-28F69F826B9B}" type="datetimeFigureOut">
               <a:rPr lang="en-IN" smtClean="0"/>
-              <a:t>19-05-2026</a:t>
+              <a:t>20-05-2026</a:t>
             </a:fld>
             <a:endParaRPr lang="en-IN"/>
           </a:p>
@@ -4171,6 +4332,18 @@
   <p:clrMapOvr>
     <a:masterClrMapping/>
   </p:clrMapOvr>
+  <mc:AlternateContent xmlns:mc="http://schemas.openxmlformats.org/markup-compatibility/2006">
+    <mc:Choice xmlns:p159="http://schemas.microsoft.com/office/powerpoint/2015/09/main" Requires="p159">
+      <p:transition xmlns:p14="http://schemas.microsoft.com/office/powerpoint/2010/main" spd="slow" p14:dur="2000">
+        <p159:morph option="byObject"/>
+      </p:transition>
+    </mc:Choice>
+    <mc:Fallback>
+      <p:transition spd="slow">
+        <p:fade/>
+      </p:transition>
+    </mc:Fallback>
+  </mc:AlternateContent>
 </p:sldLayout>
 </file>
 
@@ -4231,7 +4404,7 @@
           <a:p>
             <a:fld id="{1911A471-1EBE-42C9-92BD-28F69F826B9B}" type="datetimeFigureOut">
               <a:rPr lang="en-IN" smtClean="0"/>
-              <a:t>19-05-2026</a:t>
+              <a:t>20-05-2026</a:t>
             </a:fld>
             <a:endParaRPr lang="en-IN"/>
           </a:p>
@@ -4371,6 +4544,18 @@
   <p:clrMapOvr>
     <a:masterClrMapping/>
   </p:clrMapOvr>
+  <mc:AlternateContent xmlns:mc="http://schemas.openxmlformats.org/markup-compatibility/2006">
+    <mc:Choice xmlns:p159="http://schemas.microsoft.com/office/powerpoint/2015/09/main" Requires="p159">
+      <p:transition xmlns:p14="http://schemas.microsoft.com/office/powerpoint/2010/main" spd="slow" p14:dur="2000">
+        <p159:morph option="byObject"/>
+      </p:transition>
+    </mc:Choice>
+    <mc:Fallback>
+      <p:transition spd="slow">
+        <p:fade/>
+      </p:transition>
+    </mc:Fallback>
+  </mc:AlternateContent>
 </p:sldLayout>
 </file>
 
@@ -4408,7 +4593,7 @@
           <a:p>
             <a:fld id="{1911A471-1EBE-42C9-92BD-28F69F826B9B}" type="datetimeFigureOut">
               <a:rPr lang="en-IN" smtClean="0"/>
-              <a:t>19-05-2026</a:t>
+              <a:t>20-05-2026</a:t>
             </a:fld>
             <a:endParaRPr lang="en-IN"/>
           </a:p>
@@ -4548,6 +4733,18 @@
   <p:clrMapOvr>
     <a:masterClrMapping/>
   </p:clrMapOvr>
+  <mc:AlternateContent xmlns:mc="http://schemas.openxmlformats.org/markup-compatibility/2006">
+    <mc:Choice xmlns:p159="http://schemas.microsoft.com/office/powerpoint/2015/09/main" Requires="p159">
+      <p:transition xmlns:p14="http://schemas.microsoft.com/office/powerpoint/2010/main" spd="slow" p14:dur="2000">
+        <p159:morph option="byObject"/>
+      </p:transition>
+    </mc:Choice>
+    <mc:Fallback>
+      <p:transition spd="slow">
+        <p:fade/>
+      </p:transition>
+    </mc:Fallback>
+  </mc:AlternateContent>
 </p:sldLayout>
 </file>
 
@@ -4741,7 +4938,7 @@
           <a:p>
             <a:fld id="{1911A471-1EBE-42C9-92BD-28F69F826B9B}" type="datetimeFigureOut">
               <a:rPr lang="en-IN" smtClean="0"/>
-              <a:t>19-05-2026</a:t>
+              <a:t>20-05-2026</a:t>
             </a:fld>
             <a:endParaRPr lang="en-IN"/>
           </a:p>
@@ -4881,6 +5078,18 @@
   <p:clrMapOvr>
     <a:masterClrMapping/>
   </p:clrMapOvr>
+  <mc:AlternateContent xmlns:mc="http://schemas.openxmlformats.org/markup-compatibility/2006">
+    <mc:Choice xmlns:p159="http://schemas.microsoft.com/office/powerpoint/2015/09/main" Requires="p159">
+      <p:transition xmlns:p14="http://schemas.microsoft.com/office/powerpoint/2010/main" spd="slow" p14:dur="2000">
+        <p159:morph option="byObject"/>
+      </p:transition>
+    </mc:Choice>
+    <mc:Fallback>
+      <p:transition spd="slow">
+        <p:fade/>
+      </p:transition>
+    </mc:Fallback>
+  </mc:AlternateContent>
 </p:sldLayout>
 </file>
 
@@ -5086,7 +5295,7 @@
           <a:p>
             <a:fld id="{1911A471-1EBE-42C9-92BD-28F69F826B9B}" type="datetimeFigureOut">
               <a:rPr lang="en-IN" smtClean="0"/>
-              <a:t>19-05-2026</a:t>
+              <a:t>20-05-2026</a:t>
             </a:fld>
             <a:endParaRPr lang="en-IN"/>
           </a:p>
@@ -5231,6 +5440,18 @@
   <p:clrMapOvr>
     <a:masterClrMapping/>
   </p:clrMapOvr>
+  <mc:AlternateContent xmlns:mc="http://schemas.openxmlformats.org/markup-compatibility/2006">
+    <mc:Choice xmlns:p159="http://schemas.microsoft.com/office/powerpoint/2015/09/main" Requires="p159">
+      <p:transition xmlns:p14="http://schemas.microsoft.com/office/powerpoint/2010/main" spd="slow" p14:dur="2000">
+        <p159:morph option="byObject"/>
+      </p:transition>
+    </mc:Choice>
+    <mc:Fallback>
+      <p:transition spd="slow">
+        <p:fade/>
+      </p:transition>
+    </mc:Fallback>
+  </mc:AlternateContent>
 </p:sldLayout>
 </file>
 
@@ -7203,7 +7424,7 @@
           <a:p>
             <a:fld id="{1911A471-1EBE-42C9-92BD-28F69F826B9B}" type="datetimeFigureOut">
               <a:rPr lang="en-IN" smtClean="0"/>
-              <a:t>19-05-2026</a:t>
+              <a:t>20-05-2026</a:t>
             </a:fld>
             <a:endParaRPr lang="en-IN"/>
           </a:p>
@@ -7311,6 +7532,18 @@
     <p:sldLayoutId id="2147483990" r:id="rId15"/>
     <p:sldLayoutId id="2147483991" r:id="rId16"/>
   </p:sldLayoutIdLst>
+  <mc:AlternateContent xmlns:mc="http://schemas.openxmlformats.org/markup-compatibility/2006">
+    <mc:Choice xmlns:p159="http://schemas.microsoft.com/office/powerpoint/2015/09/main" Requires="p159">
+      <p:transition xmlns:p14="http://schemas.microsoft.com/office/powerpoint/2010/main" spd="slow" p14:dur="2000">
+        <p159:morph option="byObject"/>
+      </p:transition>
+    </mc:Choice>
+    <mc:Fallback>
+      <p:transition spd="slow">
+        <p:fade/>
+      </p:transition>
+    </mc:Fallback>
+  </mc:AlternateContent>
   <p:txStyles>
     <p:titleStyle>
       <a:lvl1pPr algn="l" defTabSz="457200" rtl="0" eaLnBrk="1" latinLnBrk="0" hangingPunct="1">
@@ -7819,7 +8052,7 @@
             </a:r>
             <a:r>
               <a:rPr lang="en-IN" dirty="0"/>
-              <a:t> Nazrul Hoque</a:t>
+              <a:t> Nazrul Hoque, </a:t>
             </a:r>
           </a:p>
           <a:p>
@@ -8078,6 +8311,18 @@
   <p:clrMapOvr>
     <a:masterClrMapping/>
   </p:clrMapOvr>
+  <mc:AlternateContent xmlns:mc="http://schemas.openxmlformats.org/markup-compatibility/2006">
+    <mc:Choice xmlns:p159="http://schemas.microsoft.com/office/powerpoint/2015/09/main" Requires="p159">
+      <p:transition xmlns:p14="http://schemas.microsoft.com/office/powerpoint/2010/main" spd="slow" p14:dur="2000">
+        <p159:morph option="byObject"/>
+      </p:transition>
+    </mc:Choice>
+    <mc:Fallback>
+      <p:transition spd="slow">
+        <p:fade/>
+      </p:transition>
+    </mc:Fallback>
+  </mc:AlternateContent>
 </p:sld>
 </file>
 
@@ -8098,82 +8343,57 @@
           <a:chExt cx="0" cy="0"/>
         </a:xfrm>
       </p:grpSpPr>
-      <p:sp>
-        <p:nvSpPr>
-          <p:cNvPr id="2" name="Title 1">
+      <p:pic>
+        <p:nvPicPr>
+          <p:cNvPr id="5" name="Content Placeholder 4">
             <a:extLst>
               <a:ext uri="{FF2B5EF4-FFF2-40B4-BE49-F238E27FC236}">
-                <a16:creationId xmlns:a16="http://schemas.microsoft.com/office/drawing/2014/main" id="{DFD43F70-8B4B-48ED-A0A4-073DFB6DA40B}"/>
+                <a16:creationId xmlns:a16="http://schemas.microsoft.com/office/drawing/2014/main" id="{3F12F22B-F31B-4F3C-8083-237A47C3F161}"/>
               </a:ext>
             </a:extLst>
           </p:cNvPr>
-          <p:cNvSpPr>
-            <a:spLocks noGrp="1"/>
-          </p:cNvSpPr>
-          <p:nvPr>
-            <p:ph type="title"/>
-          </p:nvPr>
-        </p:nvSpPr>
-        <p:spPr/>
-        <p:txBody>
-          <a:bodyPr/>
-          <a:lstStyle/>
-          <a:p>
-            <a:r>
-              <a:rPr lang="en-US" dirty="0"/>
-              <a:t>END-TO-END WORKFLOW</a:t>
-            </a:r>
-            <a:endParaRPr lang="en-IN" dirty="0"/>
-          </a:p>
-        </p:txBody>
-      </p:sp>
-      <p:sp>
-        <p:nvSpPr>
-          <p:cNvPr id="3" name="Content Placeholder 2">
-            <a:extLst>
-              <a:ext uri="{FF2B5EF4-FFF2-40B4-BE49-F238E27FC236}">
-                <a16:creationId xmlns:a16="http://schemas.microsoft.com/office/drawing/2014/main" id="{6462D8CE-11E1-46A8-B6D5-494692BA415B}"/>
-              </a:ext>
-            </a:extLst>
-          </p:cNvPr>
-          <p:cNvSpPr>
-            <a:spLocks noGrp="1"/>
-          </p:cNvSpPr>
+          <p:cNvPicPr>
+            <a:picLocks noGrp="1" noChangeAspect="1"/>
+          </p:cNvPicPr>
           <p:nvPr>
             <p:ph idx="1"/>
           </p:nvPr>
-        </p:nvSpPr>
-        <p:spPr/>
-        <p:txBody>
-          <a:bodyPr/>
-          <a:lstStyle/>
-          <a:p>
-            <a:r>
-              <a:rPr lang="en-US" dirty="0"/>
-              <a:t>1. Access 2. Connect Voter opens React app. </a:t>
-            </a:r>
-            <a:r>
-              <a:rPr lang="en-US" dirty="0" err="1"/>
-              <a:t>MetaMask</a:t>
-            </a:r>
-            <a:r>
-              <a:rPr lang="en-US" dirty="0"/>
-              <a:t> wallet links identity. 3. Cast Voter selects candidate and signs. 4. Validate Contract checks for duplicate address. 5. Finalize Vote stored; real-time dashboard updates.</a:t>
-            </a:r>
-            <a:endParaRPr lang="en-IN" dirty="0"/>
-          </a:p>
-        </p:txBody>
-      </p:sp>
+        </p:nvPicPr>
+        <p:blipFill>
+          <a:blip r:embed="rId2"/>
+          <a:stretch>
+            <a:fillRect/>
+          </a:stretch>
+        </p:blipFill>
+        <p:spPr>
+          <a:xfrm>
+            <a:off x="1260143" y="352425"/>
+            <a:ext cx="10316658" cy="6153150"/>
+          </a:xfrm>
+        </p:spPr>
+      </p:pic>
     </p:spTree>
     <p:extLst>
       <p:ext uri="{BB962C8B-B14F-4D97-AF65-F5344CB8AC3E}">
-        <p14:creationId xmlns:p14="http://schemas.microsoft.com/office/powerpoint/2010/main" val="3582345271"/>
+        <p14:creationId xmlns:p14="http://schemas.microsoft.com/office/powerpoint/2010/main" val="2782252966"/>
       </p:ext>
     </p:extLst>
   </p:cSld>
   <p:clrMapOvr>
     <a:masterClrMapping/>
   </p:clrMapOvr>
+  <mc:AlternateContent xmlns:mc="http://schemas.openxmlformats.org/markup-compatibility/2006">
+    <mc:Choice xmlns:p159="http://schemas.microsoft.com/office/powerpoint/2015/09/main" Requires="p159">
+      <p:transition xmlns:p14="http://schemas.microsoft.com/office/powerpoint/2010/main" spd="slow" p14:dur="2000">
+        <p159:morph option="byObject"/>
+      </p:transition>
+    </mc:Choice>
+    <mc:Fallback>
+      <p:transition spd="slow">
+        <p:fade/>
+      </p:transition>
+    </mc:Fallback>
+  </mc:AlternateContent>
 </p:sld>
 </file>
 
@@ -8199,7 +8419,7 @@
           <p:cNvPr id="2" name="Title 1">
             <a:extLst>
               <a:ext uri="{FF2B5EF4-FFF2-40B4-BE49-F238E27FC236}">
-                <a16:creationId xmlns:a16="http://schemas.microsoft.com/office/drawing/2014/main" id="{4E217BCE-735B-4247-B683-AC4A230F552F}"/>
+                <a16:creationId xmlns:a16="http://schemas.microsoft.com/office/drawing/2014/main" id="{8356614D-0EFA-4EB1-94BD-ABF0321F9081}"/>
               </a:ext>
             </a:extLst>
           </p:cNvPr>
@@ -8216,10 +8436,9 @@
           <a:lstStyle/>
           <a:p>
             <a:r>
-              <a:rPr lang="en-US" dirty="0"/>
-              <a:t>SMART CONTRACT DESIGN</a:t>
-            </a:r>
-            <a:endParaRPr lang="en-IN" dirty="0"/>
+              <a:rPr lang="en-IN" dirty="0"/>
+              <a:t>Blockchain Stack</a:t>
+            </a:r>
           </a:p>
         </p:txBody>
       </p:sp>
@@ -8228,7 +8447,7 @@
           <p:cNvPr id="3" name="Content Placeholder 2">
             <a:extLst>
               <a:ext uri="{FF2B5EF4-FFF2-40B4-BE49-F238E27FC236}">
-                <a16:creationId xmlns:a16="http://schemas.microsoft.com/office/drawing/2014/main" id="{16911002-CCA6-41A9-BE6B-0654C6042421}"/>
+                <a16:creationId xmlns:a16="http://schemas.microsoft.com/office/drawing/2014/main" id="{B1AEEA2B-915F-4242-877A-256C19DCDC49}"/>
               </a:ext>
             </a:extLst>
           </p:cNvPr>
@@ -8244,10 +8463,83 @@
           <a:bodyPr/>
           <a:lstStyle/>
           <a:p>
+            <a:pPr>
+              <a:buFont typeface="Wingdings" panose="05000000000000000000" pitchFamily="2" charset="2"/>
+              <a:buChar char="Ø"/>
+            </a:pPr>
+            <a:r>
+              <a:rPr lang="en-IN" dirty="0"/>
+              <a:t>Ethereum - Decentralized blockchain network</a:t>
+            </a:r>
+          </a:p>
+          <a:p>
+            <a:pPr>
+              <a:buFont typeface="Wingdings" panose="05000000000000000000" pitchFamily="2" charset="2"/>
+              <a:buChar char="Ø"/>
+            </a:pPr>
+            <a:r>
+              <a:rPr lang="en-IN" dirty="0"/>
+              <a:t>Solidity - Smart contract development</a:t>
+            </a:r>
+            <a:endParaRPr lang="en-IN" b="1" i="0" dirty="0">
+              <a:solidFill>
+                <a:srgbClr val="0D0D0D"/>
+              </a:solidFill>
+              <a:effectLst/>
+              <a:latin typeface="Segoe UI Variable Text" pitchFamily="2" charset="0"/>
+            </a:endParaRPr>
+          </a:p>
+          <a:p>
+            <a:pPr>
+              <a:buFont typeface="Wingdings" panose="05000000000000000000" pitchFamily="2" charset="2"/>
+              <a:buChar char="Ø"/>
+            </a:pPr>
+            <a:r>
+              <a:rPr lang="en-IN" dirty="0"/>
+              <a:t>Smart Contracts - </a:t>
+            </a:r>
             <a:r>
               <a:rPr lang="en-US" dirty="0"/>
-              <a:t>Candidate Management: Mapping structures to store candidate profiles securely. State Management: Modifier-restricted functions for Admin controls (Register, Close). Event Emitting: Blockchain logs that allow the frontend to listen for live updates. Gas Optimization: Minimal storage patterns to reduce transaction costs for voters.</a:t>
-            </a:r>
+              <a:t>Automated voting logic and election management</a:t>
+            </a:r>
+            <a:endParaRPr lang="en-IN" dirty="0"/>
+          </a:p>
+          <a:p>
+            <a:pPr>
+              <a:buFont typeface="Wingdings" panose="05000000000000000000" pitchFamily="2" charset="2"/>
+              <a:buChar char="Ø"/>
+            </a:pPr>
+            <a:r>
+              <a:rPr lang="en-IN" dirty="0"/>
+              <a:t>MetaMask - </a:t>
+            </a:r>
+            <a:r>
+              <a:rPr lang="en-US" dirty="0"/>
+              <a:t>Wallet authentication and transaction signing</a:t>
+            </a:r>
+            <a:endParaRPr lang="en-IN" dirty="0"/>
+          </a:p>
+          <a:p>
+            <a:pPr>
+              <a:buFont typeface="Wingdings" panose="05000000000000000000" pitchFamily="2" charset="2"/>
+              <a:buChar char="Ø"/>
+            </a:pPr>
+            <a:r>
+              <a:rPr lang="en-IN" dirty="0"/>
+              <a:t>Ethers.js - Frontend and blockchain interaction</a:t>
+            </a:r>
+          </a:p>
+          <a:p>
+            <a:pPr marL="0" indent="0">
+              <a:buNone/>
+            </a:pPr>
+            <a:endParaRPr lang="en-IN" dirty="0"/>
+          </a:p>
+          <a:p>
+            <a:pPr>
+              <a:buFont typeface="Wingdings" panose="05000000000000000000" pitchFamily="2" charset="2"/>
+              <a:buChar char="Ø"/>
+            </a:pPr>
             <a:endParaRPr lang="en-IN" dirty="0"/>
           </a:p>
         </p:txBody>
@@ -8255,13 +8547,25 @@
     </p:spTree>
     <p:extLst>
       <p:ext uri="{BB962C8B-B14F-4D97-AF65-F5344CB8AC3E}">
-        <p14:creationId xmlns:p14="http://schemas.microsoft.com/office/powerpoint/2010/main" val="1406731701"/>
+        <p14:creationId xmlns:p14="http://schemas.microsoft.com/office/powerpoint/2010/main" val="2029022322"/>
       </p:ext>
     </p:extLst>
   </p:cSld>
   <p:clrMapOvr>
     <a:masterClrMapping/>
   </p:clrMapOvr>
+  <mc:AlternateContent xmlns:mc="http://schemas.openxmlformats.org/markup-compatibility/2006">
+    <mc:Choice xmlns:p159="http://schemas.microsoft.com/office/powerpoint/2015/09/main" Requires="p159">
+      <p:transition xmlns:p14="http://schemas.microsoft.com/office/powerpoint/2010/main" spd="slow" p14:dur="2000">
+        <p159:morph option="byObject"/>
+      </p:transition>
+    </mc:Choice>
+    <mc:Fallback>
+      <p:transition spd="slow">
+        <p:fade/>
+      </p:transition>
+    </mc:Fallback>
+  </mc:AlternateContent>
 </p:sld>
 </file>
 
@@ -8287,7 +8591,7 @@
           <p:cNvPr id="2" name="Title 1">
             <a:extLst>
               <a:ext uri="{FF2B5EF4-FFF2-40B4-BE49-F238E27FC236}">
-                <a16:creationId xmlns:a16="http://schemas.microsoft.com/office/drawing/2014/main" id="{F4DCB541-C325-4F35-9DEF-EE9C34A638BE}"/>
+                <a16:creationId xmlns:a16="http://schemas.microsoft.com/office/drawing/2014/main" id="{9194B5DB-A3EE-42E4-A7A6-1D4B27838957}"/>
               </a:ext>
             </a:extLst>
           </p:cNvPr>
@@ -8305,728 +8609,134 @@
           <a:p>
             <a:r>
               <a:rPr lang="en-IN" dirty="0"/>
-              <a:t>IMPLEMENTATION STATUS</a:t>
+              <a:t>Blockchain Development Environment</a:t>
             </a:r>
           </a:p>
         </p:txBody>
       </p:sp>
-      <p:graphicFrame>
-        <p:nvGraphicFramePr>
-          <p:cNvPr id="4" name="Content Placeholder 3">
+      <p:sp>
+        <p:nvSpPr>
+          <p:cNvPr id="6" name="Content Placeholder 5">
             <a:extLst>
               <a:ext uri="{FF2B5EF4-FFF2-40B4-BE49-F238E27FC236}">
-                <a16:creationId xmlns:a16="http://schemas.microsoft.com/office/drawing/2014/main" id="{09EA2986-F094-456E-93C3-6FB0E7BCA96D}"/>
+                <a16:creationId xmlns:a16="http://schemas.microsoft.com/office/drawing/2014/main" id="{472F8407-62FA-4B5A-81AA-81F31372FDE8}"/>
               </a:ext>
             </a:extLst>
           </p:cNvPr>
-          <p:cNvGraphicFramePr>
-            <a:graphicFrameLocks noGrp="1"/>
-          </p:cNvGraphicFramePr>
+          <p:cNvSpPr>
+            <a:spLocks noGrp="1"/>
+          </p:cNvSpPr>
           <p:nvPr>
             <p:ph idx="1"/>
-            <p:extLst>
-              <p:ext uri="{D42A27DB-BD31-4B8C-83A1-F6EECF244321}">
-                <p14:modId xmlns:p14="http://schemas.microsoft.com/office/powerpoint/2010/main" val="1230471244"/>
-              </p:ext>
-            </p:extLst>
-          </p:nvPr>
-        </p:nvGraphicFramePr>
-        <p:xfrm>
-          <a:off x="2832100" y="1993900"/>
-          <a:ext cx="7315200" cy="3728722"/>
-        </p:xfrm>
-        <a:graphic>
-          <a:graphicData uri="http://schemas.openxmlformats.org/drawingml/2006/table">
-            <a:tbl>
-              <a:tblPr/>
-              <a:tblGrid>
-                <a:gridCol w="3657600">
-                  <a:extLst>
-                    <a:ext uri="{9D8B030D-6E8A-4147-A177-3AD203B41FA5}">
-                      <a16:colId xmlns:a16="http://schemas.microsoft.com/office/drawing/2014/main" val="3347574788"/>
-                    </a:ext>
-                  </a:extLst>
-                </a:gridCol>
-                <a:gridCol w="3657600">
-                  <a:extLst>
-                    <a:ext uri="{9D8B030D-6E8A-4147-A177-3AD203B41FA5}">
-                      <a16:colId xmlns:a16="http://schemas.microsoft.com/office/drawing/2014/main" val="2214162468"/>
-                    </a:ext>
-                  </a:extLst>
-                </a:gridCol>
-              </a:tblGrid>
-              <a:tr h="602869">
-                <a:tc>
-                  <a:txBody>
-                    <a:bodyPr/>
-                    <a:lstStyle/>
-                    <a:p>
-                      <a:pPr algn="ctr"/>
-                      <a:r>
-                        <a:rPr lang="en-IN" b="1" i="0" u="sng" dirty="0"/>
-                        <a:t>Module</a:t>
-                      </a:r>
-                    </a:p>
-                  </a:txBody>
-                  <a:tcPr anchor="ctr">
-                    <a:lnL w="12700" cap="flat" cmpd="sng" algn="ctr">
-                      <a:solidFill>
-                        <a:schemeClr val="tx1"/>
-                      </a:solidFill>
-                      <a:prstDash val="solid"/>
-                      <a:round/>
-                      <a:headEnd type="none" w="med" len="med"/>
-                      <a:tailEnd type="none" w="med" len="med"/>
-                    </a:lnL>
-                    <a:lnR w="12700" cap="flat" cmpd="sng" algn="ctr">
-                      <a:solidFill>
-                        <a:schemeClr val="tx1"/>
-                      </a:solidFill>
-                      <a:prstDash val="solid"/>
-                      <a:round/>
-                      <a:headEnd type="none" w="med" len="med"/>
-                      <a:tailEnd type="none" w="med" len="med"/>
-                    </a:lnR>
-                    <a:lnT w="12700" cap="flat" cmpd="sng" algn="ctr">
-                      <a:solidFill>
-                        <a:schemeClr val="tx1"/>
-                      </a:solidFill>
-                      <a:prstDash val="solid"/>
-                      <a:round/>
-                      <a:headEnd type="none" w="med" len="med"/>
-                      <a:tailEnd type="none" w="med" len="med"/>
-                    </a:lnT>
-                    <a:lnB w="12700" cap="flat" cmpd="sng" algn="ctr">
-                      <a:solidFill>
-                        <a:schemeClr val="tx1"/>
-                      </a:solidFill>
-                      <a:prstDash val="solid"/>
-                      <a:round/>
-                      <a:headEnd type="none" w="med" len="med"/>
-                      <a:tailEnd type="none" w="med" len="med"/>
-                    </a:lnB>
-                  </a:tcPr>
-                </a:tc>
-                <a:tc>
-                  <a:txBody>
-                    <a:bodyPr/>
-                    <a:lstStyle/>
-                    <a:p>
-                      <a:pPr algn="ctr"/>
-                      <a:r>
-                        <a:rPr lang="en-IN" b="1" i="0" u="sng"/>
-                        <a:t>Status</a:t>
-                      </a:r>
-                    </a:p>
-                  </a:txBody>
-                  <a:tcPr anchor="ctr">
-                    <a:lnL w="12700" cap="flat" cmpd="sng" algn="ctr">
-                      <a:solidFill>
-                        <a:schemeClr val="tx1"/>
-                      </a:solidFill>
-                      <a:prstDash val="solid"/>
-                      <a:round/>
-                      <a:headEnd type="none" w="med" len="med"/>
-                      <a:tailEnd type="none" w="med" len="med"/>
-                    </a:lnL>
-                    <a:lnR w="12700" cap="flat" cmpd="sng" algn="ctr">
-                      <a:solidFill>
-                        <a:schemeClr val="tx1"/>
-                      </a:solidFill>
-                      <a:prstDash val="solid"/>
-                      <a:round/>
-                      <a:headEnd type="none" w="med" len="med"/>
-                      <a:tailEnd type="none" w="med" len="med"/>
-                    </a:lnR>
-                    <a:lnT w="12700" cap="flat" cmpd="sng" algn="ctr">
-                      <a:solidFill>
-                        <a:schemeClr val="tx1"/>
-                      </a:solidFill>
-                      <a:prstDash val="solid"/>
-                      <a:round/>
-                      <a:headEnd type="none" w="med" len="med"/>
-                      <a:tailEnd type="none" w="med" len="med"/>
-                    </a:lnT>
-                    <a:lnB w="12700" cap="flat" cmpd="sng" algn="ctr">
-                      <a:solidFill>
-                        <a:schemeClr val="tx1"/>
-                      </a:solidFill>
-                      <a:prstDash val="solid"/>
-                      <a:round/>
-                      <a:headEnd type="none" w="med" len="med"/>
-                      <a:tailEnd type="none" w="med" len="med"/>
-                    </a:lnB>
-                  </a:tcPr>
-                </a:tc>
-                <a:extLst>
-                  <a:ext uri="{0D108BD9-81ED-4DB2-BD59-A6C34878D82A}">
-                    <a16:rowId xmlns:a16="http://schemas.microsoft.com/office/drawing/2014/main" val="2555820274"/>
-                  </a:ext>
-                </a:extLst>
-              </a:tr>
-              <a:tr h="714377">
-                <a:tc>
-                  <a:txBody>
-                    <a:bodyPr/>
-                    <a:lstStyle/>
-                    <a:p>
-                      <a:pPr algn="l"/>
-                      <a:r>
-                        <a:rPr lang="en-IN" dirty="0"/>
-                        <a:t>Smart Contract / Voting Logic</a:t>
-                      </a:r>
-                    </a:p>
-                  </a:txBody>
-                  <a:tcPr anchor="ctr">
-                    <a:lnL w="12700" cap="flat" cmpd="sng" algn="ctr">
-                      <a:solidFill>
-                        <a:schemeClr val="tx1"/>
-                      </a:solidFill>
-                      <a:prstDash val="solid"/>
-                      <a:round/>
-                      <a:headEnd type="none" w="med" len="med"/>
-                      <a:tailEnd type="none" w="med" len="med"/>
-                    </a:lnL>
-                    <a:lnR w="12700" cap="flat" cmpd="sng" algn="ctr">
-                      <a:solidFill>
-                        <a:schemeClr val="tx1"/>
-                      </a:solidFill>
-                      <a:prstDash val="solid"/>
-                      <a:round/>
-                      <a:headEnd type="none" w="med" len="med"/>
-                      <a:tailEnd type="none" w="med" len="med"/>
-                    </a:lnR>
-                    <a:lnT w="12700" cap="flat" cmpd="sng" algn="ctr">
-                      <a:solidFill>
-                        <a:schemeClr val="tx1"/>
-                      </a:solidFill>
-                      <a:prstDash val="solid"/>
-                      <a:round/>
-                      <a:headEnd type="none" w="med" len="med"/>
-                      <a:tailEnd type="none" w="med" len="med"/>
-                    </a:lnT>
-                    <a:lnB w="12700" cap="flat" cmpd="sng" algn="ctr">
-                      <a:solidFill>
-                        <a:schemeClr val="tx1"/>
-                      </a:solidFill>
-                      <a:prstDash val="solid"/>
-                      <a:round/>
-                      <a:headEnd type="none" w="med" len="med"/>
-                      <a:tailEnd type="none" w="med" len="med"/>
-                    </a:lnB>
-                  </a:tcPr>
-                </a:tc>
-                <a:tc>
-                  <a:txBody>
-                    <a:bodyPr/>
-                    <a:lstStyle/>
-                    <a:p>
-                      <a:pPr algn="l"/>
-                      <a:r>
-                        <a:rPr lang="en-IN"/>
-                        <a:t>Completed</a:t>
-                      </a:r>
-                    </a:p>
-                  </a:txBody>
-                  <a:tcPr anchor="ctr">
-                    <a:lnL w="12700" cap="flat" cmpd="sng" algn="ctr">
-                      <a:solidFill>
-                        <a:schemeClr val="tx1"/>
-                      </a:solidFill>
-                      <a:prstDash val="solid"/>
-                      <a:round/>
-                      <a:headEnd type="none" w="med" len="med"/>
-                      <a:tailEnd type="none" w="med" len="med"/>
-                    </a:lnL>
-                    <a:lnR w="12700" cap="flat" cmpd="sng" algn="ctr">
-                      <a:solidFill>
-                        <a:schemeClr val="tx1"/>
-                      </a:solidFill>
-                      <a:prstDash val="solid"/>
-                      <a:round/>
-                      <a:headEnd type="none" w="med" len="med"/>
-                      <a:tailEnd type="none" w="med" len="med"/>
-                    </a:lnR>
-                    <a:lnT w="12700" cap="flat" cmpd="sng" algn="ctr">
-                      <a:solidFill>
-                        <a:schemeClr val="tx1"/>
-                      </a:solidFill>
-                      <a:prstDash val="solid"/>
-                      <a:round/>
-                      <a:headEnd type="none" w="med" len="med"/>
-                      <a:tailEnd type="none" w="med" len="med"/>
-                    </a:lnT>
-                    <a:lnB w="12700" cap="flat" cmpd="sng" algn="ctr">
-                      <a:solidFill>
-                        <a:schemeClr val="tx1"/>
-                      </a:solidFill>
-                      <a:prstDash val="solid"/>
-                      <a:round/>
-                      <a:headEnd type="none" w="med" len="med"/>
-                      <a:tailEnd type="none" w="med" len="med"/>
-                    </a:lnB>
-                  </a:tcPr>
-                </a:tc>
-                <a:extLst>
-                  <a:ext uri="{0D108BD9-81ED-4DB2-BD59-A6C34878D82A}">
-                    <a16:rowId xmlns:a16="http://schemas.microsoft.com/office/drawing/2014/main" val="2457473368"/>
-                  </a:ext>
-                </a:extLst>
-              </a:tr>
-              <a:tr h="602869">
-                <a:tc>
-                  <a:txBody>
-                    <a:bodyPr/>
-                    <a:lstStyle/>
-                    <a:p>
-                      <a:pPr algn="l"/>
-                      <a:r>
-                        <a:rPr lang="en-IN" dirty="0" err="1"/>
-                        <a:t>MetaMask</a:t>
-                      </a:r>
-                      <a:r>
-                        <a:rPr lang="en-IN" dirty="0"/>
-                        <a:t> Sync</a:t>
-                      </a:r>
-                    </a:p>
-                  </a:txBody>
-                  <a:tcPr anchor="ctr">
-                    <a:lnL w="12700" cap="flat" cmpd="sng" algn="ctr">
-                      <a:solidFill>
-                        <a:schemeClr val="tx1"/>
-                      </a:solidFill>
-                      <a:prstDash val="solid"/>
-                      <a:round/>
-                      <a:headEnd type="none" w="med" len="med"/>
-                      <a:tailEnd type="none" w="med" len="med"/>
-                    </a:lnL>
-                    <a:lnR w="12700" cap="flat" cmpd="sng" algn="ctr">
-                      <a:solidFill>
-                        <a:schemeClr val="tx1"/>
-                      </a:solidFill>
-                      <a:prstDash val="solid"/>
-                      <a:round/>
-                      <a:headEnd type="none" w="med" len="med"/>
-                      <a:tailEnd type="none" w="med" len="med"/>
-                    </a:lnR>
-                    <a:lnT w="12700" cap="flat" cmpd="sng" algn="ctr">
-                      <a:solidFill>
-                        <a:schemeClr val="tx1"/>
-                      </a:solidFill>
-                      <a:prstDash val="solid"/>
-                      <a:round/>
-                      <a:headEnd type="none" w="med" len="med"/>
-                      <a:tailEnd type="none" w="med" len="med"/>
-                    </a:lnT>
-                    <a:lnB w="12700" cap="flat" cmpd="sng" algn="ctr">
-                      <a:solidFill>
-                        <a:schemeClr val="tx1"/>
-                      </a:solidFill>
-                      <a:prstDash val="solid"/>
-                      <a:round/>
-                      <a:headEnd type="none" w="med" len="med"/>
-                      <a:tailEnd type="none" w="med" len="med"/>
-                    </a:lnB>
-                  </a:tcPr>
-                </a:tc>
-                <a:tc>
-                  <a:txBody>
-                    <a:bodyPr/>
-                    <a:lstStyle/>
-                    <a:p>
-                      <a:pPr algn="l"/>
-                      <a:r>
-                        <a:rPr lang="en-IN" dirty="0"/>
-                        <a:t>Completed</a:t>
-                      </a:r>
-                    </a:p>
-                  </a:txBody>
-                  <a:tcPr anchor="ctr">
-                    <a:lnL w="12700" cap="flat" cmpd="sng" algn="ctr">
-                      <a:solidFill>
-                        <a:schemeClr val="tx1"/>
-                      </a:solidFill>
-                      <a:prstDash val="solid"/>
-                      <a:round/>
-                      <a:headEnd type="none" w="med" len="med"/>
-                      <a:tailEnd type="none" w="med" len="med"/>
-                    </a:lnL>
-                    <a:lnR w="12700" cap="flat" cmpd="sng" algn="ctr">
-                      <a:solidFill>
-                        <a:schemeClr val="tx1"/>
-                      </a:solidFill>
-                      <a:prstDash val="solid"/>
-                      <a:round/>
-                      <a:headEnd type="none" w="med" len="med"/>
-                      <a:tailEnd type="none" w="med" len="med"/>
-                    </a:lnR>
-                    <a:lnT w="12700" cap="flat" cmpd="sng" algn="ctr">
-                      <a:solidFill>
-                        <a:schemeClr val="tx1"/>
-                      </a:solidFill>
-                      <a:prstDash val="solid"/>
-                      <a:round/>
-                      <a:headEnd type="none" w="med" len="med"/>
-                      <a:tailEnd type="none" w="med" len="med"/>
-                    </a:lnT>
-                    <a:lnB w="12700" cap="flat" cmpd="sng" algn="ctr">
-                      <a:solidFill>
-                        <a:schemeClr val="tx1"/>
-                      </a:solidFill>
-                      <a:prstDash val="solid"/>
-                      <a:round/>
-                      <a:headEnd type="none" w="med" len="med"/>
-                      <a:tailEnd type="none" w="med" len="med"/>
-                    </a:lnB>
-                  </a:tcPr>
-                </a:tc>
-                <a:extLst>
-                  <a:ext uri="{0D108BD9-81ED-4DB2-BD59-A6C34878D82A}">
-                    <a16:rowId xmlns:a16="http://schemas.microsoft.com/office/drawing/2014/main" val="2750411029"/>
-                  </a:ext>
-                </a:extLst>
-              </a:tr>
-              <a:tr h="602869">
-                <a:tc>
-                  <a:txBody>
-                    <a:bodyPr/>
-                    <a:lstStyle/>
-                    <a:p>
-                      <a:pPr algn="l"/>
-                      <a:r>
-                        <a:rPr lang="en-IN" dirty="0"/>
-                        <a:t>Live Dashboard</a:t>
-                      </a:r>
-                    </a:p>
-                  </a:txBody>
-                  <a:tcPr anchor="ctr">
-                    <a:lnL w="12700" cap="flat" cmpd="sng" algn="ctr">
-                      <a:solidFill>
-                        <a:schemeClr val="tx1"/>
-                      </a:solidFill>
-                      <a:prstDash val="solid"/>
-                      <a:round/>
-                      <a:headEnd type="none" w="med" len="med"/>
-                      <a:tailEnd type="none" w="med" len="med"/>
-                    </a:lnL>
-                    <a:lnR w="12700" cap="flat" cmpd="sng" algn="ctr">
-                      <a:solidFill>
-                        <a:schemeClr val="tx1"/>
-                      </a:solidFill>
-                      <a:prstDash val="solid"/>
-                      <a:round/>
-                      <a:headEnd type="none" w="med" len="med"/>
-                      <a:tailEnd type="none" w="med" len="med"/>
-                    </a:lnR>
-                    <a:lnT w="12700" cap="flat" cmpd="sng" algn="ctr">
-                      <a:solidFill>
-                        <a:schemeClr val="tx1"/>
-                      </a:solidFill>
-                      <a:prstDash val="solid"/>
-                      <a:round/>
-                      <a:headEnd type="none" w="med" len="med"/>
-                      <a:tailEnd type="none" w="med" len="med"/>
-                    </a:lnT>
-                    <a:lnB w="12700" cap="flat" cmpd="sng" algn="ctr">
-                      <a:solidFill>
-                        <a:schemeClr val="tx1"/>
-                      </a:solidFill>
-                      <a:prstDash val="solid"/>
-                      <a:round/>
-                      <a:headEnd type="none" w="med" len="med"/>
-                      <a:tailEnd type="none" w="med" len="med"/>
-                    </a:lnB>
-                  </a:tcPr>
-                </a:tc>
-                <a:tc>
-                  <a:txBody>
-                    <a:bodyPr/>
-                    <a:lstStyle/>
-                    <a:p>
-                      <a:pPr algn="l"/>
-                      <a:r>
-                        <a:rPr lang="en-IN" dirty="0"/>
-                        <a:t>Completed</a:t>
-                      </a:r>
-                    </a:p>
-                  </a:txBody>
-                  <a:tcPr anchor="ctr">
-                    <a:lnL w="12700" cap="flat" cmpd="sng" algn="ctr">
-                      <a:solidFill>
-                        <a:schemeClr val="tx1"/>
-                      </a:solidFill>
-                      <a:prstDash val="solid"/>
-                      <a:round/>
-                      <a:headEnd type="none" w="med" len="med"/>
-                      <a:tailEnd type="none" w="med" len="med"/>
-                    </a:lnL>
-                    <a:lnR w="12700" cap="flat" cmpd="sng" algn="ctr">
-                      <a:solidFill>
-                        <a:schemeClr val="tx1"/>
-                      </a:solidFill>
-                      <a:prstDash val="solid"/>
-                      <a:round/>
-                      <a:headEnd type="none" w="med" len="med"/>
-                      <a:tailEnd type="none" w="med" len="med"/>
-                    </a:lnR>
-                    <a:lnT w="12700" cap="flat" cmpd="sng" algn="ctr">
-                      <a:solidFill>
-                        <a:schemeClr val="tx1"/>
-                      </a:solidFill>
-                      <a:prstDash val="solid"/>
-                      <a:round/>
-                      <a:headEnd type="none" w="med" len="med"/>
-                      <a:tailEnd type="none" w="med" len="med"/>
-                    </a:lnT>
-                    <a:lnB w="12700" cap="flat" cmpd="sng" algn="ctr">
-                      <a:solidFill>
-                        <a:schemeClr val="tx1"/>
-                      </a:solidFill>
-                      <a:prstDash val="solid"/>
-                      <a:round/>
-                      <a:headEnd type="none" w="med" len="med"/>
-                      <a:tailEnd type="none" w="med" len="med"/>
-                    </a:lnB>
-                  </a:tcPr>
-                </a:tc>
-                <a:extLst>
-                  <a:ext uri="{0D108BD9-81ED-4DB2-BD59-A6C34878D82A}">
-                    <a16:rowId xmlns:a16="http://schemas.microsoft.com/office/drawing/2014/main" val="891953787"/>
-                  </a:ext>
-                </a:extLst>
-              </a:tr>
-              <a:tr h="602869">
-                <a:tc>
-                  <a:txBody>
-                    <a:bodyPr/>
-                    <a:lstStyle/>
-                    <a:p>
-                      <a:pPr algn="l"/>
-                      <a:r>
-                        <a:rPr lang="en-IN" dirty="0"/>
-                        <a:t>Candidate Registration</a:t>
-                      </a:r>
-                    </a:p>
-                  </a:txBody>
-                  <a:tcPr anchor="ctr">
-                    <a:lnL w="12700" cap="flat" cmpd="sng" algn="ctr">
-                      <a:solidFill>
-                        <a:schemeClr val="tx1"/>
-                      </a:solidFill>
-                      <a:prstDash val="solid"/>
-                      <a:round/>
-                      <a:headEnd type="none" w="med" len="med"/>
-                      <a:tailEnd type="none" w="med" len="med"/>
-                    </a:lnL>
-                    <a:lnR w="12700" cap="flat" cmpd="sng" algn="ctr">
-                      <a:solidFill>
-                        <a:schemeClr val="tx1"/>
-                      </a:solidFill>
-                      <a:prstDash val="solid"/>
-                      <a:round/>
-                      <a:headEnd type="none" w="med" len="med"/>
-                      <a:tailEnd type="none" w="med" len="med"/>
-                    </a:lnR>
-                    <a:lnT w="12700" cap="flat" cmpd="sng" algn="ctr">
-                      <a:solidFill>
-                        <a:schemeClr val="tx1"/>
-                      </a:solidFill>
-                      <a:prstDash val="solid"/>
-                      <a:round/>
-                      <a:headEnd type="none" w="med" len="med"/>
-                      <a:tailEnd type="none" w="med" len="med"/>
-                    </a:lnT>
-                    <a:lnB w="12700" cap="flat" cmpd="sng" algn="ctr">
-                      <a:solidFill>
-                        <a:schemeClr val="tx1"/>
-                      </a:solidFill>
-                      <a:prstDash val="solid"/>
-                      <a:round/>
-                      <a:headEnd type="none" w="med" len="med"/>
-                      <a:tailEnd type="none" w="med" len="med"/>
-                    </a:lnB>
-                  </a:tcPr>
-                </a:tc>
-                <a:tc>
-                  <a:txBody>
-                    <a:bodyPr/>
-                    <a:lstStyle/>
-                    <a:p>
-                      <a:pPr algn="l"/>
-                      <a:r>
-                        <a:rPr lang="en-IN"/>
-                        <a:t>Completed</a:t>
-                      </a:r>
-                    </a:p>
-                  </a:txBody>
-                  <a:tcPr anchor="ctr">
-                    <a:lnL w="12700" cap="flat" cmpd="sng" algn="ctr">
-                      <a:solidFill>
-                        <a:schemeClr val="tx1"/>
-                      </a:solidFill>
-                      <a:prstDash val="solid"/>
-                      <a:round/>
-                      <a:headEnd type="none" w="med" len="med"/>
-                      <a:tailEnd type="none" w="med" len="med"/>
-                    </a:lnL>
-                    <a:lnR w="12700" cap="flat" cmpd="sng" algn="ctr">
-                      <a:solidFill>
-                        <a:schemeClr val="tx1"/>
-                      </a:solidFill>
-                      <a:prstDash val="solid"/>
-                      <a:round/>
-                      <a:headEnd type="none" w="med" len="med"/>
-                      <a:tailEnd type="none" w="med" len="med"/>
-                    </a:lnR>
-                    <a:lnT w="12700" cap="flat" cmpd="sng" algn="ctr">
-                      <a:solidFill>
-                        <a:schemeClr val="tx1"/>
-                      </a:solidFill>
-                      <a:prstDash val="solid"/>
-                      <a:round/>
-                      <a:headEnd type="none" w="med" len="med"/>
-                      <a:tailEnd type="none" w="med" len="med"/>
-                    </a:lnT>
-                    <a:lnB w="12700" cap="flat" cmpd="sng" algn="ctr">
-                      <a:solidFill>
-                        <a:schemeClr val="tx1"/>
-                      </a:solidFill>
-                      <a:prstDash val="solid"/>
-                      <a:round/>
-                      <a:headEnd type="none" w="med" len="med"/>
-                      <a:tailEnd type="none" w="med" len="med"/>
-                    </a:lnB>
-                  </a:tcPr>
-                </a:tc>
-                <a:extLst>
-                  <a:ext uri="{0D108BD9-81ED-4DB2-BD59-A6C34878D82A}">
-                    <a16:rowId xmlns:a16="http://schemas.microsoft.com/office/drawing/2014/main" val="3076090140"/>
-                  </a:ext>
-                </a:extLst>
-              </a:tr>
-              <a:tr h="602869">
-                <a:tc>
-                  <a:txBody>
-                    <a:bodyPr/>
-                    <a:lstStyle/>
-                    <a:p>
-                      <a:pPr algn="l"/>
-                      <a:r>
-                        <a:rPr lang="en-IN" dirty="0"/>
-                        <a:t>Vote Casting</a:t>
-                      </a:r>
-                    </a:p>
-                  </a:txBody>
-                  <a:tcPr anchor="ctr">
-                    <a:lnL w="12700" cap="flat" cmpd="sng" algn="ctr">
-                      <a:solidFill>
-                        <a:schemeClr val="tx1"/>
-                      </a:solidFill>
-                      <a:prstDash val="solid"/>
-                      <a:round/>
-                      <a:headEnd type="none" w="med" len="med"/>
-                      <a:tailEnd type="none" w="med" len="med"/>
-                    </a:lnL>
-                    <a:lnR w="12700" cap="flat" cmpd="sng" algn="ctr">
-                      <a:solidFill>
-                        <a:schemeClr val="tx1"/>
-                      </a:solidFill>
-                      <a:prstDash val="solid"/>
-                      <a:round/>
-                      <a:headEnd type="none" w="med" len="med"/>
-                      <a:tailEnd type="none" w="med" len="med"/>
-                    </a:lnR>
-                    <a:lnT w="12700" cap="flat" cmpd="sng" algn="ctr">
-                      <a:solidFill>
-                        <a:schemeClr val="tx1"/>
-                      </a:solidFill>
-                      <a:prstDash val="solid"/>
-                      <a:round/>
-                      <a:headEnd type="none" w="med" len="med"/>
-                      <a:tailEnd type="none" w="med" len="med"/>
-                    </a:lnT>
-                    <a:lnB w="12700" cap="flat" cmpd="sng" algn="ctr">
-                      <a:solidFill>
-                        <a:schemeClr val="tx1"/>
-                      </a:solidFill>
-                      <a:prstDash val="solid"/>
-                      <a:round/>
-                      <a:headEnd type="none" w="med" len="med"/>
-                      <a:tailEnd type="none" w="med" len="med"/>
-                    </a:lnB>
-                  </a:tcPr>
-                </a:tc>
-                <a:tc>
-                  <a:txBody>
-                    <a:bodyPr/>
-                    <a:lstStyle/>
-                    <a:p>
-                      <a:pPr algn="l"/>
-                      <a:r>
-                        <a:rPr lang="en-IN" dirty="0"/>
-                        <a:t>Completed</a:t>
-                      </a:r>
-                    </a:p>
-                  </a:txBody>
-                  <a:tcPr anchor="ctr">
-                    <a:lnL w="12700" cap="flat" cmpd="sng" algn="ctr">
-                      <a:solidFill>
-                        <a:schemeClr val="tx1"/>
-                      </a:solidFill>
-                      <a:prstDash val="solid"/>
-                      <a:round/>
-                      <a:headEnd type="none" w="med" len="med"/>
-                      <a:tailEnd type="none" w="med" len="med"/>
-                    </a:lnL>
-                    <a:lnR w="12700" cap="flat" cmpd="sng" algn="ctr">
-                      <a:solidFill>
-                        <a:schemeClr val="tx1"/>
-                      </a:solidFill>
-                      <a:prstDash val="solid"/>
-                      <a:round/>
-                      <a:headEnd type="none" w="med" len="med"/>
-                      <a:tailEnd type="none" w="med" len="med"/>
-                    </a:lnR>
-                    <a:lnT w="12700" cap="flat" cmpd="sng" algn="ctr">
-                      <a:solidFill>
-                        <a:schemeClr val="tx1"/>
-                      </a:solidFill>
-                      <a:prstDash val="solid"/>
-                      <a:round/>
-                      <a:headEnd type="none" w="med" len="med"/>
-                      <a:tailEnd type="none" w="med" len="med"/>
-                    </a:lnT>
-                    <a:lnB w="12700" cap="flat" cmpd="sng" algn="ctr">
-                      <a:solidFill>
-                        <a:schemeClr val="tx1"/>
-                      </a:solidFill>
-                      <a:prstDash val="solid"/>
-                      <a:round/>
-                      <a:headEnd type="none" w="med" len="med"/>
-                      <a:tailEnd type="none" w="med" len="med"/>
-                    </a:lnB>
-                  </a:tcPr>
-                </a:tc>
-                <a:extLst>
-                  <a:ext uri="{0D108BD9-81ED-4DB2-BD59-A6C34878D82A}">
-                    <a16:rowId xmlns:a16="http://schemas.microsoft.com/office/drawing/2014/main" val="1580538064"/>
-                  </a:ext>
-                </a:extLst>
-              </a:tr>
-            </a:tbl>
-          </a:graphicData>
-        </a:graphic>
-      </p:graphicFrame>
+          </p:nvPr>
+        </p:nvSpPr>
+        <p:spPr/>
+        <p:txBody>
+          <a:bodyPr/>
+          <a:lstStyle/>
+          <a:p>
+            <a:pPr>
+              <a:buFont typeface="Wingdings" panose="05000000000000000000" pitchFamily="2" charset="2"/>
+              <a:buChar char="Ø"/>
+            </a:pPr>
+            <a:r>
+              <a:rPr lang="en-IN" dirty="0"/>
+              <a:t>Hardhat - </a:t>
+            </a:r>
+            <a:r>
+              <a:rPr lang="en-US" dirty="0"/>
+              <a:t>Smart contract compilation and deployment</a:t>
+            </a:r>
+          </a:p>
+          <a:p>
+            <a:pPr>
+              <a:buFont typeface="Wingdings" panose="05000000000000000000" pitchFamily="2" charset="2"/>
+              <a:buChar char="Ø"/>
+            </a:pPr>
+            <a:r>
+              <a:rPr lang="en-IN" dirty="0"/>
+              <a:t>Ethereum </a:t>
+            </a:r>
+            <a:r>
+              <a:rPr lang="en-IN" dirty="0" err="1"/>
+              <a:t>Sepolia</a:t>
+            </a:r>
+            <a:r>
+              <a:rPr lang="en-IN" dirty="0"/>
+              <a:t> - Public blockchain </a:t>
+            </a:r>
+            <a:r>
+              <a:rPr lang="en-IN" dirty="0" err="1"/>
+              <a:t>testnet</a:t>
+            </a:r>
+            <a:r>
+              <a:rPr lang="en-IN" dirty="0"/>
+              <a:t> deployment</a:t>
+            </a:r>
+          </a:p>
+          <a:p>
+            <a:pPr>
+              <a:buFont typeface="Wingdings" panose="05000000000000000000" pitchFamily="2" charset="2"/>
+              <a:buChar char="Ø"/>
+            </a:pPr>
+            <a:r>
+              <a:rPr lang="en-IN" dirty="0"/>
+              <a:t>Node.js - Running blockchain development tools</a:t>
+            </a:r>
+          </a:p>
+          <a:p>
+            <a:pPr>
+              <a:buFont typeface="Wingdings" panose="05000000000000000000" pitchFamily="2" charset="2"/>
+              <a:buChar char="Ø"/>
+            </a:pPr>
+            <a:r>
+              <a:rPr lang="en-IN" dirty="0" err="1"/>
+              <a:t>Npm</a:t>
+            </a:r>
+            <a:r>
+              <a:rPr lang="en-IN" dirty="0"/>
+              <a:t> - Dependency and package management</a:t>
+            </a:r>
+          </a:p>
+          <a:p>
+            <a:endParaRPr lang="en-IN" dirty="0"/>
+          </a:p>
+          <a:p>
+            <a:endParaRPr lang="en-IN" dirty="0"/>
+          </a:p>
+          <a:p>
+            <a:endParaRPr lang="en-IN" dirty="0"/>
+          </a:p>
+          <a:p>
+            <a:endParaRPr lang="en-US" dirty="0"/>
+          </a:p>
+          <a:p>
+            <a:endParaRPr lang="en-IN" dirty="0"/>
+          </a:p>
+        </p:txBody>
+      </p:sp>
     </p:spTree>
     <p:extLst>
       <p:ext uri="{BB962C8B-B14F-4D97-AF65-F5344CB8AC3E}">
-        <p14:creationId xmlns:p14="http://schemas.microsoft.com/office/powerpoint/2010/main" val="2518226199"/>
+        <p14:creationId xmlns:p14="http://schemas.microsoft.com/office/powerpoint/2010/main" val="1371069416"/>
       </p:ext>
     </p:extLst>
   </p:cSld>
   <p:clrMapOvr>
     <a:masterClrMapping/>
   </p:clrMapOvr>
+  <mc:AlternateContent xmlns:mc="http://schemas.openxmlformats.org/markup-compatibility/2006">
+    <mc:Choice xmlns:p159="http://schemas.microsoft.com/office/powerpoint/2015/09/main" Requires="p159">
+      <p:transition xmlns:p14="http://schemas.microsoft.com/office/powerpoint/2010/main" spd="slow" p14:dur="2000">
+        <p159:morph option="byObject"/>
+      </p:transition>
+    </mc:Choice>
+    <mc:Fallback>
+      <p:transition spd="slow">
+        <p:fade/>
+      </p:transition>
+    </mc:Fallback>
+  </mc:AlternateContent>
 </p:sld>
 </file>
 
@@ -9052,7 +8762,7 @@
           <p:cNvPr id="2" name="Title 1">
             <a:extLst>
               <a:ext uri="{FF2B5EF4-FFF2-40B4-BE49-F238E27FC236}">
-                <a16:creationId xmlns:a16="http://schemas.microsoft.com/office/drawing/2014/main" id="{FEDAA15C-20E5-4E52-B253-CA8898AE0446}"/>
+                <a16:creationId xmlns:a16="http://schemas.microsoft.com/office/drawing/2014/main" id="{2ABCB541-33AF-4668-9956-BBE58075D263}"/>
               </a:ext>
             </a:extLst>
           </p:cNvPr>
@@ -9070,7 +8780,7 @@
           <a:p>
             <a:r>
               <a:rPr lang="en-IN" dirty="0"/>
-              <a:t>CHALLENGES FACED</a:t>
+              <a:t>Smart Contract Development</a:t>
             </a:r>
           </a:p>
         </p:txBody>
@@ -9080,7 +8790,7 @@
           <p:cNvPr id="3" name="Content Placeholder 2">
             <a:extLst>
               <a:ext uri="{FF2B5EF4-FFF2-40B4-BE49-F238E27FC236}">
-                <a16:creationId xmlns:a16="http://schemas.microsoft.com/office/drawing/2014/main" id="{865F0CAA-2754-4732-AEDE-0546A2851D5F}"/>
+                <a16:creationId xmlns:a16="http://schemas.microsoft.com/office/drawing/2014/main" id="{330A672E-37A7-456C-8A2A-ED7843779EEF}"/>
               </a:ext>
             </a:extLst>
           </p:cNvPr>
@@ -9091,80 +8801,90 @@
             <p:ph idx="1"/>
           </p:nvPr>
         </p:nvSpPr>
-        <p:spPr/>
+        <p:spPr>
+          <a:xfrm>
+            <a:off x="2141537" y="2152650"/>
+            <a:ext cx="8915400" cy="3777622"/>
+          </a:xfrm>
+        </p:spPr>
         <p:txBody>
           <a:bodyPr>
-            <a:normAutofit fontScale="92500" lnSpcReduction="10000"/>
+            <a:normAutofit/>
           </a:bodyPr>
           <a:lstStyle/>
           <a:p>
-            <a:r>
-              <a:rPr lang="en-IN" sz="2600" b="1" dirty="0"/>
-              <a:t>Network Delays</a:t>
-            </a:r>
-          </a:p>
-          <a:p>
-            <a:pPr marL="0" indent="0">
-              <a:buNone/>
+            <a:pPr lvl="1">
+              <a:buFont typeface="Wingdings" panose="05000000000000000000" pitchFamily="2" charset="2"/>
+              <a:buChar char="Ø"/>
             </a:pPr>
             <a:r>
-              <a:rPr lang="en-IN" sz="2600" dirty="0"/>
-              <a:t>	</a:t>
-            </a:r>
-            <a:r>
-              <a:rPr lang="en-IN" sz="2600" dirty="0" err="1"/>
-              <a:t>Sepolia</a:t>
-            </a:r>
-            <a:r>
-              <a:rPr lang="en-IN" sz="2600" dirty="0"/>
-              <a:t> </a:t>
-            </a:r>
-            <a:r>
-              <a:rPr lang="en-IN" sz="2600" dirty="0" err="1"/>
-              <a:t>testnet</a:t>
-            </a:r>
-            <a:r>
-              <a:rPr lang="en-IN" sz="2600" dirty="0"/>
-              <a:t> congestion caused transaction lag. </a:t>
-            </a:r>
-          </a:p>
-          <a:p>
-            <a:pPr marL="0" indent="0">
-              <a:buNone/>
+              <a:rPr lang="en-IN" b="1" dirty="0"/>
+              <a:t>Candidate Structure </a:t>
+            </a:r>
+            <a:r>
+              <a:rPr lang="en-IN" dirty="0"/>
+              <a:t>- </a:t>
+            </a:r>
+            <a:r>
+              <a:rPr lang="en-US" dirty="0"/>
+              <a:t>Implemented candidate data structure containing candidate ID, name, and vote count.</a:t>
+            </a:r>
+            <a:endParaRPr lang="en-IN" dirty="0"/>
+          </a:p>
+          <a:p>
+            <a:pPr lvl="1">
+              <a:buFont typeface="Wingdings" panose="05000000000000000000" pitchFamily="2" charset="2"/>
+              <a:buChar char="Ø"/>
             </a:pPr>
             <a:r>
-              <a:rPr lang="en-IN" sz="2600" dirty="0"/>
-              <a:t>	Solved using loading states and React spinners. </a:t>
-            </a:r>
-          </a:p>
-          <a:p>
-            <a:pPr marL="0" indent="0">
-              <a:buNone/>
+              <a:rPr lang="en-IN" b="1" dirty="0"/>
+              <a:t>Voting Function </a:t>
+            </a:r>
+            <a:r>
+              <a:rPr lang="en-IN" dirty="0"/>
+              <a:t>- </a:t>
+            </a:r>
+            <a:r>
+              <a:rPr lang="en-US" dirty="0"/>
+              <a:t>Developed smart contract voting function for secure vote casting and recording.</a:t>
+            </a:r>
+            <a:endParaRPr lang="en-IN" dirty="0"/>
+          </a:p>
+          <a:p>
+            <a:pPr lvl="1">
+              <a:buFont typeface="Wingdings" panose="05000000000000000000" pitchFamily="2" charset="2"/>
+              <a:buChar char="Ø"/>
             </a:pPr>
-            <a:endParaRPr lang="en-IN" sz="2600" dirty="0"/>
-          </a:p>
-          <a:p>
-            <a:r>
-              <a:rPr lang="en-IN" sz="2600" b="1" dirty="0"/>
-              <a:t>UI Synchronization</a:t>
-            </a:r>
-          </a:p>
-          <a:p>
-            <a:pPr marL="0" indent="0">
-              <a:buNone/>
+            <a:r>
+              <a:rPr lang="en-IN" b="1" dirty="0"/>
+              <a:t>Duplicate Vote Prevention </a:t>
+            </a:r>
+            <a:r>
+              <a:rPr lang="en-IN" dirty="0"/>
+              <a:t>- </a:t>
+            </a:r>
+            <a:r>
+              <a:rPr lang="en-US" dirty="0"/>
+              <a:t>Implemented one-person-one-vote validation using voter address tracking.</a:t>
+            </a:r>
+            <a:endParaRPr lang="en-IN" dirty="0"/>
+          </a:p>
+          <a:p>
+            <a:pPr lvl="1">
+              <a:buFont typeface="Wingdings" panose="05000000000000000000" pitchFamily="2" charset="2"/>
+              <a:buChar char="Ø"/>
             </a:pPr>
             <a:r>
-              <a:rPr lang="en-IN" sz="2600" dirty="0"/>
-              <a:t>	Keeping frontend data synced with blockchain events was difficult. </a:t>
-            </a:r>
-          </a:p>
-          <a:p>
-            <a:pPr marL="0" indent="0">
-              <a:buNone/>
-            </a:pPr>
-            <a:r>
-              <a:rPr lang="en-IN" sz="2600" dirty="0"/>
-              <a:t>	Solved using Ethers.js event listeners and state updates. </a:t>
+              <a:rPr lang="en-IN" b="1" dirty="0"/>
+              <a:t>Election Control </a:t>
+            </a:r>
+            <a:r>
+              <a:rPr lang="en-IN" dirty="0"/>
+              <a:t>- </a:t>
+            </a:r>
+            <a:r>
+              <a:rPr lang="en-US" dirty="0"/>
+              <a:t>Added election start and end control functions managed by the administrator.</a:t>
             </a:r>
           </a:p>
         </p:txBody>
@@ -9172,13 +8892,25 @@
     </p:spTree>
     <p:extLst>
       <p:ext uri="{BB962C8B-B14F-4D97-AF65-F5344CB8AC3E}">
-        <p14:creationId xmlns:p14="http://schemas.microsoft.com/office/powerpoint/2010/main" val="1292705111"/>
+        <p14:creationId xmlns:p14="http://schemas.microsoft.com/office/powerpoint/2010/main" val="2901832718"/>
       </p:ext>
     </p:extLst>
   </p:cSld>
   <p:clrMapOvr>
     <a:masterClrMapping/>
   </p:clrMapOvr>
+  <mc:AlternateContent xmlns:mc="http://schemas.openxmlformats.org/markup-compatibility/2006">
+    <mc:Choice xmlns:p159="http://schemas.microsoft.com/office/powerpoint/2015/09/main" Requires="p159">
+      <p:transition xmlns:p14="http://schemas.microsoft.com/office/powerpoint/2010/main" spd="slow" p14:dur="2000">
+        <p159:morph option="byObject"/>
+      </p:transition>
+    </mc:Choice>
+    <mc:Fallback>
+      <p:transition spd="slow">
+        <p:fade/>
+      </p:transition>
+    </mc:Fallback>
+  </mc:AlternateContent>
 </p:sld>
 </file>
 
@@ -9204,7 +8936,7 @@
           <p:cNvPr id="2" name="Title 1">
             <a:extLst>
               <a:ext uri="{FF2B5EF4-FFF2-40B4-BE49-F238E27FC236}">
-                <a16:creationId xmlns:a16="http://schemas.microsoft.com/office/drawing/2014/main" id="{69289EA3-7AD2-410A-9D11-D16EF6F7B275}"/>
+                <a16:creationId xmlns:a16="http://schemas.microsoft.com/office/drawing/2014/main" id="{557E8612-AF9B-460A-BCEA-0370BE97DD19}"/>
               </a:ext>
             </a:extLst>
           </p:cNvPr>
@@ -9222,7 +8954,7 @@
           <a:p>
             <a:r>
               <a:rPr lang="en-IN" dirty="0"/>
-              <a:t>FUTURE SCOPE</a:t>
+              <a:t>Smart Contract Deployment</a:t>
             </a:r>
           </a:p>
         </p:txBody>
@@ -9232,7 +8964,7 @@
           <p:cNvPr id="3" name="Content Placeholder 2">
             <a:extLst>
               <a:ext uri="{FF2B5EF4-FFF2-40B4-BE49-F238E27FC236}">
-                <a16:creationId xmlns:a16="http://schemas.microsoft.com/office/drawing/2014/main" id="{EBB0E9C1-2E75-4199-BFB1-50B5BA13729B}"/>
+                <a16:creationId xmlns:a16="http://schemas.microsoft.com/office/drawing/2014/main" id="{82BFBA02-3752-4C43-A4E9-5A28B0E27316}"/>
               </a:ext>
             </a:extLst>
           </p:cNvPr>
@@ -9248,33 +8980,67 @@
           <a:bodyPr/>
           <a:lstStyle/>
           <a:p>
-            <a:r>
-              <a:rPr lang="en-US" b="1" dirty="0"/>
-              <a:t>Biometrics / Face Authentication - </a:t>
-            </a:r>
-            <a:r>
-              <a:rPr lang="en-US" dirty="0"/>
-              <a:t>Linking wallets to biological ID for legally binding elections.</a:t>
-            </a:r>
-          </a:p>
-          <a:p>
-            <a:r>
-              <a:rPr lang="en-US" b="1" dirty="0"/>
-              <a:t>Mobile App - </a:t>
-            </a:r>
-            <a:r>
-              <a:rPr lang="en-US" dirty="0"/>
-              <a:t>Developing React Native versions for broader accessibility.</a:t>
-            </a:r>
-          </a:p>
-          <a:p>
-            <a:r>
-              <a:rPr lang="en-US" b="1" dirty="0"/>
-              <a:t>AI Detection - </a:t>
-            </a:r>
-            <a:r>
-              <a:rPr lang="en-US" dirty="0"/>
-              <a:t>Using machine learning to flag coordinated manipulation attempts.</a:t>
+            <a:pPr>
+              <a:buFont typeface="Wingdings" panose="05000000000000000000" pitchFamily="2" charset="2"/>
+              <a:buChar char="Ø"/>
+            </a:pPr>
+            <a:r>
+              <a:rPr lang="en-IN" b="1" dirty="0"/>
+              <a:t>Contract Compilation </a:t>
+            </a:r>
+            <a:r>
+              <a:rPr lang="en-IN" dirty="0"/>
+              <a:t>- Compiled Solidity smart contracts using Hardhat framework.</a:t>
+            </a:r>
+          </a:p>
+          <a:p>
+            <a:pPr>
+              <a:buFont typeface="Wingdings" panose="05000000000000000000" pitchFamily="2" charset="2"/>
+              <a:buChar char="Ø"/>
+            </a:pPr>
+            <a:r>
+              <a:rPr lang="en-IN" b="1" dirty="0"/>
+              <a:t>Deployment Process </a:t>
+            </a:r>
+            <a:r>
+              <a:rPr lang="en-IN" dirty="0"/>
+              <a:t>- Deployed smart contracts to Ethereum </a:t>
+            </a:r>
+            <a:r>
+              <a:rPr lang="en-IN" dirty="0" err="1"/>
+              <a:t>Sepolia</a:t>
+            </a:r>
+            <a:r>
+              <a:rPr lang="en-IN" dirty="0"/>
+              <a:t> test network.</a:t>
+            </a:r>
+          </a:p>
+          <a:p>
+            <a:pPr>
+              <a:buFont typeface="Wingdings" panose="05000000000000000000" pitchFamily="2" charset="2"/>
+              <a:buChar char="Ø"/>
+            </a:pPr>
+            <a:r>
+              <a:rPr lang="en-IN" b="1" dirty="0"/>
+              <a:t>Contract Address Generation </a:t>
+            </a:r>
+            <a:r>
+              <a:rPr lang="en-IN" dirty="0"/>
+              <a:t>- Generated unique blockchain contract address after deployment.</a:t>
+            </a:r>
+          </a:p>
+          <a:p>
+            <a:pPr>
+              <a:buFont typeface="Wingdings" panose="05000000000000000000" pitchFamily="2" charset="2"/>
+              <a:buChar char="Ø"/>
+            </a:pPr>
+            <a:r>
+              <a:rPr lang="en-IN" b="1" dirty="0"/>
+              <a:t>Blockchain Verification </a:t>
+            </a:r>
+            <a:r>
+              <a:rPr lang="en-IN" dirty="0"/>
+              <a:t>- Verified successful deployment and smart contract interaction on blockchain.</a:t>
             </a:r>
           </a:p>
           <a:p>
@@ -9285,13 +9051,25 @@
     </p:spTree>
     <p:extLst>
       <p:ext uri="{BB962C8B-B14F-4D97-AF65-F5344CB8AC3E}">
-        <p14:creationId xmlns:p14="http://schemas.microsoft.com/office/powerpoint/2010/main" val="1040966984"/>
+        <p14:creationId xmlns:p14="http://schemas.microsoft.com/office/powerpoint/2010/main" val="4057936441"/>
       </p:ext>
     </p:extLst>
   </p:cSld>
   <p:clrMapOvr>
     <a:masterClrMapping/>
   </p:clrMapOvr>
+  <mc:AlternateContent xmlns:mc="http://schemas.openxmlformats.org/markup-compatibility/2006">
+    <mc:Choice xmlns:p159="http://schemas.microsoft.com/office/powerpoint/2015/09/main" Requires="p159">
+      <p:transition xmlns:p14="http://schemas.microsoft.com/office/powerpoint/2010/main" spd="slow" p14:dur="2000">
+        <p159:morph option="byObject"/>
+      </p:transition>
+    </mc:Choice>
+    <mc:Fallback>
+      <p:transition spd="slow">
+        <p:fade/>
+      </p:transition>
+    </mc:Fallback>
+  </mc:AlternateContent>
 </p:sld>
 </file>
 
@@ -9312,151 +9090,157 @@
           <a:chExt cx="0" cy="0"/>
         </a:xfrm>
       </p:grpSpPr>
-      <p:sp>
-        <p:nvSpPr>
-          <p:cNvPr id="2" name="Title 1">
+      <p:pic>
+        <p:nvPicPr>
+          <p:cNvPr id="5" name="Content Placeholder 4">
             <a:extLst>
               <a:ext uri="{FF2B5EF4-FFF2-40B4-BE49-F238E27FC236}">
-                <a16:creationId xmlns:a16="http://schemas.microsoft.com/office/drawing/2014/main" id="{612151BF-FC9C-4308-B778-7A630308DC1F}"/>
+                <a16:creationId xmlns:a16="http://schemas.microsoft.com/office/drawing/2014/main" id="{80FA542A-6201-470F-A41C-4F10F8DEBA1A}"/>
               </a:ext>
             </a:extLst>
           </p:cNvPr>
-          <p:cNvSpPr>
-            <a:spLocks noGrp="1"/>
-          </p:cNvSpPr>
-          <p:nvPr>
-            <p:ph type="title"/>
-          </p:nvPr>
-        </p:nvSpPr>
-        <p:spPr/>
-        <p:txBody>
-          <a:bodyPr/>
-          <a:lstStyle/>
-          <a:p>
-            <a:r>
-              <a:rPr lang="en-IN" dirty="0"/>
-              <a:t>TESTING AND DEVELOPMENT</a:t>
-            </a:r>
-          </a:p>
-        </p:txBody>
-      </p:sp>
-      <p:sp>
-        <p:nvSpPr>
-          <p:cNvPr id="3" name="Content Placeholder 2">
+          <p:cNvPicPr>
+            <a:picLocks noGrp="1" noChangeAspect="1"/>
+          </p:cNvPicPr>
+          <p:nvPr>
+            <p:ph idx="1"/>
+          </p:nvPr>
+        </p:nvPicPr>
+        <p:blipFill>
+          <a:blip r:embed="rId2"/>
+          <a:stretch>
+            <a:fillRect/>
+          </a:stretch>
+        </p:blipFill>
+        <p:spPr>
+          <a:xfrm>
+            <a:off x="4408110" y="465574"/>
+            <a:ext cx="5410955" cy="1133633"/>
+          </a:xfrm>
+        </p:spPr>
+      </p:pic>
+      <p:pic>
+        <p:nvPicPr>
+          <p:cNvPr id="7" name="Picture 6">
             <a:extLst>
               <a:ext uri="{FF2B5EF4-FFF2-40B4-BE49-F238E27FC236}">
-                <a16:creationId xmlns:a16="http://schemas.microsoft.com/office/drawing/2014/main" id="{DFAD4C56-DF12-47CD-AC66-997F645EBFEF}"/>
+                <a16:creationId xmlns:a16="http://schemas.microsoft.com/office/drawing/2014/main" id="{DEA3EB43-7326-46D1-B7E4-107581580C90}"/>
               </a:ext>
             </a:extLst>
           </p:cNvPr>
-          <p:cNvSpPr>
-            <a:spLocks noGrp="1"/>
-          </p:cNvSpPr>
-          <p:nvPr>
-            <p:ph idx="1"/>
-          </p:nvPr>
-        </p:nvSpPr>
-        <p:spPr/>
+          <p:cNvPicPr>
+            <a:picLocks noChangeAspect="1"/>
+          </p:cNvPicPr>
+          <p:nvPr/>
+        </p:nvPicPr>
+        <p:blipFill>
+          <a:blip r:embed="rId3"/>
+          <a:stretch>
+            <a:fillRect/>
+          </a:stretch>
+        </p:blipFill>
+        <p:spPr>
+          <a:xfrm>
+            <a:off x="4408110" y="1828109"/>
+            <a:ext cx="5410955" cy="4944165"/>
+          </a:xfrm>
+          <a:prstGeom prst="rect">
+            <a:avLst/>
+          </a:prstGeom>
+        </p:spPr>
+      </p:pic>
+      <p:sp>
+        <p:nvSpPr>
+          <p:cNvPr id="8" name="TextBox 7">
+            <a:extLst>
+              <a:ext uri="{FF2B5EF4-FFF2-40B4-BE49-F238E27FC236}">
+                <a16:creationId xmlns:a16="http://schemas.microsoft.com/office/drawing/2014/main" id="{DE35B4F8-D5BD-437C-A4CA-9499C3E8B5F5}"/>
+              </a:ext>
+            </a:extLst>
+          </p:cNvPr>
+          <p:cNvSpPr txBox="1"/>
+          <p:nvPr/>
+        </p:nvSpPr>
+        <p:spPr>
+          <a:xfrm>
+            <a:off x="2181225" y="847725"/>
+            <a:ext cx="2000250" cy="369332"/>
+          </a:xfrm>
+          <a:prstGeom prst="rect">
+            <a:avLst/>
+          </a:prstGeom>
+          <a:noFill/>
+        </p:spPr>
         <p:txBody>
-          <a:bodyPr>
-            <a:normAutofit fontScale="92500" lnSpcReduction="20000"/>
+          <a:bodyPr wrap="square" rtlCol="0">
+            <a:spAutoFit/>
           </a:bodyPr>
           <a:lstStyle/>
           <a:p>
             <a:r>
               <a:rPr lang="en-IN" dirty="0"/>
-              <a:t>Hardhat Testing</a:t>
-            </a:r>
-          </a:p>
-          <a:p>
-            <a:r>
-              <a:rPr lang="en-IN" dirty="0" err="1"/>
-              <a:t>Sepolia</a:t>
-            </a:r>
+              <a:t>Compilation</a:t>
+            </a:r>
+          </a:p>
+        </p:txBody>
+      </p:sp>
+      <p:sp>
+        <p:nvSpPr>
+          <p:cNvPr id="9" name="TextBox 8">
+            <a:extLst>
+              <a:ext uri="{FF2B5EF4-FFF2-40B4-BE49-F238E27FC236}">
+                <a16:creationId xmlns:a16="http://schemas.microsoft.com/office/drawing/2014/main" id="{296281C8-D524-47B4-B401-86192E4D707D}"/>
+              </a:ext>
+            </a:extLst>
+          </p:cNvPr>
+          <p:cNvSpPr txBox="1"/>
+          <p:nvPr/>
+        </p:nvSpPr>
+        <p:spPr>
+          <a:xfrm>
+            <a:off x="2266950" y="2225159"/>
+            <a:ext cx="2000250" cy="369332"/>
+          </a:xfrm>
+          <a:prstGeom prst="rect">
+            <a:avLst/>
+          </a:prstGeom>
+          <a:noFill/>
+        </p:spPr>
+        <p:txBody>
+          <a:bodyPr wrap="square" rtlCol="0">
+            <a:spAutoFit/>
+          </a:bodyPr>
+          <a:lstStyle/>
+          <a:p>
             <a:r>
               <a:rPr lang="en-IN" dirty="0"/>
-              <a:t> Deployment</a:t>
-            </a:r>
-          </a:p>
-          <a:p>
-            <a:r>
-              <a:rPr lang="en-IN" dirty="0"/>
-              <a:t>Alchemy RPC / </a:t>
-            </a:r>
-            <a:r>
-              <a:rPr lang="en-IN" dirty="0" err="1"/>
-              <a:t>Infura</a:t>
-            </a:r>
-            <a:endParaRPr lang="en-IN" dirty="0"/>
-          </a:p>
-          <a:p>
-            <a:r>
-              <a:rPr lang="en-IN" dirty="0"/>
-              <a:t>Ganache (Local Testing)</a:t>
-            </a:r>
-          </a:p>
-          <a:p>
-            <a:r>
-              <a:rPr lang="en-US" dirty="0" err="1"/>
-              <a:t>MetaMask</a:t>
-            </a:r>
-            <a:r>
-              <a:rPr lang="en-US" dirty="0"/>
-              <a:t> Wallet</a:t>
-            </a:r>
-          </a:p>
-          <a:p>
-            <a:r>
-              <a:rPr lang="en-US" dirty="0"/>
-              <a:t>Wallet Address Verification</a:t>
-            </a:r>
-          </a:p>
-          <a:p>
-            <a:r>
-              <a:rPr lang="en-US" dirty="0"/>
-              <a:t>Transaction Signing</a:t>
-            </a:r>
-          </a:p>
-          <a:p>
-            <a:r>
-              <a:rPr lang="en-IN" dirty="0"/>
-              <a:t>VS Code</a:t>
-            </a:r>
-          </a:p>
-          <a:p>
-            <a:r>
-              <a:rPr lang="en-IN" dirty="0"/>
-              <a:t>Node.js</a:t>
-            </a:r>
-          </a:p>
-          <a:p>
-            <a:r>
-              <a:rPr lang="en-IN" dirty="0" err="1"/>
-              <a:t>npm</a:t>
-            </a:r>
-            <a:endParaRPr lang="en-IN" dirty="0"/>
-          </a:p>
-          <a:p>
-            <a:r>
-              <a:rPr lang="en-IN" dirty="0"/>
-              <a:t>Git &amp; GitHub</a:t>
-            </a:r>
-          </a:p>
-          <a:p>
-            <a:endParaRPr lang="en-IN" dirty="0"/>
+              <a:t>Deploy</a:t>
+            </a:r>
           </a:p>
         </p:txBody>
       </p:sp>
     </p:spTree>
     <p:extLst>
       <p:ext uri="{BB962C8B-B14F-4D97-AF65-F5344CB8AC3E}">
-        <p14:creationId xmlns:p14="http://schemas.microsoft.com/office/powerpoint/2010/main" val="4031312705"/>
+        <p14:creationId xmlns:p14="http://schemas.microsoft.com/office/powerpoint/2010/main" val="2807401327"/>
       </p:ext>
     </p:extLst>
   </p:cSld>
   <p:clrMapOvr>
     <a:masterClrMapping/>
   </p:clrMapOvr>
+  <mc:AlternateContent xmlns:mc="http://schemas.openxmlformats.org/markup-compatibility/2006">
+    <mc:Choice xmlns:p159="http://schemas.microsoft.com/office/powerpoint/2015/09/main" Requires="p159">
+      <p:transition xmlns:p14="http://schemas.microsoft.com/office/powerpoint/2010/main" spd="slow" p14:dur="2000">
+        <p159:morph option="byObject"/>
+      </p:transition>
+    </mc:Choice>
+    <mc:Fallback>
+      <p:transition spd="slow">
+        <p:fade/>
+      </p:transition>
+    </mc:Fallback>
+  </mc:AlternateContent>
 </p:sld>
 </file>
 
@@ -9482,7 +9266,7 @@
           <p:cNvPr id="2" name="Title 1">
             <a:extLst>
               <a:ext uri="{FF2B5EF4-FFF2-40B4-BE49-F238E27FC236}">
-                <a16:creationId xmlns:a16="http://schemas.microsoft.com/office/drawing/2014/main" id="{33286FDA-CD73-4DFE-877D-3D4643893D66}"/>
+                <a16:creationId xmlns:a16="http://schemas.microsoft.com/office/drawing/2014/main" id="{57C97A73-D1CB-447A-98FC-0AC2D72C2603}"/>
               </a:ext>
             </a:extLst>
           </p:cNvPr>
@@ -9500,7 +9284,7 @@
           <a:p>
             <a:r>
               <a:rPr lang="en-IN" dirty="0"/>
-              <a:t>BLOCKCHAIN STACK</a:t>
+              <a:t>Frontend Stack</a:t>
             </a:r>
           </a:p>
         </p:txBody>
@@ -9510,7 +9294,7 @@
           <p:cNvPr id="3" name="Content Placeholder 2">
             <a:extLst>
               <a:ext uri="{FF2B5EF4-FFF2-40B4-BE49-F238E27FC236}">
-                <a16:creationId xmlns:a16="http://schemas.microsoft.com/office/drawing/2014/main" id="{31F192C1-9F86-48B9-9841-9AA7344D3D94}"/>
+                <a16:creationId xmlns:a16="http://schemas.microsoft.com/office/drawing/2014/main" id="{390C26D0-1B60-4213-9093-AE609A33DB1E}"/>
               </a:ext>
             </a:extLst>
           </p:cNvPr>
@@ -9526,72 +9310,113 @@
           <a:bodyPr/>
           <a:lstStyle/>
           <a:p>
+            <a:pPr>
+              <a:buFont typeface="Wingdings" panose="05000000000000000000" pitchFamily="2" charset="2"/>
+              <a:buChar char="Ø"/>
+            </a:pPr>
+            <a:r>
+              <a:rPr lang="en-IN" b="1" dirty="0"/>
+              <a:t>React - </a:t>
+            </a:r>
+            <a:r>
+              <a:rPr lang="en-IN" dirty="0"/>
+              <a:t>Frontend UI development</a:t>
+            </a:r>
+          </a:p>
+          <a:p>
+            <a:pPr>
+              <a:buFont typeface="Wingdings" panose="05000000000000000000" pitchFamily="2" charset="2"/>
+              <a:buChar char="Ø"/>
+            </a:pPr>
+            <a:r>
+              <a:rPr lang="en-IN" b="1" dirty="0"/>
+              <a:t>JavaScript - </a:t>
+            </a:r>
+            <a:r>
+              <a:rPr lang="en-IN" dirty="0"/>
+              <a:t>Application logic and functionality</a:t>
+            </a:r>
+          </a:p>
+          <a:p>
+            <a:pPr>
+              <a:buFont typeface="Wingdings" panose="05000000000000000000" pitchFamily="2" charset="2"/>
+              <a:buChar char="Ø"/>
+            </a:pPr>
+            <a:r>
+              <a:rPr lang="en-IN" b="1" dirty="0"/>
+              <a:t>HTML5 - </a:t>
+            </a:r>
+            <a:r>
+              <a:rPr lang="en-IN" dirty="0"/>
+              <a:t>Webpage structure</a:t>
+            </a:r>
+          </a:p>
+          <a:p>
+            <a:pPr>
+              <a:buFont typeface="Wingdings" panose="05000000000000000000" pitchFamily="2" charset="2"/>
+              <a:buChar char="Ø"/>
+            </a:pPr>
+            <a:r>
+              <a:rPr lang="en-IN" b="1" dirty="0"/>
+              <a:t>CSS3 - </a:t>
+            </a:r>
             <a:r>
               <a:rPr lang="en-US" dirty="0"/>
-              <a:t>Ethereum</a:t>
-            </a:r>
-          </a:p>
-          <a:p>
+              <a:t>UI styling and responsive design</a:t>
+            </a:r>
+          </a:p>
+          <a:p>
+            <a:pPr>
+              <a:buFont typeface="Wingdings" panose="05000000000000000000" pitchFamily="2" charset="2"/>
+              <a:buChar char="Ø"/>
+            </a:pPr>
+            <a:r>
+              <a:rPr lang="en-IN" b="1" dirty="0"/>
+              <a:t>Ethers.js - </a:t>
+            </a:r>
             <a:r>
               <a:rPr lang="en-US" dirty="0"/>
-              <a:t>Solidity</a:t>
-            </a:r>
-          </a:p>
-          <a:p>
-            <a:r>
-              <a:rPr lang="en-US" dirty="0" err="1"/>
-              <a:t>Sepolia</a:t>
+              <a:t>Blockchain and smart contract interaction</a:t>
+            </a:r>
+          </a:p>
+          <a:p>
+            <a:pPr>
+              <a:buFont typeface="Wingdings" panose="05000000000000000000" pitchFamily="2" charset="2"/>
+              <a:buChar char="Ø"/>
+            </a:pPr>
+            <a:r>
+              <a:rPr lang="en-US" b="1" dirty="0" err="1"/>
+              <a:t>MetaMask</a:t>
             </a:r>
             <a:r>
               <a:rPr lang="en-US" dirty="0"/>
-              <a:t> </a:t>
-            </a:r>
-            <a:r>
-              <a:rPr lang="en-US" dirty="0" err="1"/>
-              <a:t>Testnet</a:t>
-            </a:r>
-            <a:endParaRPr lang="en-US" dirty="0"/>
-          </a:p>
-          <a:p>
-            <a:r>
-              <a:rPr lang="en-US" dirty="0"/>
-              <a:t>Smart Contracts</a:t>
-            </a:r>
-          </a:p>
-          <a:p>
-            <a:r>
-              <a:rPr lang="en-US" dirty="0" err="1"/>
-              <a:t>MetaMask</a:t>
-            </a:r>
-            <a:endParaRPr lang="en-US" dirty="0"/>
-          </a:p>
-          <a:p>
-            <a:r>
-              <a:rPr lang="en-US" dirty="0"/>
-              <a:t>Hardhat</a:t>
-            </a:r>
-          </a:p>
-          <a:p>
-            <a:r>
-              <a:rPr lang="en-US" dirty="0"/>
-              <a:t>Ethers.js</a:t>
-            </a:r>
-          </a:p>
-          <a:p>
-            <a:endParaRPr lang="en-IN" dirty="0"/>
+              <a:t> - Wallet connection and transaction signing</a:t>
+            </a:r>
           </a:p>
         </p:txBody>
       </p:sp>
     </p:spTree>
     <p:extLst>
       <p:ext uri="{BB962C8B-B14F-4D97-AF65-F5344CB8AC3E}">
-        <p14:creationId xmlns:p14="http://schemas.microsoft.com/office/powerpoint/2010/main" val="1392084229"/>
+        <p14:creationId xmlns:p14="http://schemas.microsoft.com/office/powerpoint/2010/main" val="1641637821"/>
       </p:ext>
     </p:extLst>
   </p:cSld>
   <p:clrMapOvr>
     <a:masterClrMapping/>
   </p:clrMapOvr>
+  <mc:AlternateContent xmlns:mc="http://schemas.openxmlformats.org/markup-compatibility/2006">
+    <mc:Choice xmlns:p159="http://schemas.microsoft.com/office/powerpoint/2015/09/main" Requires="p159">
+      <p:transition xmlns:p14="http://schemas.microsoft.com/office/powerpoint/2010/main" spd="slow" p14:dur="2000">
+        <p159:morph option="byObject"/>
+      </p:transition>
+    </mc:Choice>
+    <mc:Fallback>
+      <p:transition spd="slow">
+        <p:fade/>
+      </p:transition>
+    </mc:Fallback>
+  </mc:AlternateContent>
 </p:sld>
 </file>
 
@@ -9617,7 +9442,7 @@
           <p:cNvPr id="2" name="Title 1">
             <a:extLst>
               <a:ext uri="{FF2B5EF4-FFF2-40B4-BE49-F238E27FC236}">
-                <a16:creationId xmlns:a16="http://schemas.microsoft.com/office/drawing/2014/main" id="{57C97A73-D1CB-447A-98FC-0AC2D72C2603}"/>
+                <a16:creationId xmlns:a16="http://schemas.microsoft.com/office/drawing/2014/main" id="{668EC223-3856-428D-A09F-12C3CE627AE6}"/>
               </a:ext>
             </a:extLst>
           </p:cNvPr>
@@ -9635,7 +9460,7 @@
           <a:p>
             <a:r>
               <a:rPr lang="en-IN" dirty="0"/>
-              <a:t>FRONTEND STACK</a:t>
+              <a:t>Frontend Development</a:t>
             </a:r>
           </a:p>
         </p:txBody>
@@ -9645,7 +9470,7 @@
           <p:cNvPr id="3" name="Content Placeholder 2">
             <a:extLst>
               <a:ext uri="{FF2B5EF4-FFF2-40B4-BE49-F238E27FC236}">
-                <a16:creationId xmlns:a16="http://schemas.microsoft.com/office/drawing/2014/main" id="{390C26D0-1B60-4213-9093-AE609A33DB1E}"/>
+                <a16:creationId xmlns:a16="http://schemas.microsoft.com/office/drawing/2014/main" id="{37312CB8-8D57-4E6F-84F9-36B974E9421E}"/>
               </a:ext>
             </a:extLst>
           </p:cNvPr>
@@ -9658,49 +9483,81 @@
         </p:nvSpPr>
         <p:spPr/>
         <p:txBody>
-          <a:bodyPr/>
+          <a:bodyPr>
+            <a:normAutofit/>
+          </a:bodyPr>
           <a:lstStyle/>
           <a:p>
-            <a:r>
-              <a:rPr lang="en-IN" dirty="0"/>
-              <a:t>React.js</a:t>
-            </a:r>
-          </a:p>
-          <a:p>
-            <a:r>
-              <a:rPr lang="en-IN" dirty="0"/>
-              <a:t>HTML5</a:t>
-            </a:r>
-          </a:p>
-          <a:p>
-            <a:r>
-              <a:rPr lang="en-IN" dirty="0"/>
-              <a:t>CSS3</a:t>
-            </a:r>
-          </a:p>
-          <a:p>
-            <a:r>
-              <a:rPr lang="en-IN" dirty="0"/>
-              <a:t>JavaScript</a:t>
-            </a:r>
-          </a:p>
-          <a:p>
-            <a:r>
-              <a:rPr lang="en-IN" dirty="0"/>
-              <a:t>Tailwind CSS / Bootstrap</a:t>
-            </a:r>
-          </a:p>
-          <a:p>
-            <a:r>
-              <a:rPr lang="en-IN" dirty="0" err="1"/>
-              <a:t>Axios</a:t>
-            </a:r>
-            <a:endParaRPr lang="en-IN" dirty="0"/>
-          </a:p>
-          <a:p>
-            <a:r>
-              <a:rPr lang="en-IN" dirty="0"/>
-              <a:t>React Router DOM</a:t>
+            <a:pPr marL="0" indent="0">
+              <a:buNone/>
+            </a:pPr>
+            <a:r>
+              <a:rPr lang="en-US" dirty="0"/>
+              <a:t>Completed frontend features:</a:t>
+            </a:r>
+          </a:p>
+          <a:p>
+            <a:pPr>
+              <a:buFont typeface="Arial" panose="020B0604020202020204" pitchFamily="34" charset="0"/>
+              <a:buChar char="•"/>
+            </a:pPr>
+            <a:r>
+              <a:rPr lang="en-US" b="1" dirty="0"/>
+              <a:t>Homepage UI </a:t>
+            </a:r>
+            <a:r>
+              <a:rPr lang="en-US" dirty="0"/>
+              <a:t>- Developed the main landing page for the e-voting system. </a:t>
+            </a:r>
+          </a:p>
+          <a:p>
+            <a:pPr>
+              <a:buFont typeface="Arial" panose="020B0604020202020204" pitchFamily="34" charset="0"/>
+              <a:buChar char="•"/>
+            </a:pPr>
+            <a:r>
+              <a:rPr lang="en-US" b="1" dirty="0"/>
+              <a:t>Candidate cards </a:t>
+            </a:r>
+            <a:r>
+              <a:rPr lang="en-US" dirty="0"/>
+              <a:t>- Implemented candidate display cards with voting options. </a:t>
+            </a:r>
+          </a:p>
+          <a:p>
+            <a:pPr>
+              <a:buFont typeface="Arial" panose="020B0604020202020204" pitchFamily="34" charset="0"/>
+              <a:buChar char="•"/>
+            </a:pPr>
+            <a:r>
+              <a:rPr lang="en-US" b="1" dirty="0"/>
+              <a:t>Wallet connection </a:t>
+            </a:r>
+            <a:r>
+              <a:rPr lang="en-US" dirty="0"/>
+              <a:t>- Integrated </a:t>
+            </a:r>
+            <a:r>
+              <a:rPr lang="en-US" dirty="0" err="1"/>
+              <a:t>MetaMask</a:t>
+            </a:r>
+            <a:r>
+              <a:rPr lang="en-US" dirty="0"/>
+              <a:t> wallet connection for user authentication.</a:t>
+            </a:r>
+          </a:p>
+          <a:p>
+            <a:pPr>
+              <a:buFont typeface="Arial" panose="020B0604020202020204" pitchFamily="34" charset="0"/>
+              <a:buChar char="•"/>
+            </a:pPr>
+            <a:r>
+              <a:rPr lang="en-US" b="1" dirty="0"/>
+              <a:t>Voting Page </a:t>
+            </a:r>
+            <a:r>
+              <a:rPr lang="en-US" dirty="0"/>
+              <a:t>- Created voting interface for secure vote casting.</a:t>
             </a:r>
           </a:p>
           <a:p>
@@ -9711,13 +9568,25 @@
     </p:spTree>
     <p:extLst>
       <p:ext uri="{BB962C8B-B14F-4D97-AF65-F5344CB8AC3E}">
-        <p14:creationId xmlns:p14="http://schemas.microsoft.com/office/powerpoint/2010/main" val="1641637821"/>
+        <p14:creationId xmlns:p14="http://schemas.microsoft.com/office/powerpoint/2010/main" val="1146077215"/>
       </p:ext>
     </p:extLst>
   </p:cSld>
   <p:clrMapOvr>
     <a:masterClrMapping/>
   </p:clrMapOvr>
+  <mc:AlternateContent xmlns:mc="http://schemas.openxmlformats.org/markup-compatibility/2006">
+    <mc:Choice xmlns:p159="http://schemas.microsoft.com/office/powerpoint/2015/09/main" Requires="p159">
+      <p:transition xmlns:p14="http://schemas.microsoft.com/office/powerpoint/2010/main" spd="slow" p14:dur="2000">
+        <p159:morph option="byObject"/>
+      </p:transition>
+    </mc:Choice>
+    <mc:Fallback>
+      <p:transition spd="slow">
+        <p:fade/>
+      </p:transition>
+    </mc:Fallback>
+  </mc:AlternateContent>
 </p:sld>
 </file>
 
@@ -9738,73 +9607,57 @@
           <a:chExt cx="0" cy="0"/>
         </a:xfrm>
       </p:grpSpPr>
-      <p:sp>
-        <p:nvSpPr>
-          <p:cNvPr id="2" name="Title 1">
+      <p:pic>
+        <p:nvPicPr>
+          <p:cNvPr id="5" name="Content Placeholder 4">
             <a:extLst>
               <a:ext uri="{FF2B5EF4-FFF2-40B4-BE49-F238E27FC236}">
-                <a16:creationId xmlns:a16="http://schemas.microsoft.com/office/drawing/2014/main" id="{A3AD5791-7D3E-4FA6-AEB1-6C59DEE78CD1}"/>
+                <a16:creationId xmlns:a16="http://schemas.microsoft.com/office/drawing/2014/main" id="{0C5A947D-E52B-4B3C-B92C-AE37679D2BD1}"/>
               </a:ext>
             </a:extLst>
           </p:cNvPr>
-          <p:cNvSpPr>
-            <a:spLocks noGrp="1"/>
-          </p:cNvSpPr>
-          <p:nvPr>
-            <p:ph type="title"/>
-          </p:nvPr>
-        </p:nvSpPr>
-        <p:spPr/>
-        <p:txBody>
-          <a:bodyPr/>
-          <a:lstStyle/>
-          <a:p>
-            <a:r>
-              <a:rPr lang="en-IN" dirty="0"/>
-              <a:t>Conclusion</a:t>
-            </a:r>
-          </a:p>
-        </p:txBody>
-      </p:sp>
-      <p:sp>
-        <p:nvSpPr>
-          <p:cNvPr id="3" name="Content Placeholder 2">
-            <a:extLst>
-              <a:ext uri="{FF2B5EF4-FFF2-40B4-BE49-F238E27FC236}">
-                <a16:creationId xmlns:a16="http://schemas.microsoft.com/office/drawing/2014/main" id="{D548D916-D8C0-4EF5-B93A-2E3C67BC7B49}"/>
-              </a:ext>
-            </a:extLst>
-          </p:cNvPr>
-          <p:cNvSpPr>
-            <a:spLocks noGrp="1"/>
-          </p:cNvSpPr>
+          <p:cNvPicPr>
+            <a:picLocks noGrp="1" noChangeAspect="1"/>
+          </p:cNvPicPr>
           <p:nvPr>
             <p:ph idx="1"/>
           </p:nvPr>
-        </p:nvSpPr>
-        <p:spPr/>
-        <p:txBody>
-          <a:bodyPr/>
-          <a:lstStyle/>
-          <a:p>
-            <a:r>
-              <a:rPr lang="en-US" dirty="0"/>
-              <a:t>This project successfully proves that blockchain can fundamentally transform the integrity of electoral systems. By eliminating single points of failure, we have built a provably fair, transparent, and decentralized platform ready for the future of democracy</a:t>
-            </a:r>
-            <a:endParaRPr lang="en-IN" dirty="0"/>
-          </a:p>
-        </p:txBody>
-      </p:sp>
+        </p:nvPicPr>
+        <p:blipFill>
+          <a:blip r:embed="rId2"/>
+          <a:stretch>
+            <a:fillRect/>
+          </a:stretch>
+        </p:blipFill>
+        <p:spPr>
+          <a:xfrm>
+            <a:off x="1090996" y="637980"/>
+            <a:ext cx="10679791" cy="5582039"/>
+          </a:xfrm>
+        </p:spPr>
+      </p:pic>
     </p:spTree>
     <p:extLst>
       <p:ext uri="{BB962C8B-B14F-4D97-AF65-F5344CB8AC3E}">
-        <p14:creationId xmlns:p14="http://schemas.microsoft.com/office/powerpoint/2010/main" val="2324338919"/>
+        <p14:creationId xmlns:p14="http://schemas.microsoft.com/office/powerpoint/2010/main" val="2771417094"/>
       </p:ext>
     </p:extLst>
   </p:cSld>
   <p:clrMapOvr>
     <a:masterClrMapping/>
   </p:clrMapOvr>
+  <mc:AlternateContent xmlns:mc="http://schemas.openxmlformats.org/markup-compatibility/2006">
+    <mc:Choice xmlns:p159="http://schemas.microsoft.com/office/powerpoint/2015/09/main" Requires="p159">
+      <p:transition xmlns:p14="http://schemas.microsoft.com/office/powerpoint/2010/main" spd="slow" p14:dur="2000">
+        <p159:morph option="byObject"/>
+      </p:transition>
+    </mc:Choice>
+    <mc:Fallback>
+      <p:transition spd="slow">
+        <p:fade/>
+      </p:transition>
+    </mc:Fallback>
+  </mc:AlternateContent>
 </p:sld>
 </file>
 
@@ -9825,70 +9678,57 @@
           <a:chExt cx="0" cy="0"/>
         </a:xfrm>
       </p:grpSpPr>
-      <p:sp>
-        <p:nvSpPr>
-          <p:cNvPr id="2" name="Title 1">
+      <p:pic>
+        <p:nvPicPr>
+          <p:cNvPr id="5" name="Content Placeholder 4">
             <a:extLst>
               <a:ext uri="{FF2B5EF4-FFF2-40B4-BE49-F238E27FC236}">
-                <a16:creationId xmlns:a16="http://schemas.microsoft.com/office/drawing/2014/main" id="{95F35424-6A96-4BFC-908B-50C9A595448F}"/>
+                <a16:creationId xmlns:a16="http://schemas.microsoft.com/office/drawing/2014/main" id="{2BD01ED4-B136-489A-ACAE-EB7D52931C18}"/>
               </a:ext>
             </a:extLst>
           </p:cNvPr>
-          <p:cNvSpPr>
-            <a:spLocks noGrp="1"/>
-          </p:cNvSpPr>
-          <p:nvPr>
-            <p:ph type="title"/>
-          </p:nvPr>
-        </p:nvSpPr>
-        <p:spPr/>
-        <p:txBody>
-          <a:bodyPr/>
-          <a:lstStyle/>
-          <a:p>
-            <a:endParaRPr lang="en-IN"/>
-          </a:p>
-        </p:txBody>
-      </p:sp>
-      <p:sp>
-        <p:nvSpPr>
-          <p:cNvPr id="3" name="Content Placeholder 2">
-            <a:extLst>
-              <a:ext uri="{FF2B5EF4-FFF2-40B4-BE49-F238E27FC236}">
-                <a16:creationId xmlns:a16="http://schemas.microsoft.com/office/drawing/2014/main" id="{F1CFBDC5-17B0-4BC5-A9F6-DF485FF73F11}"/>
-              </a:ext>
-            </a:extLst>
-          </p:cNvPr>
-          <p:cNvSpPr>
-            <a:spLocks noGrp="1"/>
-          </p:cNvSpPr>
+          <p:cNvPicPr>
+            <a:picLocks noGrp="1" noChangeAspect="1"/>
+          </p:cNvPicPr>
           <p:nvPr>
             <p:ph idx="1"/>
           </p:nvPr>
-        </p:nvSpPr>
-        <p:spPr/>
-        <p:txBody>
-          <a:bodyPr/>
-          <a:lstStyle/>
-          <a:p>
-            <a:r>
-              <a:rPr lang="en-US"/>
-              <a:t>LITERATURE SURVEY Ethereum Systems Analysis of prior implementations using Solidity architectural patterns. Democracy Models Research into trustless, peerto-peer democratic governance models. Contract Security Study of vulnerabilities like reentrancy and overflow mitigatio</a:t>
-            </a:r>
-            <a:endParaRPr lang="en-IN"/>
-          </a:p>
-        </p:txBody>
-      </p:sp>
+        </p:nvPicPr>
+        <p:blipFill>
+          <a:blip r:embed="rId2"/>
+          <a:stretch>
+            <a:fillRect/>
+          </a:stretch>
+        </p:blipFill>
+        <p:spPr>
+          <a:xfrm>
+            <a:off x="4103461" y="1727012"/>
+            <a:ext cx="4429239" cy="3673663"/>
+          </a:xfrm>
+        </p:spPr>
+      </p:pic>
     </p:spTree>
     <p:extLst>
       <p:ext uri="{BB962C8B-B14F-4D97-AF65-F5344CB8AC3E}">
-        <p14:creationId xmlns:p14="http://schemas.microsoft.com/office/powerpoint/2010/main" val="927097790"/>
+        <p14:creationId xmlns:p14="http://schemas.microsoft.com/office/powerpoint/2010/main" val="1629548124"/>
       </p:ext>
     </p:extLst>
   </p:cSld>
   <p:clrMapOvr>
     <a:masterClrMapping/>
   </p:clrMapOvr>
+  <mc:AlternateContent xmlns:mc="http://schemas.openxmlformats.org/markup-compatibility/2006">
+    <mc:Choice xmlns:p159="http://schemas.microsoft.com/office/powerpoint/2015/09/main" Requires="p159">
+      <p:transition xmlns:p14="http://schemas.microsoft.com/office/powerpoint/2010/main" spd="slow" p14:dur="2000">
+        <p159:morph option="byObject"/>
+      </p:transition>
+    </mc:Choice>
+    <mc:Fallback>
+      <p:transition spd="slow">
+        <p:fade/>
+      </p:transition>
+    </mc:Fallback>
+  </mc:AlternateContent>
 </p:sld>
 </file>
 
@@ -9953,17 +9793,30 @@
             <p:ph idx="1"/>
           </p:nvPr>
         </p:nvSpPr>
-        <p:spPr/>
+        <p:spPr>
+          <a:xfrm>
+            <a:off x="2589212" y="2149642"/>
+            <a:ext cx="8915400" cy="3777622"/>
+          </a:xfrm>
+        </p:spPr>
         <p:txBody>
           <a:bodyPr/>
           <a:lstStyle/>
           <a:p>
+            <a:pPr>
+              <a:buFont typeface="Wingdings" panose="05000000000000000000" pitchFamily="2" charset="2"/>
+              <a:buChar char="Ø"/>
+            </a:pPr>
             <a:r>
               <a:rPr lang="en-US" dirty="0"/>
               <a:t>The Blockchain-Based E-Voting System is being developed to provide a secure, transparent, and decentralized voting platform using blockchain technology. The implementation focuses on replacing traditional centralized voting mechanisms with smart contract-based automation to ensure vote integrity, prevent tampering, and improve public trust in elections.</a:t>
             </a:r>
           </a:p>
           <a:p>
+            <a:pPr>
+              <a:buFont typeface="Wingdings" panose="05000000000000000000" pitchFamily="2" charset="2"/>
+              <a:buChar char="Ø"/>
+            </a:pPr>
             <a:r>
               <a:rPr lang="en-US" dirty="0"/>
               <a:t>The current development stage includes smart contract creation, blockchain deployment, frontend integration, wallet authentication, vote handling, and system testing.</a:t>
@@ -9981,10 +9834,22 @@
   <p:clrMapOvr>
     <a:masterClrMapping/>
   </p:clrMapOvr>
+  <mc:AlternateContent xmlns:mc="http://schemas.openxmlformats.org/markup-compatibility/2006">
+    <mc:Choice xmlns:p159="http://schemas.microsoft.com/office/powerpoint/2015/09/main" Requires="p159">
+      <p:transition xmlns:p14="http://schemas.microsoft.com/office/powerpoint/2010/main" spd="slow" p14:dur="2000">
+        <p159:morph option="byObject"/>
+      </p:transition>
+    </mc:Choice>
+    <mc:Fallback>
+      <p:transition spd="slow">
+        <p:fade/>
+      </p:transition>
+    </mc:Fallback>
+  </mc:AlternateContent>
 </p:sld>
 </file>
 
-<file path=ppt/slides/slide3.xml><?xml version="1.0" encoding="utf-8"?>
+<file path=ppt/slides/slide20.xml><?xml version="1.0" encoding="utf-8"?>
 <p:sld xmlns:a="http://schemas.openxmlformats.org/drawingml/2006/main" xmlns:r="http://schemas.openxmlformats.org/officeDocument/2006/relationships" xmlns:p="http://schemas.openxmlformats.org/presentationml/2006/main">
   <p:cSld>
     <p:spTree>
@@ -10001,12 +9866,377 @@
           <a:chExt cx="0" cy="0"/>
         </a:xfrm>
       </p:grpSpPr>
+      <p:pic>
+        <p:nvPicPr>
+          <p:cNvPr id="5" name="Content Placeholder 4">
+            <a:extLst>
+              <a:ext uri="{FF2B5EF4-FFF2-40B4-BE49-F238E27FC236}">
+                <a16:creationId xmlns:a16="http://schemas.microsoft.com/office/drawing/2014/main" id="{0B1EEF3B-BB5D-4A9D-A28B-58ADDAA8F9AC}"/>
+              </a:ext>
+            </a:extLst>
+          </p:cNvPr>
+          <p:cNvPicPr>
+            <a:picLocks noGrp="1" noChangeAspect="1"/>
+          </p:cNvPicPr>
+          <p:nvPr>
+            <p:ph idx="1"/>
+          </p:nvPr>
+        </p:nvPicPr>
+        <p:blipFill>
+          <a:blip r:embed="rId2"/>
+          <a:stretch>
+            <a:fillRect/>
+          </a:stretch>
+        </p:blipFill>
+        <p:spPr>
+          <a:xfrm>
+            <a:off x="881466" y="704850"/>
+            <a:ext cx="10429068" cy="5448300"/>
+          </a:xfrm>
+        </p:spPr>
+      </p:pic>
+    </p:spTree>
+    <p:extLst>
+      <p:ext uri="{BB962C8B-B14F-4D97-AF65-F5344CB8AC3E}">
+        <p14:creationId xmlns:p14="http://schemas.microsoft.com/office/powerpoint/2010/main" val="1790735729"/>
+      </p:ext>
+    </p:extLst>
+  </p:cSld>
+  <p:clrMapOvr>
+    <a:masterClrMapping/>
+  </p:clrMapOvr>
+  <mc:AlternateContent xmlns:mc="http://schemas.openxmlformats.org/markup-compatibility/2006">
+    <mc:Choice xmlns:p159="http://schemas.microsoft.com/office/powerpoint/2015/09/main" Requires="p159">
+      <p:transition xmlns:p14="http://schemas.microsoft.com/office/powerpoint/2010/main" spd="slow" p14:dur="2000">
+        <p159:morph option="byObject"/>
+      </p:transition>
+    </mc:Choice>
+    <mc:Fallback>
+      <p:transition spd="slow">
+        <p:fade/>
+      </p:transition>
+    </mc:Fallback>
+  </mc:AlternateContent>
+</p:sld>
+</file>
+
+<file path=ppt/slides/slide21.xml><?xml version="1.0" encoding="utf-8"?>
+<p:sld xmlns:a="http://schemas.openxmlformats.org/drawingml/2006/main" xmlns:r="http://schemas.openxmlformats.org/officeDocument/2006/relationships" xmlns:p="http://schemas.openxmlformats.org/presentationml/2006/main">
+  <p:cSld>
+    <p:spTree>
+      <p:nvGrpSpPr>
+        <p:cNvPr id="1" name=""/>
+        <p:cNvGrpSpPr/>
+        <p:nvPr/>
+      </p:nvGrpSpPr>
+      <p:grpSpPr>
+        <a:xfrm>
+          <a:off x="0" y="0"/>
+          <a:ext cx="0" cy="0"/>
+          <a:chOff x="0" y="0"/>
+          <a:chExt cx="0" cy="0"/>
+        </a:xfrm>
+      </p:grpSpPr>
+      <p:pic>
+        <p:nvPicPr>
+          <p:cNvPr id="5" name="Content Placeholder 4">
+            <a:extLst>
+              <a:ext uri="{FF2B5EF4-FFF2-40B4-BE49-F238E27FC236}">
+                <a16:creationId xmlns:a16="http://schemas.microsoft.com/office/drawing/2014/main" id="{1215CA3B-C060-442C-A3A4-9028F01DBDD1}"/>
+              </a:ext>
+            </a:extLst>
+          </p:cNvPr>
+          <p:cNvPicPr>
+            <a:picLocks noGrp="1" noChangeAspect="1"/>
+          </p:cNvPicPr>
+          <p:nvPr>
+            <p:ph idx="1"/>
+          </p:nvPr>
+        </p:nvPicPr>
+        <p:blipFill>
+          <a:blip r:embed="rId2"/>
+          <a:stretch>
+            <a:fillRect/>
+          </a:stretch>
+        </p:blipFill>
+        <p:spPr>
+          <a:xfrm>
+            <a:off x="1569752" y="2369907"/>
+            <a:ext cx="4096322" cy="3305636"/>
+          </a:xfrm>
+        </p:spPr>
+      </p:pic>
+      <p:pic>
+        <p:nvPicPr>
+          <p:cNvPr id="7" name="Picture 6">
+            <a:extLst>
+              <a:ext uri="{FF2B5EF4-FFF2-40B4-BE49-F238E27FC236}">
+                <a16:creationId xmlns:a16="http://schemas.microsoft.com/office/drawing/2014/main" id="{23AAC3EC-8D7C-4657-89D0-00CE2B2F767C}"/>
+              </a:ext>
+            </a:extLst>
+          </p:cNvPr>
+          <p:cNvPicPr>
+            <a:picLocks noChangeAspect="1"/>
+          </p:cNvPicPr>
+          <p:nvPr/>
+        </p:nvPicPr>
+        <p:blipFill>
+          <a:blip r:embed="rId3"/>
+          <a:stretch>
+            <a:fillRect/>
+          </a:stretch>
+        </p:blipFill>
+        <p:spPr>
+          <a:xfrm>
+            <a:off x="7332651" y="2136500"/>
+            <a:ext cx="4267796" cy="3943900"/>
+          </a:xfrm>
+          <a:prstGeom prst="rect">
+            <a:avLst/>
+          </a:prstGeom>
+        </p:spPr>
+      </p:pic>
+      <p:sp>
+        <p:nvSpPr>
+          <p:cNvPr id="8" name="Arrow: Right 7">
+            <a:extLst>
+              <a:ext uri="{FF2B5EF4-FFF2-40B4-BE49-F238E27FC236}">
+                <a16:creationId xmlns:a16="http://schemas.microsoft.com/office/drawing/2014/main" id="{9AD547EE-EA1D-4E16-BE26-4515228C61EE}"/>
+              </a:ext>
+            </a:extLst>
+          </p:cNvPr>
+          <p:cNvSpPr/>
+          <p:nvPr/>
+        </p:nvSpPr>
+        <p:spPr>
+          <a:xfrm>
+            <a:off x="5987765" y="3581400"/>
+            <a:ext cx="1076325" cy="1390650"/>
+          </a:xfrm>
+          <a:prstGeom prst="rightArrow">
+            <a:avLst/>
+          </a:prstGeom>
+        </p:spPr>
+        <p:style>
+          <a:lnRef idx="2">
+            <a:schemeClr val="accent1">
+              <a:shade val="50000"/>
+            </a:schemeClr>
+          </a:lnRef>
+          <a:fillRef idx="1">
+            <a:schemeClr val="accent1"/>
+          </a:fillRef>
+          <a:effectRef idx="0">
+            <a:schemeClr val="accent1"/>
+          </a:effectRef>
+          <a:fontRef idx="minor">
+            <a:schemeClr val="lt1"/>
+          </a:fontRef>
+        </p:style>
+        <p:txBody>
+          <a:bodyPr rtlCol="0" anchor="ctr"/>
+          <a:lstStyle/>
+          <a:p>
+            <a:pPr algn="ctr"/>
+            <a:endParaRPr lang="en-IN"/>
+          </a:p>
+        </p:txBody>
+      </p:sp>
+    </p:spTree>
+    <p:extLst>
+      <p:ext uri="{BB962C8B-B14F-4D97-AF65-F5344CB8AC3E}">
+        <p14:creationId xmlns:p14="http://schemas.microsoft.com/office/powerpoint/2010/main" val="3317759529"/>
+      </p:ext>
+    </p:extLst>
+  </p:cSld>
+  <p:clrMapOvr>
+    <a:masterClrMapping/>
+  </p:clrMapOvr>
+  <mc:AlternateContent xmlns:mc="http://schemas.openxmlformats.org/markup-compatibility/2006">
+    <mc:Choice xmlns:p159="http://schemas.microsoft.com/office/powerpoint/2015/09/main" Requires="p159">
+      <p:transition xmlns:p14="http://schemas.microsoft.com/office/powerpoint/2010/main" spd="slow" p14:dur="2000">
+        <p159:morph option="byObject"/>
+      </p:transition>
+    </mc:Choice>
+    <mc:Fallback>
+      <p:transition spd="slow">
+        <p:fade/>
+      </p:transition>
+    </mc:Fallback>
+  </mc:AlternateContent>
+</p:sld>
+</file>
+
+<file path=ppt/slides/slide22.xml><?xml version="1.0" encoding="utf-8"?>
+<p:sld xmlns:a="http://schemas.openxmlformats.org/drawingml/2006/main" xmlns:r="http://schemas.openxmlformats.org/officeDocument/2006/relationships" xmlns:p="http://schemas.openxmlformats.org/presentationml/2006/main">
+  <p:cSld>
+    <p:spTree>
+      <p:nvGrpSpPr>
+        <p:cNvPr id="1" name=""/>
+        <p:cNvGrpSpPr/>
+        <p:nvPr/>
+      </p:nvGrpSpPr>
+      <p:grpSpPr>
+        <a:xfrm>
+          <a:off x="0" y="0"/>
+          <a:ext cx="0" cy="0"/>
+          <a:chOff x="0" y="0"/>
+          <a:chExt cx="0" cy="0"/>
+        </a:xfrm>
+      </p:grpSpPr>
+      <p:pic>
+        <p:nvPicPr>
+          <p:cNvPr id="5" name="Content Placeholder 4">
+            <a:extLst>
+              <a:ext uri="{FF2B5EF4-FFF2-40B4-BE49-F238E27FC236}">
+                <a16:creationId xmlns:a16="http://schemas.microsoft.com/office/drawing/2014/main" id="{6E1739C9-1B74-4F7D-98CA-74AB795DFE8B}"/>
+              </a:ext>
+            </a:extLst>
+          </p:cNvPr>
+          <p:cNvPicPr>
+            <a:picLocks noGrp="1" noChangeAspect="1"/>
+          </p:cNvPicPr>
+          <p:nvPr>
+            <p:ph idx="1"/>
+          </p:nvPr>
+        </p:nvPicPr>
+        <p:blipFill>
+          <a:blip r:embed="rId2"/>
+          <a:stretch>
+            <a:fillRect/>
+          </a:stretch>
+        </p:blipFill>
+        <p:spPr>
+          <a:xfrm>
+            <a:off x="1555463" y="179742"/>
+            <a:ext cx="3982005" cy="6498515"/>
+          </a:xfrm>
+        </p:spPr>
+      </p:pic>
+      <p:pic>
+        <p:nvPicPr>
+          <p:cNvPr id="7" name="Picture 6">
+            <a:extLst>
+              <a:ext uri="{FF2B5EF4-FFF2-40B4-BE49-F238E27FC236}">
+                <a16:creationId xmlns:a16="http://schemas.microsoft.com/office/drawing/2014/main" id="{93CB5422-C02A-4C3D-93BF-F48468225468}"/>
+              </a:ext>
+            </a:extLst>
+          </p:cNvPr>
+          <p:cNvPicPr>
+            <a:picLocks noChangeAspect="1"/>
+          </p:cNvPicPr>
+          <p:nvPr/>
+        </p:nvPicPr>
+        <p:blipFill>
+          <a:blip r:embed="rId3"/>
+          <a:stretch>
+            <a:fillRect/>
+          </a:stretch>
+        </p:blipFill>
+        <p:spPr>
+          <a:xfrm>
+            <a:off x="6523254" y="2124075"/>
+            <a:ext cx="5327695" cy="3543300"/>
+          </a:xfrm>
+          <a:prstGeom prst="rect">
+            <a:avLst/>
+          </a:prstGeom>
+        </p:spPr>
+      </p:pic>
+      <p:sp>
+        <p:nvSpPr>
+          <p:cNvPr id="8" name="Arrow: Right 7">
+            <a:extLst>
+              <a:ext uri="{FF2B5EF4-FFF2-40B4-BE49-F238E27FC236}">
+                <a16:creationId xmlns:a16="http://schemas.microsoft.com/office/drawing/2014/main" id="{01019168-246E-4F89-85AE-5F6E09741355}"/>
+              </a:ext>
+            </a:extLst>
+          </p:cNvPr>
+          <p:cNvSpPr/>
+          <p:nvPr/>
+        </p:nvSpPr>
+        <p:spPr>
+          <a:xfrm>
+            <a:off x="5730323" y="3162300"/>
+            <a:ext cx="600075" cy="1000125"/>
+          </a:xfrm>
+          <a:prstGeom prst="rightArrow">
+            <a:avLst/>
+          </a:prstGeom>
+        </p:spPr>
+        <p:style>
+          <a:lnRef idx="2">
+            <a:schemeClr val="accent1">
+              <a:shade val="50000"/>
+            </a:schemeClr>
+          </a:lnRef>
+          <a:fillRef idx="1">
+            <a:schemeClr val="accent1"/>
+          </a:fillRef>
+          <a:effectRef idx="0">
+            <a:schemeClr val="accent1"/>
+          </a:effectRef>
+          <a:fontRef idx="minor">
+            <a:schemeClr val="lt1"/>
+          </a:fontRef>
+        </p:style>
+        <p:txBody>
+          <a:bodyPr rtlCol="0" anchor="ctr"/>
+          <a:lstStyle/>
+          <a:p>
+            <a:pPr algn="ctr"/>
+            <a:endParaRPr lang="en-IN"/>
+          </a:p>
+        </p:txBody>
+      </p:sp>
+    </p:spTree>
+    <p:extLst>
+      <p:ext uri="{BB962C8B-B14F-4D97-AF65-F5344CB8AC3E}">
+        <p14:creationId xmlns:p14="http://schemas.microsoft.com/office/powerpoint/2010/main" val="450307972"/>
+      </p:ext>
+    </p:extLst>
+  </p:cSld>
+  <p:clrMapOvr>
+    <a:masterClrMapping/>
+  </p:clrMapOvr>
+  <mc:AlternateContent xmlns:mc="http://schemas.openxmlformats.org/markup-compatibility/2006">
+    <mc:Choice xmlns:p159="http://schemas.microsoft.com/office/powerpoint/2015/09/main" Requires="p159">
+      <p:transition xmlns:p14="http://schemas.microsoft.com/office/powerpoint/2010/main" spd="slow" p14:dur="2000">
+        <p159:morph option="byObject"/>
+      </p:transition>
+    </mc:Choice>
+    <mc:Fallback>
+      <p:transition spd="slow">
+        <p:fade/>
+      </p:transition>
+    </mc:Fallback>
+  </mc:AlternateContent>
+</p:sld>
+</file>
+
+<file path=ppt/slides/slide23.xml><?xml version="1.0" encoding="utf-8"?>
+<p:sld xmlns:a="http://schemas.openxmlformats.org/drawingml/2006/main" xmlns:r="http://schemas.openxmlformats.org/officeDocument/2006/relationships" xmlns:p="http://schemas.openxmlformats.org/presentationml/2006/main">
+  <p:cSld>
+    <p:spTree>
+      <p:nvGrpSpPr>
+        <p:cNvPr id="1" name=""/>
+        <p:cNvGrpSpPr/>
+        <p:nvPr/>
+      </p:nvGrpSpPr>
+      <p:grpSpPr>
+        <a:xfrm>
+          <a:off x="0" y="0"/>
+          <a:ext cx="0" cy="0"/>
+          <a:chOff x="0" y="0"/>
+          <a:chExt cx="0" cy="0"/>
+        </a:xfrm>
+      </p:grpSpPr>
       <p:sp>
         <p:nvSpPr>
           <p:cNvPr id="2" name="Title 1">
             <a:extLst>
               <a:ext uri="{FF2B5EF4-FFF2-40B4-BE49-F238E27FC236}">
-                <a16:creationId xmlns:a16="http://schemas.microsoft.com/office/drawing/2014/main" id="{8A589FB0-E1E9-4454-A043-B2E3AC746383}"/>
+                <a16:creationId xmlns:a16="http://schemas.microsoft.com/office/drawing/2014/main" id="{31103DF5-B98E-4500-A342-F2CFA939D1F2}"/>
               </a:ext>
             </a:extLst>
           </p:cNvPr>
@@ -10017,14 +10247,552 @@
             <p:ph type="title"/>
           </p:nvPr>
         </p:nvSpPr>
+        <p:spPr>
+          <a:xfrm>
+            <a:off x="1912986" y="317428"/>
+            <a:ext cx="8911687" cy="1280890"/>
+          </a:xfrm>
+        </p:spPr>
+        <p:txBody>
+          <a:bodyPr/>
+          <a:lstStyle/>
+          <a:p>
+            <a:r>
+              <a:rPr lang="en-IN" dirty="0"/>
+              <a:t>Transaction Details</a:t>
+            </a:r>
+          </a:p>
+        </p:txBody>
+      </p:sp>
+      <p:pic>
+        <p:nvPicPr>
+          <p:cNvPr id="5" name="Content Placeholder 4">
+            <a:extLst>
+              <a:ext uri="{FF2B5EF4-FFF2-40B4-BE49-F238E27FC236}">
+                <a16:creationId xmlns:a16="http://schemas.microsoft.com/office/drawing/2014/main" id="{6BB056FE-990A-4082-BF1B-47F94CE6B3FF}"/>
+              </a:ext>
+            </a:extLst>
+          </p:cNvPr>
+          <p:cNvPicPr>
+            <a:picLocks noGrp="1" noChangeAspect="1"/>
+          </p:cNvPicPr>
+          <p:nvPr>
+            <p:ph idx="1"/>
+          </p:nvPr>
+        </p:nvPicPr>
+        <p:blipFill>
+          <a:blip r:embed="rId2"/>
+          <a:stretch>
+            <a:fillRect/>
+          </a:stretch>
+        </p:blipFill>
+        <p:spPr>
+          <a:xfrm>
+            <a:off x="1385448" y="1800224"/>
+            <a:ext cx="2130985" cy="3778250"/>
+          </a:xfrm>
+        </p:spPr>
+      </p:pic>
+      <p:pic>
+        <p:nvPicPr>
+          <p:cNvPr id="7" name="Picture 6">
+            <a:extLst>
+              <a:ext uri="{FF2B5EF4-FFF2-40B4-BE49-F238E27FC236}">
+                <a16:creationId xmlns:a16="http://schemas.microsoft.com/office/drawing/2014/main" id="{136A5A2D-B9AA-49EF-8FB6-BA157F844C45}"/>
+              </a:ext>
+            </a:extLst>
+          </p:cNvPr>
+          <p:cNvPicPr>
+            <a:picLocks noChangeAspect="1"/>
+          </p:cNvPicPr>
+          <p:nvPr/>
+        </p:nvPicPr>
+        <p:blipFill>
+          <a:blip r:embed="rId3"/>
+          <a:stretch>
+            <a:fillRect/>
+          </a:stretch>
+        </p:blipFill>
+        <p:spPr>
+          <a:xfrm>
+            <a:off x="3810000" y="1191551"/>
+            <a:ext cx="8382000" cy="5666449"/>
+          </a:xfrm>
+          <a:prstGeom prst="rect">
+            <a:avLst/>
+          </a:prstGeom>
+        </p:spPr>
+      </p:pic>
+    </p:spTree>
+    <p:extLst>
+      <p:ext uri="{BB962C8B-B14F-4D97-AF65-F5344CB8AC3E}">
+        <p14:creationId xmlns:p14="http://schemas.microsoft.com/office/powerpoint/2010/main" val="4201703618"/>
+      </p:ext>
+    </p:extLst>
+  </p:cSld>
+  <p:clrMapOvr>
+    <a:masterClrMapping/>
+  </p:clrMapOvr>
+  <mc:AlternateContent xmlns:mc="http://schemas.openxmlformats.org/markup-compatibility/2006">
+    <mc:Choice xmlns:p159="http://schemas.microsoft.com/office/powerpoint/2015/09/main" Requires="p159">
+      <p:transition xmlns:p14="http://schemas.microsoft.com/office/powerpoint/2010/main" spd="slow" p14:dur="2000">
+        <p159:morph option="byObject"/>
+      </p:transition>
+    </mc:Choice>
+    <mc:Fallback>
+      <p:transition spd="slow">
+        <p:fade/>
+      </p:transition>
+    </mc:Fallback>
+  </mc:AlternateContent>
+</p:sld>
+</file>
+
+<file path=ppt/slides/slide24.xml><?xml version="1.0" encoding="utf-8"?>
+<p:sld xmlns:a="http://schemas.openxmlformats.org/drawingml/2006/main" xmlns:r="http://schemas.openxmlformats.org/officeDocument/2006/relationships" xmlns:p="http://schemas.openxmlformats.org/presentationml/2006/main">
+  <p:cSld>
+    <p:spTree>
+      <p:nvGrpSpPr>
+        <p:cNvPr id="1" name=""/>
+        <p:cNvGrpSpPr/>
+        <p:nvPr/>
+      </p:nvGrpSpPr>
+      <p:grpSpPr>
+        <a:xfrm>
+          <a:off x="0" y="0"/>
+          <a:ext cx="0" cy="0"/>
+          <a:chOff x="0" y="0"/>
+          <a:chExt cx="0" cy="0"/>
+        </a:xfrm>
+      </p:grpSpPr>
+      <p:pic>
+        <p:nvPicPr>
+          <p:cNvPr id="5" name="Content Placeholder 4">
+            <a:extLst>
+              <a:ext uri="{FF2B5EF4-FFF2-40B4-BE49-F238E27FC236}">
+                <a16:creationId xmlns:a16="http://schemas.microsoft.com/office/drawing/2014/main" id="{4D42B7FE-A50D-46F2-8018-8A286624EE15}"/>
+              </a:ext>
+            </a:extLst>
+          </p:cNvPr>
+          <p:cNvPicPr>
+            <a:picLocks noGrp="1" noChangeAspect="1"/>
+          </p:cNvPicPr>
+          <p:nvPr>
+            <p:ph idx="1"/>
+          </p:nvPr>
+        </p:nvPicPr>
+        <p:blipFill rotWithShape="1">
+          <a:blip r:embed="rId2"/>
+          <a:srcRect r="24570"/>
+          <a:stretch/>
+        </p:blipFill>
+        <p:spPr>
+          <a:xfrm>
+            <a:off x="1130300" y="1509708"/>
+            <a:ext cx="10524671" cy="4412119"/>
+          </a:xfrm>
+        </p:spPr>
+      </p:pic>
+    </p:spTree>
+    <p:extLst>
+      <p:ext uri="{BB962C8B-B14F-4D97-AF65-F5344CB8AC3E}">
+        <p14:creationId xmlns:p14="http://schemas.microsoft.com/office/powerpoint/2010/main" val="1965642687"/>
+      </p:ext>
+    </p:extLst>
+  </p:cSld>
+  <p:clrMapOvr>
+    <a:masterClrMapping/>
+  </p:clrMapOvr>
+  <mc:AlternateContent xmlns:mc="http://schemas.openxmlformats.org/markup-compatibility/2006">
+    <mc:Choice xmlns:p159="http://schemas.microsoft.com/office/powerpoint/2015/09/main" Requires="p159">
+      <p:transition xmlns:p14="http://schemas.microsoft.com/office/powerpoint/2010/main" spd="slow" p14:dur="2000">
+        <p159:morph option="byObject"/>
+      </p:transition>
+    </mc:Choice>
+    <mc:Fallback>
+      <p:transition spd="slow">
+        <p:fade/>
+      </p:transition>
+    </mc:Fallback>
+  </mc:AlternateContent>
+</p:sld>
+</file>
+
+<file path=ppt/slides/slide25.xml><?xml version="1.0" encoding="utf-8"?>
+<p:sld xmlns:a="http://schemas.openxmlformats.org/drawingml/2006/main" xmlns:r="http://schemas.openxmlformats.org/officeDocument/2006/relationships" xmlns:p="http://schemas.openxmlformats.org/presentationml/2006/main">
+  <p:cSld>
+    <p:spTree>
+      <p:nvGrpSpPr>
+        <p:cNvPr id="1" name=""/>
+        <p:cNvGrpSpPr/>
+        <p:nvPr/>
+      </p:nvGrpSpPr>
+      <p:grpSpPr>
+        <a:xfrm>
+          <a:off x="0" y="0"/>
+          <a:ext cx="0" cy="0"/>
+          <a:chOff x="0" y="0"/>
+          <a:chExt cx="0" cy="0"/>
+        </a:xfrm>
+      </p:grpSpPr>
+      <p:pic>
+        <p:nvPicPr>
+          <p:cNvPr id="5" name="Content Placeholder 4">
+            <a:extLst>
+              <a:ext uri="{FF2B5EF4-FFF2-40B4-BE49-F238E27FC236}">
+                <a16:creationId xmlns:a16="http://schemas.microsoft.com/office/drawing/2014/main" id="{9BE05731-5634-4318-951B-D6FA15E02891}"/>
+              </a:ext>
+            </a:extLst>
+          </p:cNvPr>
+          <p:cNvPicPr>
+            <a:picLocks noGrp="1" noChangeAspect="1"/>
+          </p:cNvPicPr>
+          <p:nvPr>
+            <p:ph idx="1"/>
+          </p:nvPr>
+        </p:nvPicPr>
+        <p:blipFill>
+          <a:blip r:embed="rId2"/>
+          <a:stretch>
+            <a:fillRect/>
+          </a:stretch>
+        </p:blipFill>
+        <p:spPr>
+          <a:xfrm>
+            <a:off x="251046" y="61912"/>
+            <a:ext cx="11689908" cy="6734175"/>
+          </a:xfrm>
+        </p:spPr>
+      </p:pic>
+    </p:spTree>
+    <p:extLst>
+      <p:ext uri="{BB962C8B-B14F-4D97-AF65-F5344CB8AC3E}">
+        <p14:creationId xmlns:p14="http://schemas.microsoft.com/office/powerpoint/2010/main" val="2172269950"/>
+      </p:ext>
+    </p:extLst>
+  </p:cSld>
+  <p:clrMapOvr>
+    <a:masterClrMapping/>
+  </p:clrMapOvr>
+  <mc:AlternateContent xmlns:mc="http://schemas.openxmlformats.org/markup-compatibility/2006">
+    <mc:Choice xmlns:p159="http://schemas.microsoft.com/office/powerpoint/2015/09/main" Requires="p159">
+      <p:transition xmlns:p14="http://schemas.microsoft.com/office/powerpoint/2010/main" spd="slow" p14:dur="2000">
+        <p159:morph option="byObject"/>
+      </p:transition>
+    </mc:Choice>
+    <mc:Fallback>
+      <p:transition spd="slow">
+        <p:fade/>
+      </p:transition>
+    </mc:Fallback>
+  </mc:AlternateContent>
+</p:sld>
+</file>
+
+<file path=ppt/slides/slide26.xml><?xml version="1.0" encoding="utf-8"?>
+<p:sld xmlns:a="http://schemas.openxmlformats.org/drawingml/2006/main" xmlns:r="http://schemas.openxmlformats.org/officeDocument/2006/relationships" xmlns:p="http://schemas.openxmlformats.org/presentationml/2006/main">
+  <p:cSld>
+    <p:spTree>
+      <p:nvGrpSpPr>
+        <p:cNvPr id="1" name=""/>
+        <p:cNvGrpSpPr/>
+        <p:nvPr/>
+      </p:nvGrpSpPr>
+      <p:grpSpPr>
+        <a:xfrm>
+          <a:off x="0" y="0"/>
+          <a:ext cx="0" cy="0"/>
+          <a:chOff x="0" y="0"/>
+          <a:chExt cx="0" cy="0"/>
+        </a:xfrm>
+      </p:grpSpPr>
+      <p:sp>
+        <p:nvSpPr>
+          <p:cNvPr id="2" name="Title 1">
+            <a:extLst>
+              <a:ext uri="{FF2B5EF4-FFF2-40B4-BE49-F238E27FC236}">
+                <a16:creationId xmlns:a16="http://schemas.microsoft.com/office/drawing/2014/main" id="{DFD43F70-8B4B-48ED-A0A4-073DFB6DA40B}"/>
+              </a:ext>
+            </a:extLst>
+          </p:cNvPr>
+          <p:cNvSpPr>
+            <a:spLocks noGrp="1"/>
+          </p:cNvSpPr>
+          <p:nvPr>
+            <p:ph type="title"/>
+          </p:nvPr>
+        </p:nvSpPr>
         <p:spPr/>
         <p:txBody>
           <a:bodyPr/>
           <a:lstStyle/>
           <a:p>
             <a:r>
+              <a:rPr lang="en-US" dirty="0"/>
+              <a:t>END-TO-END WORKFLOW</a:t>
+            </a:r>
+            <a:endParaRPr lang="en-IN" dirty="0"/>
+          </a:p>
+        </p:txBody>
+      </p:sp>
+      <p:pic>
+        <p:nvPicPr>
+          <p:cNvPr id="5" name="Content Placeholder 4">
+            <a:extLst>
+              <a:ext uri="{FF2B5EF4-FFF2-40B4-BE49-F238E27FC236}">
+                <a16:creationId xmlns:a16="http://schemas.microsoft.com/office/drawing/2014/main" id="{4D97C6E7-2994-4525-B446-911ED29270EE}"/>
+              </a:ext>
+            </a:extLst>
+          </p:cNvPr>
+          <p:cNvPicPr>
+            <a:picLocks noGrp="1" noChangeAspect="1"/>
+          </p:cNvPicPr>
+          <p:nvPr>
+            <p:ph idx="1"/>
+          </p:nvPr>
+        </p:nvPicPr>
+        <p:blipFill>
+          <a:blip r:embed="rId2">
+            <a:extLst>
+              <a:ext uri="{28A0092B-C50C-407E-A947-70E740481C1C}">
+                <a14:useLocalDpi xmlns:a14="http://schemas.microsoft.com/office/drawing/2010/main" val="0"/>
+              </a:ext>
+            </a:extLst>
+          </a:blip>
+          <a:stretch>
+            <a:fillRect/>
+          </a:stretch>
+        </p:blipFill>
+        <p:spPr>
+          <a:xfrm>
+            <a:off x="2591940" y="1337926"/>
+            <a:ext cx="9135655" cy="5411163"/>
+          </a:xfrm>
+        </p:spPr>
+      </p:pic>
+    </p:spTree>
+    <p:extLst>
+      <p:ext uri="{BB962C8B-B14F-4D97-AF65-F5344CB8AC3E}">
+        <p14:creationId xmlns:p14="http://schemas.microsoft.com/office/powerpoint/2010/main" val="3582345271"/>
+      </p:ext>
+    </p:extLst>
+  </p:cSld>
+  <p:clrMapOvr>
+    <a:masterClrMapping/>
+  </p:clrMapOvr>
+  <mc:AlternateContent xmlns:mc="http://schemas.openxmlformats.org/markup-compatibility/2006">
+    <mc:Choice xmlns:p159="http://schemas.microsoft.com/office/powerpoint/2015/09/main" Requires="p159">
+      <p:transition xmlns:p14="http://schemas.microsoft.com/office/powerpoint/2010/main" spd="slow" p14:dur="2000">
+        <p159:morph option="byObject"/>
+      </p:transition>
+    </mc:Choice>
+    <mc:Fallback>
+      <p:transition spd="slow">
+        <p:fade/>
+      </p:transition>
+    </mc:Fallback>
+  </mc:AlternateContent>
+</p:sld>
+</file>
+
+<file path=ppt/slides/slide27.xml><?xml version="1.0" encoding="utf-8"?>
+<p:sld xmlns:a="http://schemas.openxmlformats.org/drawingml/2006/main" xmlns:r="http://schemas.openxmlformats.org/officeDocument/2006/relationships" xmlns:p="http://schemas.openxmlformats.org/presentationml/2006/main">
+  <p:cSld>
+    <p:spTree>
+      <p:nvGrpSpPr>
+        <p:cNvPr id="1" name=""/>
+        <p:cNvGrpSpPr/>
+        <p:nvPr/>
+      </p:nvGrpSpPr>
+      <p:grpSpPr>
+        <a:xfrm>
+          <a:off x="0" y="0"/>
+          <a:ext cx="0" cy="0"/>
+          <a:chOff x="0" y="0"/>
+          <a:chExt cx="0" cy="0"/>
+        </a:xfrm>
+      </p:grpSpPr>
+      <p:sp>
+        <p:nvSpPr>
+          <p:cNvPr id="2" name="Title 1">
+            <a:extLst>
+              <a:ext uri="{FF2B5EF4-FFF2-40B4-BE49-F238E27FC236}">
+                <a16:creationId xmlns:a16="http://schemas.microsoft.com/office/drawing/2014/main" id="{80CF6441-7116-428A-AC46-1C2464094189}"/>
+              </a:ext>
+            </a:extLst>
+          </p:cNvPr>
+          <p:cNvSpPr>
+            <a:spLocks noGrp="1"/>
+          </p:cNvSpPr>
+          <p:nvPr>
+            <p:ph type="title"/>
+          </p:nvPr>
+        </p:nvSpPr>
+        <p:spPr/>
+        <p:txBody>
+          <a:bodyPr/>
+          <a:lstStyle/>
+          <a:p>
+            <a:r>
               <a:rPr lang="en-IN" dirty="0"/>
-              <a:t>Current Development Progress</a:t>
+              <a:t>Testing Progress</a:t>
+            </a:r>
+            <a:br>
+              <a:rPr lang="en-IN" dirty="0"/>
+            </a:br>
+            <a:endParaRPr lang="en-IN" dirty="0"/>
+          </a:p>
+        </p:txBody>
+      </p:sp>
+      <p:sp>
+        <p:nvSpPr>
+          <p:cNvPr id="3" name="Content Placeholder 2">
+            <a:extLst>
+              <a:ext uri="{FF2B5EF4-FFF2-40B4-BE49-F238E27FC236}">
+                <a16:creationId xmlns:a16="http://schemas.microsoft.com/office/drawing/2014/main" id="{78A82AC6-7F02-4F35-8794-A520BE604CCE}"/>
+              </a:ext>
+            </a:extLst>
+          </p:cNvPr>
+          <p:cNvSpPr>
+            <a:spLocks noGrp="1"/>
+          </p:cNvSpPr>
+          <p:nvPr>
+            <p:ph idx="1"/>
+          </p:nvPr>
+        </p:nvSpPr>
+        <p:spPr/>
+        <p:txBody>
+          <a:bodyPr>
+            <a:normAutofit/>
+          </a:bodyPr>
+          <a:lstStyle/>
+          <a:p>
+            <a:pPr>
+              <a:buFont typeface="Wingdings" panose="05000000000000000000" pitchFamily="2" charset="2"/>
+              <a:buChar char="Ø"/>
+            </a:pPr>
+            <a:r>
+              <a:rPr lang="en-IN" b="1" dirty="0"/>
+              <a:t>Functional Testing </a:t>
+            </a:r>
+            <a:r>
+              <a:rPr lang="en-IN" dirty="0"/>
+              <a:t>- Tested voting, candidate loading, and result generation features.</a:t>
+            </a:r>
+          </a:p>
+          <a:p>
+            <a:pPr>
+              <a:buFont typeface="Wingdings" panose="05000000000000000000" pitchFamily="2" charset="2"/>
+              <a:buChar char="Ø"/>
+            </a:pPr>
+            <a:r>
+              <a:rPr lang="en-IN" b="1" dirty="0"/>
+              <a:t>Duplicate Vote Testing </a:t>
+            </a:r>
+            <a:r>
+              <a:rPr lang="en-IN" dirty="0"/>
+              <a:t>- Verified prevention of multiple voting attempts by same user.</a:t>
+            </a:r>
+          </a:p>
+          <a:p>
+            <a:pPr>
+              <a:buFont typeface="Wingdings" panose="05000000000000000000" pitchFamily="2" charset="2"/>
+              <a:buChar char="Ø"/>
+            </a:pPr>
+            <a:r>
+              <a:rPr lang="en-IN" b="1" dirty="0"/>
+              <a:t>Security Testing </a:t>
+            </a:r>
+            <a:r>
+              <a:rPr lang="en-IN" dirty="0"/>
+              <a:t>- Tested unauthorized access and invalid transaction handling.</a:t>
+            </a:r>
+          </a:p>
+          <a:p>
+            <a:pPr>
+              <a:buFont typeface="Wingdings" panose="05000000000000000000" pitchFamily="2" charset="2"/>
+              <a:buChar char="Ø"/>
+            </a:pPr>
+            <a:r>
+              <a:rPr lang="en-IN" b="1" dirty="0"/>
+              <a:t>Blockchain Transaction Testing </a:t>
+            </a:r>
+            <a:r>
+              <a:rPr lang="en-IN" dirty="0"/>
+              <a:t>- Verified successful transaction recording and confirmation on blockchain. </a:t>
+            </a:r>
+          </a:p>
+          <a:p>
+            <a:endParaRPr lang="en-IN" dirty="0"/>
+          </a:p>
+        </p:txBody>
+      </p:sp>
+    </p:spTree>
+    <p:extLst>
+      <p:ext uri="{BB962C8B-B14F-4D97-AF65-F5344CB8AC3E}">
+        <p14:creationId xmlns:p14="http://schemas.microsoft.com/office/powerpoint/2010/main" val="1567319336"/>
+      </p:ext>
+    </p:extLst>
+  </p:cSld>
+  <p:clrMapOvr>
+    <a:masterClrMapping/>
+  </p:clrMapOvr>
+  <mc:AlternateContent xmlns:mc="http://schemas.openxmlformats.org/markup-compatibility/2006">
+    <mc:Choice xmlns:p159="http://schemas.microsoft.com/office/powerpoint/2015/09/main" Requires="p159">
+      <p:transition xmlns:p14="http://schemas.microsoft.com/office/powerpoint/2010/main" spd="slow" p14:dur="2000">
+        <p159:morph option="byObject"/>
+      </p:transition>
+    </mc:Choice>
+    <mc:Fallback>
+      <p:transition spd="slow">
+        <p:fade/>
+      </p:transition>
+    </mc:Fallback>
+  </mc:AlternateContent>
+</p:sld>
+</file>
+
+<file path=ppt/slides/slide28.xml><?xml version="1.0" encoding="utf-8"?>
+<p:sld xmlns:a="http://schemas.openxmlformats.org/drawingml/2006/main" xmlns:r="http://schemas.openxmlformats.org/officeDocument/2006/relationships" xmlns:p="http://schemas.openxmlformats.org/presentationml/2006/main">
+  <p:cSld>
+    <p:spTree>
+      <p:nvGrpSpPr>
+        <p:cNvPr id="1" name=""/>
+        <p:cNvGrpSpPr/>
+        <p:nvPr/>
+      </p:nvGrpSpPr>
+      <p:grpSpPr>
+        <a:xfrm>
+          <a:off x="0" y="0"/>
+          <a:ext cx="0" cy="0"/>
+          <a:chOff x="0" y="0"/>
+          <a:chExt cx="0" cy="0"/>
+        </a:xfrm>
+      </p:grpSpPr>
+      <p:sp>
+        <p:nvSpPr>
+          <p:cNvPr id="2" name="Title 1">
+            <a:extLst>
+              <a:ext uri="{FF2B5EF4-FFF2-40B4-BE49-F238E27FC236}">
+                <a16:creationId xmlns:a16="http://schemas.microsoft.com/office/drawing/2014/main" id="{5528D56A-2686-49CA-B6DA-DA9F50476492}"/>
+              </a:ext>
+            </a:extLst>
+          </p:cNvPr>
+          <p:cNvSpPr>
+            <a:spLocks noGrp="1"/>
+          </p:cNvSpPr>
+          <p:nvPr>
+            <p:ph type="title"/>
+          </p:nvPr>
+        </p:nvSpPr>
+        <p:spPr/>
+        <p:txBody>
+          <a:bodyPr/>
+          <a:lstStyle/>
+          <a:p>
+            <a:r>
+              <a:rPr lang="en-IN" dirty="0"/>
+              <a:t>Current Implementation Status</a:t>
             </a:r>
           </a:p>
         </p:txBody>
@@ -10034,7 +10802,7 @@
           <p:cNvPr id="4" name="Content Placeholder 3">
             <a:extLst>
               <a:ext uri="{FF2B5EF4-FFF2-40B4-BE49-F238E27FC236}">
-                <a16:creationId xmlns:a16="http://schemas.microsoft.com/office/drawing/2014/main" id="{5A9741C9-EF04-40B7-B50D-E8EF963AD300}"/>
+                <a16:creationId xmlns:a16="http://schemas.microsoft.com/office/drawing/2014/main" id="{856F073E-C167-44FF-B21F-1EC6C8E140FC}"/>
               </a:ext>
             </a:extLst>
           </p:cNvPr>
@@ -10045,48 +10813,50 @@
             <p:ph idx="1"/>
             <p:extLst>
               <p:ext uri="{D42A27DB-BD31-4B8C-83A1-F6EECF244321}">
-                <p14:modId xmlns:p14="http://schemas.microsoft.com/office/powerpoint/2010/main" val="125459282"/>
+                <p14:modId xmlns:p14="http://schemas.microsoft.com/office/powerpoint/2010/main" val="2763793745"/>
               </p:ext>
             </p:extLst>
           </p:nvPr>
         </p:nvGraphicFramePr>
         <p:xfrm>
-          <a:off x="2592925" y="2133600"/>
-          <a:ext cx="8911686" cy="2698750"/>
+          <a:off x="2592925" y="1905000"/>
+          <a:ext cx="8372258" cy="3744781"/>
         </p:xfrm>
         <a:graphic>
           <a:graphicData uri="http://schemas.openxmlformats.org/drawingml/2006/table">
             <a:tbl>
-              <a:tblPr/>
+              <a:tblPr>
+                <a:tableStyleId>{2D5ABB26-0587-4C30-8999-92F81FD0307C}</a:tableStyleId>
+              </a:tblPr>
               <a:tblGrid>
-                <a:gridCol w="4455843">
+                <a:gridCol w="5179475">
                   <a:extLst>
                     <a:ext uri="{9D8B030D-6E8A-4147-A177-3AD203B41FA5}">
-                      <a16:colId xmlns:a16="http://schemas.microsoft.com/office/drawing/2014/main" val="2932086390"/>
+                      <a16:colId xmlns:a16="http://schemas.microsoft.com/office/drawing/2014/main" val="1203058884"/>
                     </a:ext>
                   </a:extLst>
                 </a:gridCol>
-                <a:gridCol w="4455843">
+                <a:gridCol w="3192783">
                   <a:extLst>
                     <a:ext uri="{9D8B030D-6E8A-4147-A177-3AD203B41FA5}">
-                      <a16:colId xmlns:a16="http://schemas.microsoft.com/office/drawing/2014/main" val="529130259"/>
+                      <a16:colId xmlns:a16="http://schemas.microsoft.com/office/drawing/2014/main" val="1201885191"/>
                     </a:ext>
                   </a:extLst>
                 </a:gridCol>
               </a:tblGrid>
-              <a:tr h="269875">
+              <a:tr h="331563">
                 <a:tc>
                   <a:txBody>
                     <a:bodyPr/>
                     <a:lstStyle/>
                     <a:p>
                       <a:r>
-                        <a:rPr lang="en-IN" sz="1300" b="1" dirty="0"/>
+                        <a:rPr lang="en-IN" sz="1700" b="1" dirty="0"/>
                         <a:t>Module</a:t>
                       </a:r>
                     </a:p>
                   </a:txBody>
-                  <a:tcPr marL="67469" marR="67469" marT="33734" marB="33734" anchor="ctr">
+                  <a:tcPr marL="85869" marR="85869" marT="42935" marB="42935" anchor="ctr">
                     <a:lnL w="12700" cap="flat" cmpd="sng" algn="ctr">
                       <a:solidFill>
                         <a:schemeClr val="tx1"/>
@@ -10131,12 +10901,12 @@
                     <a:lstStyle/>
                     <a:p>
                       <a:r>
-                        <a:rPr lang="en-IN" sz="1300" b="1" dirty="0"/>
-                        <a:t>Progress Status</a:t>
+                        <a:rPr lang="en-IN" sz="1700" b="1" dirty="0"/>
+                        <a:t>Status</a:t>
                       </a:r>
                     </a:p>
                   </a:txBody>
-                  <a:tcPr marL="67469" marR="67469" marT="33734" marB="33734" anchor="ctr">
+                  <a:tcPr marL="85869" marR="85869" marT="42935" marB="42935" anchor="ctr">
                     <a:lnL w="12700" cap="flat" cmpd="sng" algn="ctr">
                       <a:solidFill>
                         <a:schemeClr val="tx1"/>
@@ -10177,23 +10947,23 @@
                 </a:tc>
                 <a:extLst>
                   <a:ext uri="{0D108BD9-81ED-4DB2-BD59-A6C34878D82A}">
-                    <a16:rowId xmlns:a16="http://schemas.microsoft.com/office/drawing/2014/main" val="2653964634"/>
+                    <a16:rowId xmlns:a16="http://schemas.microsoft.com/office/drawing/2014/main" val="503692950"/>
                   </a:ext>
                 </a:extLst>
               </a:tr>
-              <a:tr h="269875">
+              <a:tr h="331563">
                 <a:tc>
                   <a:txBody>
                     <a:bodyPr/>
                     <a:lstStyle/>
                     <a:p>
                       <a:r>
-                        <a:rPr lang="en-IN" sz="1300" dirty="0"/>
-                        <a:t>Smart Contract Development / Deployment</a:t>
+                        <a:rPr lang="en-IN" sz="1700" dirty="0"/>
+                        <a:t>Smart Contract Development</a:t>
                       </a:r>
                     </a:p>
                   </a:txBody>
-                  <a:tcPr marL="67469" marR="67469" marT="33734" marB="33734" anchor="ctr">
+                  <a:tcPr marL="85869" marR="85869" marT="42935" marB="42935" anchor="ctr">
                     <a:lnL w="12700" cap="flat" cmpd="sng" algn="ctr">
                       <a:solidFill>
                         <a:schemeClr val="tx1"/>
@@ -10238,12 +11008,12 @@
                     <a:lstStyle/>
                     <a:p>
                       <a:r>
-                        <a:rPr lang="en-IN" sz="1300" dirty="0"/>
+                        <a:rPr lang="en-IN" sz="1700"/>
                         <a:t>Completed</a:t>
                       </a:r>
                     </a:p>
                   </a:txBody>
-                  <a:tcPr marL="67469" marR="67469" marT="33734" marB="33734" anchor="ctr">
+                  <a:tcPr marL="85869" marR="85869" marT="42935" marB="42935" anchor="ctr">
                     <a:lnL w="12700" cap="flat" cmpd="sng" algn="ctr">
                       <a:solidFill>
                         <a:schemeClr val="tx1"/>
@@ -10284,23 +11054,23 @@
                 </a:tc>
                 <a:extLst>
                   <a:ext uri="{0D108BD9-81ED-4DB2-BD59-A6C34878D82A}">
-                    <a16:rowId xmlns:a16="http://schemas.microsoft.com/office/drawing/2014/main" val="4346031"/>
+                    <a16:rowId xmlns:a16="http://schemas.microsoft.com/office/drawing/2014/main" val="3315274469"/>
                   </a:ext>
                 </a:extLst>
               </a:tr>
-              <a:tr h="269875">
+              <a:tr h="331563">
                 <a:tc>
                   <a:txBody>
                     <a:bodyPr/>
                     <a:lstStyle/>
                     <a:p>
                       <a:r>
-                        <a:rPr lang="en-IN" sz="1300" dirty="0"/>
-                        <a:t>Blockchain Network Setup</a:t>
+                        <a:rPr lang="en-IN" sz="1700" dirty="0"/>
+                        <a:t>Frontend Development</a:t>
                       </a:r>
                     </a:p>
                   </a:txBody>
-                  <a:tcPr marL="67469" marR="67469" marT="33734" marB="33734" anchor="ctr">
+                  <a:tcPr marL="85869" marR="85869" marT="42935" marB="42935" anchor="ctr">
                     <a:lnL w="12700" cap="flat" cmpd="sng" algn="ctr">
                       <a:solidFill>
                         <a:schemeClr val="tx1"/>
@@ -10345,12 +11115,12 @@
                     <a:lstStyle/>
                     <a:p>
                       <a:r>
-                        <a:rPr lang="en-IN" sz="1300"/>
+                        <a:rPr lang="en-IN" sz="1700" dirty="0"/>
                         <a:t>Completed</a:t>
                       </a:r>
                     </a:p>
                   </a:txBody>
-                  <a:tcPr marL="67469" marR="67469" marT="33734" marB="33734" anchor="ctr">
+                  <a:tcPr marL="85869" marR="85869" marT="42935" marB="42935" anchor="ctr">
                     <a:lnL w="12700" cap="flat" cmpd="sng" algn="ctr">
                       <a:solidFill>
                         <a:schemeClr val="tx1"/>
@@ -10391,23 +11161,23 @@
                 </a:tc>
                 <a:extLst>
                   <a:ext uri="{0D108BD9-81ED-4DB2-BD59-A6C34878D82A}">
-                    <a16:rowId xmlns:a16="http://schemas.microsoft.com/office/drawing/2014/main" val="949998831"/>
+                    <a16:rowId xmlns:a16="http://schemas.microsoft.com/office/drawing/2014/main" val="4043094338"/>
                   </a:ext>
                 </a:extLst>
               </a:tr>
-              <a:tr h="269875">
+              <a:tr h="359130">
                 <a:tc>
                   <a:txBody>
                     <a:bodyPr/>
                     <a:lstStyle/>
                     <a:p>
                       <a:r>
-                        <a:rPr lang="en-IN" sz="1300"/>
-                        <a:t>Frontend User Interface</a:t>
+                        <a:rPr lang="en-IN" sz="1700" dirty="0"/>
+                        <a:t>Wallet Integration</a:t>
                       </a:r>
                     </a:p>
                   </a:txBody>
-                  <a:tcPr marL="67469" marR="67469" marT="33734" marB="33734" anchor="ctr">
+                  <a:tcPr marL="85869" marR="85869" marT="42935" marB="42935" anchor="ctr">
                     <a:lnL w="12700" cap="flat" cmpd="sng" algn="ctr">
                       <a:solidFill>
                         <a:schemeClr val="tx1"/>
@@ -10452,12 +11222,12 @@
                     <a:lstStyle/>
                     <a:p>
                       <a:r>
-                        <a:rPr lang="en-IN" sz="1300"/>
+                        <a:rPr lang="en-IN" sz="1700"/>
                         <a:t>Completed</a:t>
                       </a:r>
                     </a:p>
                   </a:txBody>
-                  <a:tcPr marL="67469" marR="67469" marT="33734" marB="33734" anchor="ctr">
+                  <a:tcPr marL="85869" marR="85869" marT="42935" marB="42935" anchor="ctr">
                     <a:lnL w="12700" cap="flat" cmpd="sng" algn="ctr">
                       <a:solidFill>
                         <a:schemeClr val="tx1"/>
@@ -10498,27 +11268,23 @@
                 </a:tc>
                 <a:extLst>
                   <a:ext uri="{0D108BD9-81ED-4DB2-BD59-A6C34878D82A}">
-                    <a16:rowId xmlns:a16="http://schemas.microsoft.com/office/drawing/2014/main" val="2026205390"/>
+                    <a16:rowId xmlns:a16="http://schemas.microsoft.com/office/drawing/2014/main" val="2823851881"/>
                   </a:ext>
                 </a:extLst>
               </a:tr>
-              <a:tr h="269875">
+              <a:tr h="331563">
                 <a:tc>
                   <a:txBody>
                     <a:bodyPr/>
                     <a:lstStyle/>
                     <a:p>
                       <a:r>
-                        <a:rPr lang="en-IN" sz="1300" dirty="0" err="1"/>
-                        <a:t>MetaMask</a:t>
-                      </a:r>
-                      <a:r>
-                        <a:rPr lang="en-IN" sz="1300" dirty="0"/>
-                        <a:t> Wallet Integration</a:t>
+                        <a:rPr lang="en-IN" sz="1700" dirty="0"/>
+                        <a:t>Blockchain Integration</a:t>
                       </a:r>
                     </a:p>
                   </a:txBody>
-                  <a:tcPr marL="67469" marR="67469" marT="33734" marB="33734" anchor="ctr">
+                  <a:tcPr marL="85869" marR="85869" marT="42935" marB="42935" anchor="ctr">
                     <a:lnL w="12700" cap="flat" cmpd="sng" algn="ctr">
                       <a:solidFill>
                         <a:schemeClr val="tx1"/>
@@ -10563,12 +11329,12 @@
                     <a:lstStyle/>
                     <a:p>
                       <a:r>
-                        <a:rPr lang="en-IN" sz="1300"/>
+                        <a:rPr lang="en-IN" sz="1700"/>
                         <a:t>Completed</a:t>
                       </a:r>
                     </a:p>
                   </a:txBody>
-                  <a:tcPr marL="67469" marR="67469" marT="33734" marB="33734" anchor="ctr">
+                  <a:tcPr marL="85869" marR="85869" marT="42935" marB="42935" anchor="ctr">
                     <a:lnL w="12700" cap="flat" cmpd="sng" algn="ctr">
                       <a:solidFill>
                         <a:schemeClr val="tx1"/>
@@ -10609,23 +11375,23 @@
                 </a:tc>
                 <a:extLst>
                   <a:ext uri="{0D108BD9-81ED-4DB2-BD59-A6C34878D82A}">
-                    <a16:rowId xmlns:a16="http://schemas.microsoft.com/office/drawing/2014/main" val="1285823460"/>
+                    <a16:rowId xmlns:a16="http://schemas.microsoft.com/office/drawing/2014/main" val="3113801242"/>
                   </a:ext>
                 </a:extLst>
               </a:tr>
-              <a:tr h="269875">
+              <a:tr h="331563">
                 <a:tc>
                   <a:txBody>
                     <a:bodyPr/>
                     <a:lstStyle/>
                     <a:p>
                       <a:r>
-                        <a:rPr lang="en-IN" sz="1300" dirty="0"/>
-                        <a:t>Candidate Display Module</a:t>
+                        <a:rPr lang="en-IN" sz="1700" dirty="0"/>
+                        <a:t>Smart Contract Deployment</a:t>
                       </a:r>
                     </a:p>
                   </a:txBody>
-                  <a:tcPr marL="67469" marR="67469" marT="33734" marB="33734" anchor="ctr">
+                  <a:tcPr marL="85869" marR="85869" marT="42935" marB="42935" anchor="ctr">
                     <a:lnL w="12700" cap="flat" cmpd="sng" algn="ctr">
                       <a:solidFill>
                         <a:schemeClr val="tx1"/>
@@ -10670,12 +11436,12 @@
                     <a:lstStyle/>
                     <a:p>
                       <a:r>
-                        <a:rPr lang="en-IN" sz="1300" dirty="0"/>
+                        <a:rPr lang="en-IN" sz="1700"/>
                         <a:t>Completed</a:t>
                       </a:r>
                     </a:p>
                   </a:txBody>
-                  <a:tcPr marL="67469" marR="67469" marT="33734" marB="33734" anchor="ctr">
+                  <a:tcPr marL="85869" marR="85869" marT="42935" marB="42935" anchor="ctr">
                     <a:lnL w="12700" cap="flat" cmpd="sng" algn="ctr">
                       <a:solidFill>
                         <a:schemeClr val="tx1"/>
@@ -10716,23 +11482,23 @@
                 </a:tc>
                 <a:extLst>
                   <a:ext uri="{0D108BD9-81ED-4DB2-BD59-A6C34878D82A}">
-                    <a16:rowId xmlns:a16="http://schemas.microsoft.com/office/drawing/2014/main" val="616397511"/>
+                    <a16:rowId xmlns:a16="http://schemas.microsoft.com/office/drawing/2014/main" val="28671041"/>
                   </a:ext>
                 </a:extLst>
               </a:tr>
-              <a:tr h="269875">
+              <a:tr h="331563">
                 <a:tc>
                   <a:txBody>
                     <a:bodyPr/>
                     <a:lstStyle/>
                     <a:p>
                       <a:r>
-                        <a:rPr lang="en-IN" sz="1300" dirty="0"/>
-                        <a:t>Duplicate Vote Prevention</a:t>
+                        <a:rPr lang="en-IN" sz="1700" dirty="0"/>
+                        <a:t>Vote Casting System</a:t>
                       </a:r>
                     </a:p>
                   </a:txBody>
-                  <a:tcPr marL="67469" marR="67469" marT="33734" marB="33734" anchor="ctr">
+                  <a:tcPr marL="85869" marR="85869" marT="42935" marB="42935" anchor="ctr">
                     <a:lnL w="12700" cap="flat" cmpd="sng" algn="ctr">
                       <a:solidFill>
                         <a:schemeClr val="tx1"/>
@@ -10777,12 +11543,12 @@
                     <a:lstStyle/>
                     <a:p>
                       <a:r>
-                        <a:rPr lang="en-IN" sz="1300"/>
+                        <a:rPr lang="en-IN" sz="1700"/>
                         <a:t>Completed</a:t>
                       </a:r>
                     </a:p>
                   </a:txBody>
-                  <a:tcPr marL="67469" marR="67469" marT="33734" marB="33734" anchor="ctr">
+                  <a:tcPr marL="85869" marR="85869" marT="42935" marB="42935" anchor="ctr">
                     <a:lnL w="12700" cap="flat" cmpd="sng" algn="ctr">
                       <a:solidFill>
                         <a:schemeClr val="tx1"/>
@@ -10823,23 +11589,23 @@
                 </a:tc>
                 <a:extLst>
                   <a:ext uri="{0D108BD9-81ED-4DB2-BD59-A6C34878D82A}">
-                    <a16:rowId xmlns:a16="http://schemas.microsoft.com/office/drawing/2014/main" val="2629097555"/>
+                    <a16:rowId xmlns:a16="http://schemas.microsoft.com/office/drawing/2014/main" val="3205276382"/>
                   </a:ext>
                 </a:extLst>
               </a:tr>
-              <a:tr h="269875">
+              <a:tr h="331563">
                 <a:tc>
                   <a:txBody>
                     <a:bodyPr/>
                     <a:lstStyle/>
                     <a:p>
                       <a:r>
-                        <a:rPr lang="en-US" sz="1300"/>
-                        <a:t>Blockchain Interaction using Ethers.js</a:t>
+                        <a:rPr lang="en-IN" sz="1700" dirty="0"/>
+                        <a:t>Duplicate Vote Prevention</a:t>
                       </a:r>
                     </a:p>
                   </a:txBody>
-                  <a:tcPr marL="67469" marR="67469" marT="33734" marB="33734" anchor="ctr">
+                  <a:tcPr marL="85869" marR="85869" marT="42935" marB="42935" anchor="ctr">
                     <a:lnL w="12700" cap="flat" cmpd="sng" algn="ctr">
                       <a:solidFill>
                         <a:schemeClr val="tx1"/>
@@ -10884,12 +11650,12 @@
                     <a:lstStyle/>
                     <a:p>
                       <a:r>
-                        <a:rPr lang="en-IN" sz="1300" dirty="0"/>
+                        <a:rPr lang="en-IN" sz="1700"/>
                         <a:t>Completed</a:t>
                       </a:r>
                     </a:p>
                   </a:txBody>
-                  <a:tcPr marL="67469" marR="67469" marT="33734" marB="33734" anchor="ctr">
+                  <a:tcPr marL="85869" marR="85869" marT="42935" marB="42935" anchor="ctr">
                     <a:lnL w="12700" cap="flat" cmpd="sng" algn="ctr">
                       <a:solidFill>
                         <a:schemeClr val="tx1"/>
@@ -10930,23 +11696,23 @@
                 </a:tc>
                 <a:extLst>
                   <a:ext uri="{0D108BD9-81ED-4DB2-BD59-A6C34878D82A}">
-                    <a16:rowId xmlns:a16="http://schemas.microsoft.com/office/drawing/2014/main" val="1108701785"/>
+                    <a16:rowId xmlns:a16="http://schemas.microsoft.com/office/drawing/2014/main" val="39594429"/>
                   </a:ext>
                 </a:extLst>
               </a:tr>
-              <a:tr h="269875">
+              <a:tr h="366971">
                 <a:tc>
                   <a:txBody>
                     <a:bodyPr/>
                     <a:lstStyle/>
                     <a:p>
                       <a:r>
-                        <a:rPr lang="en-IN" sz="1300"/>
-                        <a:t>Transaction Confirmation Handling</a:t>
+                        <a:rPr lang="en-IN" sz="1700" dirty="0"/>
+                        <a:t>Countdown Timer</a:t>
                       </a:r>
                     </a:p>
                   </a:txBody>
-                  <a:tcPr marL="67469" marR="67469" marT="33734" marB="33734" anchor="ctr">
+                  <a:tcPr marL="85869" marR="85869" marT="42935" marB="42935" anchor="ctr">
                     <a:lnL w="12700" cap="flat" cmpd="sng" algn="ctr">
                       <a:solidFill>
                         <a:schemeClr val="tx1"/>
@@ -10991,12 +11757,12 @@
                     <a:lstStyle/>
                     <a:p>
                       <a:r>
-                        <a:rPr lang="en-IN" sz="1300"/>
+                        <a:rPr lang="en-IN" sz="1700" dirty="0"/>
                         <a:t>Completed</a:t>
                       </a:r>
                     </a:p>
                   </a:txBody>
-                  <a:tcPr marL="67469" marR="67469" marT="33734" marB="33734" anchor="ctr">
+                  <a:tcPr marL="85869" marR="85869" marT="42935" marB="42935" anchor="ctr">
                     <a:lnL w="12700" cap="flat" cmpd="sng" algn="ctr">
                       <a:solidFill>
                         <a:schemeClr val="tx1"/>
@@ -11037,23 +11803,43 @@
                 </a:tc>
                 <a:extLst>
                   <a:ext uri="{0D108BD9-81ED-4DB2-BD59-A6C34878D82A}">
-                    <a16:rowId xmlns:a16="http://schemas.microsoft.com/office/drawing/2014/main" val="3438159501"/>
+                    <a16:rowId xmlns:a16="http://schemas.microsoft.com/office/drawing/2014/main" val="2822375027"/>
                   </a:ext>
                 </a:extLst>
               </a:tr>
-              <a:tr h="269875">
+              <a:tr h="580588">
                 <a:tc>
                   <a:txBody>
                     <a:bodyPr/>
                     <a:lstStyle/>
                     <a:p>
+                      <a:pPr marL="0" marR="0" lvl="0" indent="0" algn="l" defTabSz="457200" rtl="0" eaLnBrk="1" fontAlgn="auto" latinLnBrk="0" hangingPunct="1">
+                        <a:lnSpc>
+                          <a:spcPct val="100000"/>
+                        </a:lnSpc>
+                        <a:spcBef>
+                          <a:spcPts val="0"/>
+                        </a:spcBef>
+                        <a:spcAft>
+                          <a:spcPts val="0"/>
+                        </a:spcAft>
+                        <a:buClrTx/>
+                        <a:buSzTx/>
+                        <a:buFontTx/>
+                        <a:buNone/>
+                        <a:tabLst/>
+                        <a:defRPr/>
+                      </a:pPr>
                       <a:r>
-                        <a:rPr lang="en-IN" sz="1300"/>
+                        <a:rPr lang="en-IN" sz="1700" dirty="0"/>
                         <a:t>Testing and Validation</a:t>
                       </a:r>
                     </a:p>
+                    <a:p>
+                      <a:endParaRPr lang="en-IN" sz="1700" dirty="0"/>
+                    </a:p>
                   </a:txBody>
-                  <a:tcPr marL="67469" marR="67469" marT="33734" marB="33734" anchor="ctr">
+                  <a:tcPr marL="85869" marR="85869" marT="42935" marB="42935" anchor="ctr">
                     <a:lnL w="12700" cap="flat" cmpd="sng" algn="ctr">
                       <a:solidFill>
                         <a:schemeClr val="tx1"/>
@@ -11098,12 +11884,12 @@
                     <a:lstStyle/>
                     <a:p>
                       <a:r>
-                        <a:rPr lang="en-IN" sz="1300" dirty="0"/>
-                        <a:t>Ongoing</a:t>
+                        <a:rPr lang="en-IN" sz="1700" dirty="0"/>
+                        <a:t>Completed till current logic</a:t>
                       </a:r>
                     </a:p>
                   </a:txBody>
-                  <a:tcPr marL="67469" marR="67469" marT="33734" marB="33734" anchor="ctr">
+                  <a:tcPr marL="85869" marR="85869" marT="42935" marB="42935" anchor="ctr">
                     <a:lnL w="12700" cap="flat" cmpd="sng" algn="ctr">
                       <a:solidFill>
                         <a:schemeClr val="tx1"/>
@@ -11144,7 +11930,7 @@
                 </a:tc>
                 <a:extLst>
                   <a:ext uri="{0D108BD9-81ED-4DB2-BD59-A6C34878D82A}">
-                    <a16:rowId xmlns:a16="http://schemas.microsoft.com/office/drawing/2014/main" val="2036826820"/>
+                    <a16:rowId xmlns:a16="http://schemas.microsoft.com/office/drawing/2014/main" val="1101100475"/>
                   </a:ext>
                 </a:extLst>
               </a:tr>
@@ -11155,13 +11941,665 @@
     </p:spTree>
     <p:extLst>
       <p:ext uri="{BB962C8B-B14F-4D97-AF65-F5344CB8AC3E}">
-        <p14:creationId xmlns:p14="http://schemas.microsoft.com/office/powerpoint/2010/main" val="4095737402"/>
+        <p14:creationId xmlns:p14="http://schemas.microsoft.com/office/powerpoint/2010/main" val="1319547087"/>
       </p:ext>
     </p:extLst>
   </p:cSld>
   <p:clrMapOvr>
     <a:masterClrMapping/>
   </p:clrMapOvr>
+  <mc:AlternateContent xmlns:mc="http://schemas.openxmlformats.org/markup-compatibility/2006">
+    <mc:Choice xmlns:p159="http://schemas.microsoft.com/office/powerpoint/2015/09/main" Requires="p159">
+      <p:transition xmlns:p14="http://schemas.microsoft.com/office/powerpoint/2010/main" spd="slow" p14:dur="2000">
+        <p159:morph option="byObject"/>
+      </p:transition>
+    </mc:Choice>
+    <mc:Fallback>
+      <p:transition spd="slow">
+        <p:fade/>
+      </p:transition>
+    </mc:Fallback>
+  </mc:AlternateContent>
+</p:sld>
+</file>
+
+<file path=ppt/slides/slide29.xml><?xml version="1.0" encoding="utf-8"?>
+<p:sld xmlns:a="http://schemas.openxmlformats.org/drawingml/2006/main" xmlns:r="http://schemas.openxmlformats.org/officeDocument/2006/relationships" xmlns:p="http://schemas.openxmlformats.org/presentationml/2006/main">
+  <p:cSld>
+    <p:spTree>
+      <p:nvGrpSpPr>
+        <p:cNvPr id="1" name=""/>
+        <p:cNvGrpSpPr/>
+        <p:nvPr/>
+      </p:nvGrpSpPr>
+      <p:grpSpPr>
+        <a:xfrm>
+          <a:off x="0" y="0"/>
+          <a:ext cx="0" cy="0"/>
+          <a:chOff x="0" y="0"/>
+          <a:chExt cx="0" cy="0"/>
+        </a:xfrm>
+      </p:grpSpPr>
+      <p:sp>
+        <p:nvSpPr>
+          <p:cNvPr id="2" name="Title 1">
+            <a:extLst>
+              <a:ext uri="{FF2B5EF4-FFF2-40B4-BE49-F238E27FC236}">
+                <a16:creationId xmlns:a16="http://schemas.microsoft.com/office/drawing/2014/main" id="{FEDAA15C-20E5-4E52-B253-CA8898AE0446}"/>
+              </a:ext>
+            </a:extLst>
+          </p:cNvPr>
+          <p:cNvSpPr>
+            <a:spLocks noGrp="1"/>
+          </p:cNvSpPr>
+          <p:nvPr>
+            <p:ph type="title"/>
+          </p:nvPr>
+        </p:nvSpPr>
+        <p:spPr/>
+        <p:txBody>
+          <a:bodyPr/>
+          <a:lstStyle/>
+          <a:p>
+            <a:r>
+              <a:rPr lang="en-IN" dirty="0"/>
+              <a:t>Challenges Faced During Implementation</a:t>
+            </a:r>
+          </a:p>
+        </p:txBody>
+      </p:sp>
+      <p:sp>
+        <p:nvSpPr>
+          <p:cNvPr id="3" name="Content Placeholder 2">
+            <a:extLst>
+              <a:ext uri="{FF2B5EF4-FFF2-40B4-BE49-F238E27FC236}">
+                <a16:creationId xmlns:a16="http://schemas.microsoft.com/office/drawing/2014/main" id="{865F0CAA-2754-4732-AEDE-0546A2851D5F}"/>
+              </a:ext>
+            </a:extLst>
+          </p:cNvPr>
+          <p:cNvSpPr>
+            <a:spLocks noGrp="1"/>
+          </p:cNvSpPr>
+          <p:nvPr>
+            <p:ph idx="1"/>
+          </p:nvPr>
+        </p:nvSpPr>
+        <p:spPr/>
+        <p:txBody>
+          <a:bodyPr>
+            <a:normAutofit fontScale="70000" lnSpcReduction="20000"/>
+          </a:bodyPr>
+          <a:lstStyle/>
+          <a:p>
+            <a:pPr>
+              <a:buFont typeface="Wingdings" panose="05000000000000000000" pitchFamily="2" charset="2"/>
+              <a:buChar char="Ø"/>
+            </a:pPr>
+            <a:r>
+              <a:rPr lang="en-IN" sz="2800" b="1" dirty="0"/>
+              <a:t>MetaMask Connection Issues </a:t>
+            </a:r>
+            <a:r>
+              <a:rPr lang="en-IN" sz="2800" dirty="0"/>
+              <a:t>- Improved wallet connection handling and account detection.</a:t>
+            </a:r>
+          </a:p>
+          <a:p>
+            <a:pPr>
+              <a:buFont typeface="Wingdings" panose="05000000000000000000" pitchFamily="2" charset="2"/>
+              <a:buChar char="Ø"/>
+            </a:pPr>
+            <a:r>
+              <a:rPr lang="en-IN" sz="2800" b="1" dirty="0"/>
+              <a:t>Smart Contract Deployment Errors </a:t>
+            </a:r>
+            <a:r>
+              <a:rPr lang="en-IN" sz="2800" dirty="0"/>
+              <a:t>- Fixed Hardhat configuration and deployment scripts.</a:t>
+            </a:r>
+          </a:p>
+          <a:p>
+            <a:pPr>
+              <a:buFont typeface="Wingdings" panose="05000000000000000000" pitchFamily="2" charset="2"/>
+              <a:buChar char="Ø"/>
+            </a:pPr>
+            <a:r>
+              <a:rPr lang="en-IN" sz="2800" b="1" dirty="0"/>
+              <a:t>Transaction Confirmation Delay </a:t>
+            </a:r>
+            <a:r>
+              <a:rPr lang="en-IN" sz="2800" dirty="0"/>
+              <a:t>- Added loading indicators and transaction status handling. </a:t>
+            </a:r>
+          </a:p>
+          <a:p>
+            <a:pPr>
+              <a:buFont typeface="Wingdings" panose="05000000000000000000" pitchFamily="2" charset="2"/>
+              <a:buChar char="Ø"/>
+            </a:pPr>
+            <a:r>
+              <a:rPr lang="en-IN" sz="2800" b="1" dirty="0"/>
+              <a:t>Network Delays on Blockchain </a:t>
+            </a:r>
+            <a:r>
+              <a:rPr lang="en-IN" sz="2800" dirty="0"/>
+              <a:t>- Implemented transaction waiting and confirmation handling for stable processing.</a:t>
+            </a:r>
+          </a:p>
+          <a:p>
+            <a:pPr>
+              <a:buFont typeface="Wingdings" panose="05000000000000000000" pitchFamily="2" charset="2"/>
+              <a:buChar char="Ø"/>
+            </a:pPr>
+            <a:r>
+              <a:rPr lang="en-IN" sz="2800" b="1" dirty="0"/>
+              <a:t>Frontend State Synchronization </a:t>
+            </a:r>
+            <a:r>
+              <a:rPr lang="en-IN" sz="2800" dirty="0"/>
+              <a:t>- Improved React state management for real-time updates.</a:t>
+            </a:r>
+          </a:p>
+          <a:p>
+            <a:pPr>
+              <a:buFont typeface="Wingdings" panose="05000000000000000000" pitchFamily="2" charset="2"/>
+              <a:buChar char="Ø"/>
+            </a:pPr>
+            <a:r>
+              <a:rPr lang="en-IN" sz="2800" b="1" dirty="0"/>
+              <a:t>Blockchain Interaction Errors </a:t>
+            </a:r>
+            <a:r>
+              <a:rPr lang="en-IN" sz="2800" dirty="0"/>
+              <a:t>- Implemented proper Ethers.js error handling and validation.</a:t>
+            </a:r>
+          </a:p>
+        </p:txBody>
+      </p:sp>
+    </p:spTree>
+    <p:extLst>
+      <p:ext uri="{BB962C8B-B14F-4D97-AF65-F5344CB8AC3E}">
+        <p14:creationId xmlns:p14="http://schemas.microsoft.com/office/powerpoint/2010/main" val="1292705111"/>
+      </p:ext>
+    </p:extLst>
+  </p:cSld>
+  <p:clrMapOvr>
+    <a:masterClrMapping/>
+  </p:clrMapOvr>
+  <mc:AlternateContent xmlns:mc="http://schemas.openxmlformats.org/markup-compatibility/2006">
+    <mc:Choice xmlns:p159="http://schemas.microsoft.com/office/powerpoint/2015/09/main" Requires="p159">
+      <p:transition xmlns:p14="http://schemas.microsoft.com/office/powerpoint/2010/main" spd="slow" p14:dur="2000">
+        <p159:morph option="byObject"/>
+      </p:transition>
+    </mc:Choice>
+    <mc:Fallback>
+      <p:transition spd="slow">
+        <p:fade/>
+      </p:transition>
+    </mc:Fallback>
+  </mc:AlternateContent>
+</p:sld>
+</file>
+
+<file path=ppt/slides/slide3.xml><?xml version="1.0" encoding="utf-8"?>
+<p:sld xmlns:a="http://schemas.openxmlformats.org/drawingml/2006/main" xmlns:r="http://schemas.openxmlformats.org/officeDocument/2006/relationships" xmlns:p="http://schemas.openxmlformats.org/presentationml/2006/main">
+  <p:cSld>
+    <p:spTree>
+      <p:nvGrpSpPr>
+        <p:cNvPr id="1" name=""/>
+        <p:cNvGrpSpPr/>
+        <p:nvPr/>
+      </p:nvGrpSpPr>
+      <p:grpSpPr>
+        <a:xfrm>
+          <a:off x="0" y="0"/>
+          <a:ext cx="0" cy="0"/>
+          <a:chOff x="0" y="0"/>
+          <a:chExt cx="0" cy="0"/>
+        </a:xfrm>
+      </p:grpSpPr>
+      <p:sp>
+        <p:nvSpPr>
+          <p:cNvPr id="2" name="Title 1">
+            <a:extLst>
+              <a:ext uri="{FF2B5EF4-FFF2-40B4-BE49-F238E27FC236}">
+                <a16:creationId xmlns:a16="http://schemas.microsoft.com/office/drawing/2014/main" id="{5611C0C7-23FA-4258-A305-84EFF36943CD}"/>
+              </a:ext>
+            </a:extLst>
+          </p:cNvPr>
+          <p:cNvSpPr>
+            <a:spLocks noGrp="1"/>
+          </p:cNvSpPr>
+          <p:nvPr>
+            <p:ph type="title"/>
+          </p:nvPr>
+        </p:nvSpPr>
+        <p:spPr/>
+        <p:txBody>
+          <a:bodyPr/>
+          <a:lstStyle/>
+          <a:p>
+            <a:r>
+              <a:rPr lang="en-IN" dirty="0"/>
+              <a:t>System Architecture</a:t>
+            </a:r>
+          </a:p>
+        </p:txBody>
+      </p:sp>
+      <p:pic>
+        <p:nvPicPr>
+          <p:cNvPr id="5" name="Content Placeholder 4">
+            <a:extLst>
+              <a:ext uri="{FF2B5EF4-FFF2-40B4-BE49-F238E27FC236}">
+                <a16:creationId xmlns:a16="http://schemas.microsoft.com/office/drawing/2014/main" id="{399470CF-2F18-458C-8122-DAD98BC33EE6}"/>
+              </a:ext>
+            </a:extLst>
+          </p:cNvPr>
+          <p:cNvPicPr>
+            <a:picLocks noGrp="1" noChangeAspect="1"/>
+          </p:cNvPicPr>
+          <p:nvPr>
+            <p:ph idx="1"/>
+          </p:nvPr>
+        </p:nvPicPr>
+        <p:blipFill>
+          <a:blip r:embed="rId2">
+            <a:extLst>
+              <a:ext uri="{28A0092B-C50C-407E-A947-70E740481C1C}">
+                <a14:useLocalDpi xmlns:a14="http://schemas.microsoft.com/office/drawing/2010/main" val="0"/>
+              </a:ext>
+            </a:extLst>
+          </a:blip>
+          <a:stretch>
+            <a:fillRect/>
+          </a:stretch>
+        </p:blipFill>
+        <p:spPr>
+          <a:xfrm>
+            <a:off x="3048000" y="1637687"/>
+            <a:ext cx="6972300" cy="4826515"/>
+          </a:xfrm>
+        </p:spPr>
+      </p:pic>
+    </p:spTree>
+    <p:extLst>
+      <p:ext uri="{BB962C8B-B14F-4D97-AF65-F5344CB8AC3E}">
+        <p14:creationId xmlns:p14="http://schemas.microsoft.com/office/powerpoint/2010/main" val="4210408581"/>
+      </p:ext>
+    </p:extLst>
+  </p:cSld>
+  <p:clrMapOvr>
+    <a:masterClrMapping/>
+  </p:clrMapOvr>
+  <mc:AlternateContent xmlns:mc="http://schemas.openxmlformats.org/markup-compatibility/2006">
+    <mc:Choice xmlns:p159="http://schemas.microsoft.com/office/powerpoint/2015/09/main" Requires="p159">
+      <p:transition xmlns:p14="http://schemas.microsoft.com/office/powerpoint/2010/main" spd="slow" p14:dur="2000">
+        <p159:morph option="byObject"/>
+      </p:transition>
+    </mc:Choice>
+    <mc:Fallback>
+      <p:transition spd="slow">
+        <p:fade/>
+      </p:transition>
+    </mc:Fallback>
+  </mc:AlternateContent>
+</p:sld>
+</file>
+
+<file path=ppt/slides/slide30.xml><?xml version="1.0" encoding="utf-8"?>
+<p:sld xmlns:a="http://schemas.openxmlformats.org/drawingml/2006/main" xmlns:r="http://schemas.openxmlformats.org/officeDocument/2006/relationships" xmlns:p="http://schemas.openxmlformats.org/presentationml/2006/main">
+  <p:cSld>
+    <p:spTree>
+      <p:nvGrpSpPr>
+        <p:cNvPr id="1" name=""/>
+        <p:cNvGrpSpPr/>
+        <p:nvPr/>
+      </p:nvGrpSpPr>
+      <p:grpSpPr>
+        <a:xfrm>
+          <a:off x="0" y="0"/>
+          <a:ext cx="0" cy="0"/>
+          <a:chOff x="0" y="0"/>
+          <a:chExt cx="0" cy="0"/>
+        </a:xfrm>
+      </p:grpSpPr>
+      <p:sp>
+        <p:nvSpPr>
+          <p:cNvPr id="2" name="Title 1">
+            <a:extLst>
+              <a:ext uri="{FF2B5EF4-FFF2-40B4-BE49-F238E27FC236}">
+                <a16:creationId xmlns:a16="http://schemas.microsoft.com/office/drawing/2014/main" id="{69289EA3-7AD2-410A-9D11-D16EF6F7B275}"/>
+              </a:ext>
+            </a:extLst>
+          </p:cNvPr>
+          <p:cNvSpPr>
+            <a:spLocks noGrp="1"/>
+          </p:cNvSpPr>
+          <p:nvPr>
+            <p:ph type="title"/>
+          </p:nvPr>
+        </p:nvSpPr>
+        <p:spPr/>
+        <p:txBody>
+          <a:bodyPr/>
+          <a:lstStyle/>
+          <a:p>
+            <a:r>
+              <a:rPr lang="en-IN" dirty="0"/>
+              <a:t>Future Enhancements</a:t>
+            </a:r>
+          </a:p>
+        </p:txBody>
+      </p:sp>
+      <p:sp>
+        <p:nvSpPr>
+          <p:cNvPr id="3" name="Content Placeholder 2">
+            <a:extLst>
+              <a:ext uri="{FF2B5EF4-FFF2-40B4-BE49-F238E27FC236}">
+                <a16:creationId xmlns:a16="http://schemas.microsoft.com/office/drawing/2014/main" id="{EBB0E9C1-2E75-4199-BFB1-50B5BA13729B}"/>
+              </a:ext>
+            </a:extLst>
+          </p:cNvPr>
+          <p:cNvSpPr>
+            <a:spLocks noGrp="1"/>
+          </p:cNvSpPr>
+          <p:nvPr>
+            <p:ph idx="1"/>
+          </p:nvPr>
+        </p:nvSpPr>
+        <p:spPr/>
+        <p:txBody>
+          <a:bodyPr>
+            <a:normAutofit/>
+          </a:bodyPr>
+          <a:lstStyle/>
+          <a:p>
+            <a:pPr>
+              <a:buFont typeface="Wingdings" panose="05000000000000000000" pitchFamily="2" charset="2"/>
+              <a:buChar char="Ø"/>
+            </a:pPr>
+            <a:r>
+              <a:rPr lang="en-IN" b="1" dirty="0"/>
+              <a:t>Biometric Authentication </a:t>
+            </a:r>
+            <a:r>
+              <a:rPr lang="en-IN" dirty="0"/>
+              <a:t>- Add fingerprint or facial authentication for secure voter verification.</a:t>
+            </a:r>
+          </a:p>
+          <a:p>
+            <a:pPr>
+              <a:buFont typeface="Wingdings" panose="05000000000000000000" pitchFamily="2" charset="2"/>
+              <a:buChar char="Ø"/>
+            </a:pPr>
+            <a:r>
+              <a:rPr lang="en-IN" b="1" dirty="0"/>
+              <a:t>Mobile Voting Support </a:t>
+            </a:r>
+            <a:r>
+              <a:rPr lang="en-IN" dirty="0"/>
+              <a:t>- Develop mobile-friendly voting platform for remote voting access.</a:t>
+            </a:r>
+          </a:p>
+          <a:p>
+            <a:pPr>
+              <a:buFont typeface="Wingdings" panose="05000000000000000000" pitchFamily="2" charset="2"/>
+              <a:buChar char="Ø"/>
+            </a:pPr>
+            <a:r>
+              <a:rPr lang="en-IN" b="1" dirty="0"/>
+              <a:t>Admin Dashboard </a:t>
+            </a:r>
+            <a:r>
+              <a:rPr lang="en-IN" dirty="0"/>
+              <a:t>- Implement advanced election management and monitoring features.</a:t>
+            </a:r>
+          </a:p>
+          <a:p>
+            <a:pPr>
+              <a:buFont typeface="Wingdings" panose="05000000000000000000" pitchFamily="2" charset="2"/>
+              <a:buChar char="Ø"/>
+            </a:pPr>
+            <a:r>
+              <a:rPr lang="en-IN" b="1" dirty="0"/>
+              <a:t>Scalability Improvements </a:t>
+            </a:r>
+            <a:r>
+              <a:rPr lang="en-IN" dirty="0"/>
+              <a:t>- Optimize blockchain performance for large-scale elections.</a:t>
+            </a:r>
+          </a:p>
+          <a:p>
+            <a:pPr>
+              <a:buFont typeface="Wingdings" panose="05000000000000000000" pitchFamily="2" charset="2"/>
+              <a:buChar char="Ø"/>
+            </a:pPr>
+            <a:r>
+              <a:rPr lang="en-IN" b="1" dirty="0"/>
+              <a:t>Enhanced Privacy </a:t>
+            </a:r>
+            <a:r>
+              <a:rPr lang="en-IN" dirty="0"/>
+              <a:t>- Integrate advanced cryptographic privacy-preserving techniques.</a:t>
+            </a:r>
+            <a:endParaRPr lang="en-US" dirty="0"/>
+          </a:p>
+          <a:p>
+            <a:endParaRPr lang="en-IN" dirty="0"/>
+          </a:p>
+        </p:txBody>
+      </p:sp>
+    </p:spTree>
+    <p:extLst>
+      <p:ext uri="{BB962C8B-B14F-4D97-AF65-F5344CB8AC3E}">
+        <p14:creationId xmlns:p14="http://schemas.microsoft.com/office/powerpoint/2010/main" val="1040966984"/>
+      </p:ext>
+    </p:extLst>
+  </p:cSld>
+  <p:clrMapOvr>
+    <a:masterClrMapping/>
+  </p:clrMapOvr>
+  <mc:AlternateContent xmlns:mc="http://schemas.openxmlformats.org/markup-compatibility/2006">
+    <mc:Choice xmlns:p159="http://schemas.microsoft.com/office/powerpoint/2015/09/main" Requires="p159">
+      <p:transition xmlns:p14="http://schemas.microsoft.com/office/powerpoint/2010/main" spd="slow" p14:dur="2000">
+        <p159:morph option="byObject"/>
+      </p:transition>
+    </mc:Choice>
+    <mc:Fallback>
+      <p:transition spd="slow">
+        <p:fade/>
+      </p:transition>
+    </mc:Fallback>
+  </mc:AlternateContent>
+</p:sld>
+</file>
+
+<file path=ppt/slides/slide31.xml><?xml version="1.0" encoding="utf-8"?>
+<p:sld xmlns:a="http://schemas.openxmlformats.org/drawingml/2006/main" xmlns:r="http://schemas.openxmlformats.org/officeDocument/2006/relationships" xmlns:p="http://schemas.openxmlformats.org/presentationml/2006/main">
+  <p:cSld>
+    <p:spTree>
+      <p:nvGrpSpPr>
+        <p:cNvPr id="1" name=""/>
+        <p:cNvGrpSpPr/>
+        <p:nvPr/>
+      </p:nvGrpSpPr>
+      <p:grpSpPr>
+        <a:xfrm>
+          <a:off x="0" y="0"/>
+          <a:ext cx="0" cy="0"/>
+          <a:chOff x="0" y="0"/>
+          <a:chExt cx="0" cy="0"/>
+        </a:xfrm>
+      </p:grpSpPr>
+      <p:sp>
+        <p:nvSpPr>
+          <p:cNvPr id="2" name="Title 1">
+            <a:extLst>
+              <a:ext uri="{FF2B5EF4-FFF2-40B4-BE49-F238E27FC236}">
+                <a16:creationId xmlns:a16="http://schemas.microsoft.com/office/drawing/2014/main" id="{A3AD5791-7D3E-4FA6-AEB1-6C59DEE78CD1}"/>
+              </a:ext>
+            </a:extLst>
+          </p:cNvPr>
+          <p:cNvSpPr>
+            <a:spLocks noGrp="1"/>
+          </p:cNvSpPr>
+          <p:nvPr>
+            <p:ph type="title"/>
+          </p:nvPr>
+        </p:nvSpPr>
+        <p:spPr/>
+        <p:txBody>
+          <a:bodyPr/>
+          <a:lstStyle/>
+          <a:p>
+            <a:r>
+              <a:rPr lang="en-IN" dirty="0"/>
+              <a:t>Conclusion</a:t>
+            </a:r>
+          </a:p>
+        </p:txBody>
+      </p:sp>
+      <p:sp>
+        <p:nvSpPr>
+          <p:cNvPr id="3" name="Content Placeholder 2">
+            <a:extLst>
+              <a:ext uri="{FF2B5EF4-FFF2-40B4-BE49-F238E27FC236}">
+                <a16:creationId xmlns:a16="http://schemas.microsoft.com/office/drawing/2014/main" id="{D548D916-D8C0-4EF5-B93A-2E3C67BC7B49}"/>
+              </a:ext>
+            </a:extLst>
+          </p:cNvPr>
+          <p:cNvSpPr>
+            <a:spLocks noGrp="1"/>
+          </p:cNvSpPr>
+          <p:nvPr>
+            <p:ph idx="1"/>
+          </p:nvPr>
+        </p:nvSpPr>
+        <p:spPr/>
+        <p:txBody>
+          <a:bodyPr/>
+          <a:lstStyle/>
+          <a:p>
+            <a:pPr marL="0" indent="0">
+              <a:buNone/>
+            </a:pPr>
+            <a:r>
+              <a:rPr lang="en-US" dirty="0"/>
+              <a:t>The Blockchain-Based E-Voting System implementation has been successfully completed for the core modules, including smart contract development, frontend integration, blockchain deployment, wallet authentication, and secure vote casting. The system demonstrates decentralized and transparent electronic voting using Ethereum blockchain technology. </a:t>
+            </a:r>
+          </a:p>
+          <a:p>
+            <a:pPr marL="0" indent="0">
+              <a:buNone/>
+            </a:pPr>
+            <a:r>
+              <a:rPr lang="en-US" dirty="0"/>
+              <a:t>Testing results confirmed secure transaction handling, duplicate vote prevention, and successful smart contract execution. The project establishes a strong foundation for secure and trustworthy blockchain-based electronic voting systems. </a:t>
+            </a:r>
+          </a:p>
+        </p:txBody>
+      </p:sp>
+    </p:spTree>
+    <p:extLst>
+      <p:ext uri="{BB962C8B-B14F-4D97-AF65-F5344CB8AC3E}">
+        <p14:creationId xmlns:p14="http://schemas.microsoft.com/office/powerpoint/2010/main" val="2324338919"/>
+      </p:ext>
+    </p:extLst>
+  </p:cSld>
+  <p:clrMapOvr>
+    <a:masterClrMapping/>
+  </p:clrMapOvr>
+  <mc:AlternateContent xmlns:mc="http://schemas.openxmlformats.org/markup-compatibility/2006">
+    <mc:Choice xmlns:p159="http://schemas.microsoft.com/office/powerpoint/2015/09/main" Requires="p159">
+      <p:transition xmlns:p14="http://schemas.microsoft.com/office/powerpoint/2010/main" spd="slow" p14:dur="2000">
+        <p159:morph option="byObject"/>
+      </p:transition>
+    </mc:Choice>
+    <mc:Fallback>
+      <p:transition spd="slow">
+        <p:fade/>
+      </p:transition>
+    </mc:Fallback>
+  </mc:AlternateContent>
+</p:sld>
+</file>
+
+<file path=ppt/slides/slide32.xml><?xml version="1.0" encoding="utf-8"?>
+<p:sld xmlns:a="http://schemas.openxmlformats.org/drawingml/2006/main" xmlns:r="http://schemas.openxmlformats.org/officeDocument/2006/relationships" xmlns:p="http://schemas.openxmlformats.org/presentationml/2006/main">
+  <p:cSld>
+    <p:spTree>
+      <p:nvGrpSpPr>
+        <p:cNvPr id="1" name=""/>
+        <p:cNvGrpSpPr/>
+        <p:nvPr/>
+      </p:nvGrpSpPr>
+      <p:grpSpPr>
+        <a:xfrm>
+          <a:off x="0" y="0"/>
+          <a:ext cx="0" cy="0"/>
+          <a:chOff x="0" y="0"/>
+          <a:chExt cx="0" cy="0"/>
+        </a:xfrm>
+      </p:grpSpPr>
+      <p:sp>
+        <p:nvSpPr>
+          <p:cNvPr id="2" name="Title 1">
+            <a:extLst>
+              <a:ext uri="{FF2B5EF4-FFF2-40B4-BE49-F238E27FC236}">
+                <a16:creationId xmlns:a16="http://schemas.microsoft.com/office/drawing/2014/main" id="{30A9DAD9-FFB6-45FE-87A4-EA8521C38682}"/>
+              </a:ext>
+            </a:extLst>
+          </p:cNvPr>
+          <p:cNvSpPr>
+            <a:spLocks noGrp="1"/>
+          </p:cNvSpPr>
+          <p:nvPr>
+            <p:ph type="title"/>
+          </p:nvPr>
+        </p:nvSpPr>
+        <p:spPr>
+          <a:xfrm>
+            <a:off x="1745200" y="2519585"/>
+            <a:ext cx="8911687" cy="1280890"/>
+          </a:xfrm>
+        </p:spPr>
+        <p:txBody>
+          <a:bodyPr>
+            <a:normAutofit fontScale="90000"/>
+          </a:bodyPr>
+          <a:lstStyle/>
+          <a:p>
+            <a:pPr algn="ctr"/>
+            <a:r>
+              <a:rPr lang="en-US" sz="8000" b="1" dirty="0"/>
+              <a:t>THANK YOU</a:t>
+            </a:r>
+            <a:endParaRPr lang="en-IN" sz="8000" b="1" dirty="0"/>
+          </a:p>
+        </p:txBody>
+      </p:sp>
+    </p:spTree>
+    <p:extLst>
+      <p:ext uri="{BB962C8B-B14F-4D97-AF65-F5344CB8AC3E}">
+        <p14:creationId xmlns:p14="http://schemas.microsoft.com/office/powerpoint/2010/main" val="960753369"/>
+      </p:ext>
+    </p:extLst>
+  </p:cSld>
+  <p:clrMapOvr>
+    <a:masterClrMapping/>
+  </p:clrMapOvr>
+  <mc:AlternateContent xmlns:mc="http://schemas.openxmlformats.org/markup-compatibility/2006">
+    <mc:Choice xmlns:p159="http://schemas.microsoft.com/office/powerpoint/2015/09/main" Requires="p159">
+      <p:transition xmlns:p14="http://schemas.microsoft.com/office/powerpoint/2010/main" spd="slow" p14:dur="2000">
+        <p159:morph option="byObject"/>
+      </p:transition>
+    </mc:Choice>
+    <mc:Fallback>
+      <p:transition spd="slow">
+        <p:fade/>
+      </p:transition>
+    </mc:Fallback>
+  </mc:AlternateContent>
 </p:sld>
 </file>
 
@@ -11187,7 +12625,7 @@
           <p:cNvPr id="2" name="Title 1">
             <a:extLst>
               <a:ext uri="{FF2B5EF4-FFF2-40B4-BE49-F238E27FC236}">
-                <a16:creationId xmlns:a16="http://schemas.microsoft.com/office/drawing/2014/main" id="{1895FD5D-1694-4FC3-9E12-43F45195A9C6}"/>
+                <a16:creationId xmlns:a16="http://schemas.microsoft.com/office/drawing/2014/main" id="{B77FFB06-980C-4643-B885-F6E907CDC33D}"/>
               </a:ext>
             </a:extLst>
           </p:cNvPr>
@@ -11204,13 +12642,9 @@
           <a:lstStyle/>
           <a:p>
             <a:r>
-              <a:rPr lang="en-IN"/>
-              <a:t>Smart Contract Development</a:t>
-            </a:r>
-            <a:br>
-              <a:rPr lang="en-IN"/>
-            </a:br>
-            <a:endParaRPr lang="en-IN"/>
+              <a:rPr lang="en-IN" dirty="0"/>
+              <a:t>Architectural Layers</a:t>
+            </a:r>
           </a:p>
         </p:txBody>
       </p:sp>
@@ -11219,7 +12653,7 @@
           <p:cNvPr id="3" name="Content Placeholder 2">
             <a:extLst>
               <a:ext uri="{FF2B5EF4-FFF2-40B4-BE49-F238E27FC236}">
-                <a16:creationId xmlns:a16="http://schemas.microsoft.com/office/drawing/2014/main" id="{3342DEA0-EB7C-423C-B25E-768B71E59904}"/>
+                <a16:creationId xmlns:a16="http://schemas.microsoft.com/office/drawing/2014/main" id="{FA99ACA6-C2D3-4855-BD74-A31DD28645BD}"/>
               </a:ext>
             </a:extLst>
           </p:cNvPr>
@@ -11235,20 +12669,109 @@
           <a:bodyPr/>
           <a:lstStyle/>
           <a:p>
-            <a:endParaRPr lang="en-IN"/>
+            <a:pPr>
+              <a:buFont typeface="Wingdings" panose="05000000000000000000" pitchFamily="2" charset="2"/>
+              <a:buChar char="Ø"/>
+            </a:pPr>
+            <a:r>
+              <a:rPr lang="en-IN" dirty="0"/>
+              <a:t>Presentation Layer </a:t>
+            </a:r>
+            <a:r>
+              <a:rPr lang="en-IN" b="1" dirty="0"/>
+              <a:t>: </a:t>
+            </a:r>
+            <a:r>
+              <a:rPr lang="en-IN" dirty="0"/>
+              <a:t>React frontend for user interaction.</a:t>
+            </a:r>
+          </a:p>
+          <a:p>
+            <a:pPr>
+              <a:buFont typeface="Wingdings" panose="05000000000000000000" pitchFamily="2" charset="2"/>
+              <a:buChar char="Ø"/>
+            </a:pPr>
+            <a:r>
+              <a:rPr lang="en-IN" dirty="0"/>
+              <a:t>Application Layer </a:t>
+            </a:r>
+            <a:r>
+              <a:rPr lang="en-IN" b="1" dirty="0"/>
+              <a:t>: </a:t>
+            </a:r>
+            <a:r>
+              <a:rPr lang="en-IN" dirty="0"/>
+              <a:t>Voting logic.</a:t>
+            </a:r>
+          </a:p>
+          <a:p>
+            <a:pPr>
+              <a:buFont typeface="Wingdings" panose="05000000000000000000" pitchFamily="2" charset="2"/>
+              <a:buChar char="Ø"/>
+            </a:pPr>
+            <a:r>
+              <a:rPr lang="en-IN" dirty="0"/>
+              <a:t>Smart Contract Layer </a:t>
+            </a:r>
+            <a:r>
+              <a:rPr lang="en-IN" b="1" dirty="0"/>
+              <a:t>: </a:t>
+            </a:r>
+            <a:r>
+              <a:rPr lang="en-IN" dirty="0"/>
+              <a:t>Solidity logic on Ethereum </a:t>
+            </a:r>
+            <a:r>
+              <a:rPr lang="en-IN" dirty="0" err="1"/>
+              <a:t>Sepolia</a:t>
+            </a:r>
+            <a:r>
+              <a:rPr lang="en-IN" dirty="0"/>
+              <a:t>.</a:t>
+            </a:r>
+          </a:p>
+          <a:p>
+            <a:pPr>
+              <a:buFont typeface="Wingdings" panose="05000000000000000000" pitchFamily="2" charset="2"/>
+              <a:buChar char="Ø"/>
+            </a:pPr>
+            <a:r>
+              <a:rPr lang="en-IN" dirty="0"/>
+              <a:t>Blockchain Layer </a:t>
+            </a:r>
+            <a:r>
+              <a:rPr lang="en-IN" b="1" dirty="0"/>
+              <a:t>: </a:t>
+            </a:r>
+            <a:r>
+              <a:rPr lang="en-IN" dirty="0"/>
+              <a:t>Ethereum network.</a:t>
+            </a:r>
           </a:p>
         </p:txBody>
       </p:sp>
     </p:spTree>
     <p:extLst>
       <p:ext uri="{BB962C8B-B14F-4D97-AF65-F5344CB8AC3E}">
-        <p14:creationId xmlns:p14="http://schemas.microsoft.com/office/powerpoint/2010/main" val="1784914815"/>
+        <p14:creationId xmlns:p14="http://schemas.microsoft.com/office/powerpoint/2010/main" val="3638548252"/>
       </p:ext>
     </p:extLst>
   </p:cSld>
   <p:clrMapOvr>
     <a:masterClrMapping/>
   </p:clrMapOvr>
+  <mc:AlternateContent xmlns:mc="http://schemas.openxmlformats.org/markup-compatibility/2006">
+    <mc:Choice xmlns:p159="http://schemas.microsoft.com/office/powerpoint/2015/09/main" Requires="p159">
+      <p:transition xmlns:p14="http://schemas.microsoft.com/office/powerpoint/2010/main" spd="slow" p14:dur="2000">
+        <p159:morph option="byObject"/>
+      </p:transition>
+    </mc:Choice>
+    <mc:Fallback>
+      <p:transition spd="slow">
+        <p:fade/>
+      </p:transition>
+    </mc:Fallback>
+  </mc:AlternateContent>
 </p:sld>
 </file>
 
@@ -11274,134 +12797,6 @@
           <p:cNvPr id="2" name="Title 1">
             <a:extLst>
               <a:ext uri="{FF2B5EF4-FFF2-40B4-BE49-F238E27FC236}">
-                <a16:creationId xmlns:a16="http://schemas.microsoft.com/office/drawing/2014/main" id="{B77FFB06-980C-4643-B885-F6E907CDC33D}"/>
-              </a:ext>
-            </a:extLst>
-          </p:cNvPr>
-          <p:cNvSpPr>
-            <a:spLocks noGrp="1"/>
-          </p:cNvSpPr>
-          <p:nvPr>
-            <p:ph type="title"/>
-          </p:nvPr>
-        </p:nvSpPr>
-        <p:spPr/>
-        <p:txBody>
-          <a:bodyPr/>
-          <a:lstStyle/>
-          <a:p>
-            <a:r>
-              <a:rPr lang="en-IN" dirty="0"/>
-              <a:t>ARCHITECTURAL LAYERS</a:t>
-            </a:r>
-          </a:p>
-        </p:txBody>
-      </p:sp>
-      <p:sp>
-        <p:nvSpPr>
-          <p:cNvPr id="3" name="Content Placeholder 2">
-            <a:extLst>
-              <a:ext uri="{FF2B5EF4-FFF2-40B4-BE49-F238E27FC236}">
-                <a16:creationId xmlns:a16="http://schemas.microsoft.com/office/drawing/2014/main" id="{FA99ACA6-C2D3-4855-BD74-A31DD28645BD}"/>
-              </a:ext>
-            </a:extLst>
-          </p:cNvPr>
-          <p:cNvSpPr>
-            <a:spLocks noGrp="1"/>
-          </p:cNvSpPr>
-          <p:nvPr>
-            <p:ph idx="1"/>
-          </p:nvPr>
-        </p:nvSpPr>
-        <p:spPr/>
-        <p:txBody>
-          <a:bodyPr/>
-          <a:lstStyle/>
-          <a:p>
-            <a:r>
-              <a:rPr lang="en-IN" dirty="0"/>
-              <a:t>UI Layer: React frontend for user interaction.</a:t>
-            </a:r>
-          </a:p>
-          <a:p>
-            <a:r>
-              <a:rPr lang="en-IN" dirty="0"/>
-              <a:t>Wallet Layer: </a:t>
-            </a:r>
-            <a:r>
-              <a:rPr lang="en-IN" dirty="0" err="1"/>
-              <a:t>MetaMask</a:t>
-            </a:r>
-            <a:r>
-              <a:rPr lang="en-IN" dirty="0"/>
-              <a:t> for authentication.</a:t>
-            </a:r>
-          </a:p>
-          <a:p>
-            <a:r>
-              <a:rPr lang="en-IN" dirty="0"/>
-              <a:t>Contract Layer: Solidity logic on Ethereum.</a:t>
-            </a:r>
-          </a:p>
-          <a:p>
-            <a:r>
-              <a:rPr lang="en-IN" dirty="0"/>
-              <a:t>Data Layer: Permanent storage on </a:t>
-            </a:r>
-            <a:r>
-              <a:rPr lang="en-IN" dirty="0" err="1"/>
-              <a:t>Sepolia</a:t>
-            </a:r>
-            <a:r>
-              <a:rPr lang="en-IN" dirty="0"/>
-              <a:t> </a:t>
-            </a:r>
-            <a:r>
-              <a:rPr lang="en-IN" dirty="0" err="1"/>
-              <a:t>testnet</a:t>
-            </a:r>
-            <a:r>
-              <a:rPr lang="en-IN" dirty="0"/>
-              <a:t>.</a:t>
-            </a:r>
-          </a:p>
-        </p:txBody>
-      </p:sp>
-    </p:spTree>
-    <p:extLst>
-      <p:ext uri="{BB962C8B-B14F-4D97-AF65-F5344CB8AC3E}">
-        <p14:creationId xmlns:p14="http://schemas.microsoft.com/office/powerpoint/2010/main" val="3638548252"/>
-      </p:ext>
-    </p:extLst>
-  </p:cSld>
-  <p:clrMapOvr>
-    <a:masterClrMapping/>
-  </p:clrMapOvr>
-</p:sld>
-</file>
-
-<file path=ppt/slides/slide6.xml><?xml version="1.0" encoding="utf-8"?>
-<p:sld xmlns:a="http://schemas.openxmlformats.org/drawingml/2006/main" xmlns:r="http://schemas.openxmlformats.org/officeDocument/2006/relationships" xmlns:p="http://schemas.openxmlformats.org/presentationml/2006/main">
-  <p:cSld>
-    <p:spTree>
-      <p:nvGrpSpPr>
-        <p:cNvPr id="1" name=""/>
-        <p:cNvGrpSpPr/>
-        <p:nvPr/>
-      </p:nvGrpSpPr>
-      <p:grpSpPr>
-        <a:xfrm>
-          <a:off x="0" y="0"/>
-          <a:ext cx="0" cy="0"/>
-          <a:chOff x="0" y="0"/>
-          <a:chExt cx="0" cy="0"/>
-        </a:xfrm>
-      </p:grpSpPr>
-      <p:sp>
-        <p:nvSpPr>
-          <p:cNvPr id="2" name="Title 1">
-            <a:extLst>
-              <a:ext uri="{FF2B5EF4-FFF2-40B4-BE49-F238E27FC236}">
                 <a16:creationId xmlns:a16="http://schemas.microsoft.com/office/drawing/2014/main" id="{98E9AE05-B4C3-480C-B6D7-481589FCE6C8}"/>
               </a:ext>
             </a:extLst>
@@ -11413,20 +12808,20 @@
             <p:ph type="title"/>
           </p:nvPr>
         </p:nvSpPr>
-        <p:spPr/>
+        <p:spPr>
+          <a:xfrm>
+            <a:off x="2592925" y="624110"/>
+            <a:ext cx="8911687" cy="1280890"/>
+          </a:xfrm>
+        </p:spPr>
         <p:txBody>
           <a:bodyPr/>
           <a:lstStyle/>
           <a:p>
             <a:r>
               <a:rPr lang="en-IN" dirty="0"/>
-              <a:t>DEVELOPMENT </a:t>
-            </a:r>
-            <a:r>
-              <a:rPr lang="en-IN" dirty="0" err="1"/>
-              <a:t>tOOLS</a:t>
-            </a:r>
-            <a:endParaRPr lang="en-IN" dirty="0"/>
+              <a:t>Development and Implementation Tools Used</a:t>
+            </a:r>
           </a:p>
         </p:txBody>
       </p:sp>
@@ -11448,12 +12843,9 @@
         </p:nvSpPr>
         <p:spPr bwMode="auto">
           <a:xfrm>
-            <a:off x="838200" y="2535252"/>
-            <a:ext cx="1918474" cy="2932085"/>
+            <a:off x="2592388" y="1858053"/>
+            <a:ext cx="7631112" cy="4062651"/>
           </a:xfrm>
-          <a:prstGeom prst="rect">
-            <a:avLst/>
-          </a:prstGeom>
           <a:noFill/>
           <a:ln>
             <a:noFill/>
@@ -11489,7 +12881,7 @@
           </a:extLst>
         </p:spPr>
         <p:txBody>
-          <a:bodyPr vert="horz" wrap="none" lIns="91440" tIns="45720" rIns="91440" bIns="45720" numCol="1" anchor="ctr" anchorCtr="0" compatLnSpc="1">
+          <a:bodyPr vert="horz" wrap="square" lIns="91440" tIns="45720" rIns="91440" bIns="45720" numCol="1" anchor="ctr" anchorCtr="0" compatLnSpc="1">
             <a:prstTxWarp prst="textNoShape">
               <a:avLst/>
             </a:prstTxWarp>
@@ -11497,252 +12889,133 @@
           </a:bodyPr>
           <a:lstStyle/>
           <a:p>
-            <a:pPr marL="0" marR="0" lvl="0" indent="0" algn="l" defTabSz="914400" rtl="0" eaLnBrk="0" fontAlgn="base" latinLnBrk="0" hangingPunct="0">
-              <a:lnSpc>
-                <a:spcPct val="100000"/>
-              </a:lnSpc>
-              <a:spcBef>
-                <a:spcPct val="0"/>
-              </a:spcBef>
-              <a:spcAft>
-                <a:spcPct val="0"/>
-              </a:spcAft>
-              <a:buClrTx/>
-              <a:buSzTx/>
-              <a:buFontTx/>
-              <a:buNone/>
-              <a:tabLst/>
+            <a:pPr>
+              <a:buFont typeface="Wingdings" panose="05000000000000000000" pitchFamily="2" charset="2"/>
+              <a:buChar char="Ø"/>
             </a:pPr>
-            <a:endParaRPr kumimoji="0" lang="en-US" altLang="en-US" sz="1800" b="0" i="0" u="none" strike="noStrike" cap="none" normalizeH="0" baseline="0" dirty="0">
-              <a:ln>
-                <a:noFill/>
-              </a:ln>
-              <a:solidFill>
-                <a:schemeClr val="tx1"/>
-              </a:solidFill>
-              <a:effectLst/>
-              <a:latin typeface="Arial" panose="020B0604020202020204" pitchFamily="34" charset="0"/>
-            </a:endParaRPr>
-          </a:p>
-          <a:p>
-            <a:pPr marL="0" marR="0" lvl="0" indent="0" algn="l" defTabSz="914400" rtl="0" eaLnBrk="0" fontAlgn="base" latinLnBrk="0" hangingPunct="0">
-              <a:lnSpc>
-                <a:spcPct val="100000"/>
-              </a:lnSpc>
-              <a:spcBef>
-                <a:spcPct val="0"/>
-              </a:spcBef>
-              <a:spcAft>
-                <a:spcPct val="0"/>
-              </a:spcAft>
-              <a:buClrTx/>
-              <a:buSzTx/>
-              <a:buFontTx/>
-              <a:buChar char="•"/>
-              <a:tabLst/>
+            <a:r>
+              <a:rPr lang="en-US" altLang="en-US" sz="1600" b="1" dirty="0"/>
+              <a:t>VS Code</a:t>
+            </a:r>
+            <a:r>
+              <a:rPr lang="en-US" altLang="en-US" sz="1600" dirty="0"/>
+              <a:t> - </a:t>
+            </a:r>
+            <a:r>
+              <a:rPr lang="en-US" sz="1600" dirty="0"/>
+              <a:t>Used as the primary code editor for developing frontend, smart contracts, and blockchain integration modules.</a:t>
+            </a:r>
+          </a:p>
+          <a:p>
+            <a:pPr>
+              <a:buFont typeface="Wingdings" panose="05000000000000000000" pitchFamily="2" charset="2"/>
+              <a:buChar char="Ø"/>
             </a:pPr>
             <a:r>
-              <a:rPr kumimoji="0" lang="en-US" altLang="en-US" sz="1800" b="0" i="0" u="none" strike="noStrike" cap="none" normalizeH="0" baseline="0" dirty="0">
-                <a:ln>
-                  <a:noFill/>
-                </a:ln>
-                <a:solidFill>
-                  <a:schemeClr val="tx1"/>
-                </a:solidFill>
-                <a:effectLst/>
-                <a:latin typeface="Arial" panose="020B0604020202020204" pitchFamily="34" charset="0"/>
-              </a:rPr>
-              <a:t>VS Code </a:t>
-            </a:r>
-          </a:p>
-          <a:p>
-            <a:pPr marL="0" marR="0" lvl="0" indent="0" algn="l" defTabSz="914400" rtl="0" eaLnBrk="0" fontAlgn="base" latinLnBrk="0" hangingPunct="0">
-              <a:lnSpc>
-                <a:spcPct val="100000"/>
-              </a:lnSpc>
-              <a:spcBef>
-                <a:spcPct val="0"/>
-              </a:spcBef>
-              <a:spcAft>
-                <a:spcPct val="0"/>
-              </a:spcAft>
-              <a:buClrTx/>
-              <a:buSzTx/>
-              <a:buFontTx/>
-              <a:buChar char="•"/>
-              <a:tabLst/>
+              <a:rPr lang="en-IN" sz="1600" b="1" dirty="0"/>
+              <a:t>Node.js</a:t>
+            </a:r>
+            <a:r>
+              <a:rPr lang="en-IN" sz="1600" dirty="0"/>
+              <a:t> - </a:t>
+            </a:r>
+            <a:r>
+              <a:rPr lang="en-US" sz="1600" dirty="0"/>
+              <a:t>Used to run JavaScript-based development tools and manage the blockchain application environment.</a:t>
+            </a:r>
+          </a:p>
+          <a:p>
+            <a:pPr>
+              <a:buFont typeface="Wingdings" panose="05000000000000000000" pitchFamily="2" charset="2"/>
+              <a:buChar char="Ø"/>
             </a:pPr>
             <a:r>
-              <a:rPr kumimoji="0" lang="en-US" altLang="en-US" sz="1800" b="0" i="0" u="none" strike="noStrike" cap="none" normalizeH="0" baseline="0" dirty="0">
-                <a:ln>
-                  <a:noFill/>
-                </a:ln>
-                <a:solidFill>
-                  <a:schemeClr val="tx1"/>
-                </a:solidFill>
-                <a:effectLst/>
-                <a:latin typeface="Arial" panose="020B0604020202020204" pitchFamily="34" charset="0"/>
-              </a:rPr>
-              <a:t>Node.js </a:t>
-            </a:r>
-          </a:p>
-          <a:p>
-            <a:pPr marL="0" marR="0" lvl="0" indent="0" algn="l" defTabSz="914400" rtl="0" eaLnBrk="0" fontAlgn="base" latinLnBrk="0" hangingPunct="0">
-              <a:lnSpc>
-                <a:spcPct val="100000"/>
-              </a:lnSpc>
-              <a:spcBef>
-                <a:spcPct val="0"/>
-              </a:spcBef>
-              <a:spcAft>
-                <a:spcPct val="0"/>
-              </a:spcAft>
-              <a:buClrTx/>
-              <a:buSzTx/>
-              <a:buFontTx/>
-              <a:buChar char="•"/>
-              <a:tabLst/>
+              <a:rPr lang="en-IN" sz="1600" b="1" dirty="0" err="1"/>
+              <a:t>Npm</a:t>
+            </a:r>
+            <a:r>
+              <a:rPr lang="en-IN" sz="1600" b="1" dirty="0"/>
+              <a:t> </a:t>
+            </a:r>
+            <a:r>
+              <a:rPr lang="en-IN" sz="1600" dirty="0"/>
+              <a:t>- </a:t>
+            </a:r>
+            <a:r>
+              <a:rPr lang="en-US" sz="1600" dirty="0"/>
+              <a:t>Used for installing and managing project dependencies, libraries, and blockchain development packages.</a:t>
+            </a:r>
+            <a:endParaRPr lang="en-IN" sz="1600" dirty="0"/>
+          </a:p>
+          <a:p>
+            <a:pPr>
+              <a:buFont typeface="Wingdings" panose="05000000000000000000" pitchFamily="2" charset="2"/>
+              <a:buChar char="Ø"/>
             </a:pPr>
             <a:r>
-              <a:rPr kumimoji="0" lang="en-US" altLang="en-US" sz="1800" b="0" i="0" u="none" strike="noStrike" cap="none" normalizeH="0" baseline="0" dirty="0" err="1">
-                <a:ln>
-                  <a:noFill/>
-                </a:ln>
-                <a:solidFill>
-                  <a:schemeClr val="tx1"/>
-                </a:solidFill>
-                <a:effectLst/>
-                <a:latin typeface="Arial" panose="020B0604020202020204" pitchFamily="34" charset="0"/>
-              </a:rPr>
-              <a:t>npm</a:t>
-            </a:r>
-            <a:r>
-              <a:rPr kumimoji="0" lang="en-US" altLang="en-US" sz="1800" b="0" i="0" u="none" strike="noStrike" cap="none" normalizeH="0" baseline="0" dirty="0">
-                <a:ln>
-                  <a:noFill/>
-                </a:ln>
-                <a:solidFill>
-                  <a:schemeClr val="tx1"/>
-                </a:solidFill>
-                <a:effectLst/>
-                <a:latin typeface="Arial" panose="020B0604020202020204" pitchFamily="34" charset="0"/>
-              </a:rPr>
-              <a:t> </a:t>
-            </a:r>
-          </a:p>
-          <a:p>
-            <a:pPr marL="0" marR="0" lvl="0" indent="0" algn="l" defTabSz="914400" rtl="0" eaLnBrk="0" fontAlgn="base" latinLnBrk="0" hangingPunct="0">
-              <a:lnSpc>
-                <a:spcPct val="100000"/>
-              </a:lnSpc>
-              <a:spcBef>
-                <a:spcPct val="0"/>
-              </a:spcBef>
-              <a:spcAft>
-                <a:spcPct val="0"/>
-              </a:spcAft>
-              <a:buClrTx/>
-              <a:buSzTx/>
-              <a:buFontTx/>
-              <a:buChar char="•"/>
-              <a:tabLst/>
+              <a:rPr lang="en-IN" sz="1600" b="1" dirty="0" err="1"/>
+              <a:t>Github</a:t>
+            </a:r>
+            <a:r>
+              <a:rPr lang="en-IN" sz="1600" b="1" dirty="0"/>
+              <a:t> - </a:t>
+            </a:r>
+            <a:r>
+              <a:rPr lang="en-US" sz="1600" dirty="0"/>
+              <a:t>Used for storing, managing, and maintaining the project repository online.</a:t>
+            </a:r>
+            <a:endParaRPr lang="en-IN" sz="1600" b="1" dirty="0"/>
+          </a:p>
+          <a:p>
+            <a:pPr>
+              <a:buFont typeface="Wingdings" panose="05000000000000000000" pitchFamily="2" charset="2"/>
+              <a:buChar char="Ø"/>
             </a:pPr>
             <a:r>
-              <a:rPr kumimoji="0" lang="en-US" altLang="en-US" sz="1800" b="0" i="0" u="none" strike="noStrike" cap="none" normalizeH="0" baseline="0" dirty="0">
-                <a:ln>
-                  <a:noFill/>
-                </a:ln>
-                <a:solidFill>
-                  <a:schemeClr val="tx1"/>
-                </a:solidFill>
-                <a:effectLst/>
-                <a:latin typeface="Arial" panose="020B0604020202020204" pitchFamily="34" charset="0"/>
-              </a:rPr>
-              <a:t>Git &amp; GitHub</a:t>
+              <a:rPr lang="en-IN" sz="1600" b="1" dirty="0"/>
+              <a:t>Git </a:t>
+            </a:r>
+            <a:r>
+              <a:rPr lang="en-IN" sz="1600" dirty="0"/>
+              <a:t>– </a:t>
+            </a:r>
+            <a:r>
+              <a:rPr lang="en-US" sz="1600" dirty="0"/>
+              <a:t>Used for version control and tracking project source code changes during development.</a:t>
             </a:r>
           </a:p>
           <a:p>
             <a:pPr>
-              <a:buFont typeface="Arial" panose="020B0604020202020204" pitchFamily="34" charset="0"/>
-              <a:buChar char="•"/>
+              <a:buFont typeface="Wingdings" panose="05000000000000000000" pitchFamily="2" charset="2"/>
+              <a:buChar char="Ø"/>
             </a:pPr>
             <a:r>
-              <a:rPr lang="en-IN" sz="1200" dirty="0"/>
-              <a:t>Hardhat Testing </a:t>
+              <a:rPr lang="en-IN" sz="1600" b="1" dirty="0"/>
+              <a:t>Chrome </a:t>
+            </a:r>
+            <a:r>
+              <a:rPr lang="en-IN" sz="1600" dirty="0"/>
+              <a:t>- </a:t>
+            </a:r>
+            <a:r>
+              <a:rPr lang="en-US" sz="1600" dirty="0"/>
+              <a:t>Used for testing the frontend application, </a:t>
+            </a:r>
+            <a:r>
+              <a:rPr lang="en-US" sz="1600" dirty="0" err="1"/>
+              <a:t>MetaMask</a:t>
+            </a:r>
+            <a:r>
+              <a:rPr lang="en-US" sz="1600" dirty="0"/>
+              <a:t> integration, and blockchain transactions.</a:t>
             </a:r>
           </a:p>
           <a:p>
             <a:pPr>
-              <a:buFont typeface="Arial" panose="020B0604020202020204" pitchFamily="34" charset="0"/>
-              <a:buChar char="•"/>
+              <a:buFont typeface="Wingdings" panose="05000000000000000000" pitchFamily="2" charset="2"/>
+              <a:buChar char="Ø"/>
             </a:pPr>
-            <a:r>
-              <a:rPr lang="en-IN" sz="1200" dirty="0" err="1"/>
-              <a:t>Sepolia</a:t>
-            </a:r>
-            <a:r>
-              <a:rPr lang="en-IN" sz="1200" dirty="0"/>
-              <a:t> Deployment </a:t>
-            </a:r>
-          </a:p>
-          <a:p>
-            <a:pPr>
-              <a:buFont typeface="Arial" panose="020B0604020202020204" pitchFamily="34" charset="0"/>
-              <a:buChar char="•"/>
-            </a:pPr>
-            <a:r>
-              <a:rPr lang="en-IN" sz="1200" dirty="0"/>
-              <a:t>Alchemy RPC / </a:t>
-            </a:r>
-            <a:r>
-              <a:rPr lang="en-IN" sz="1200" dirty="0" err="1"/>
-              <a:t>Infura</a:t>
-            </a:r>
-            <a:r>
-              <a:rPr lang="en-IN" sz="1200" dirty="0"/>
-              <a:t> </a:t>
-            </a:r>
-          </a:p>
-          <a:p>
-            <a:pPr>
-              <a:buFont typeface="Arial" panose="020B0604020202020204" pitchFamily="34" charset="0"/>
-              <a:buChar char="•"/>
-            </a:pPr>
-            <a:r>
-              <a:rPr lang="en-IN" sz="1200" dirty="0"/>
-              <a:t>Ganache (Local Testing) </a:t>
-            </a:r>
-          </a:p>
-          <a:p>
-            <a:pPr marL="0" marR="0" lvl="0" indent="0" algn="l" defTabSz="914400" rtl="0" eaLnBrk="0" fontAlgn="base" latinLnBrk="0" hangingPunct="0">
-              <a:lnSpc>
-                <a:spcPct val="100000"/>
-              </a:lnSpc>
-              <a:spcBef>
-                <a:spcPct val="0"/>
-              </a:spcBef>
-              <a:spcAft>
-                <a:spcPct val="0"/>
-              </a:spcAft>
-              <a:buClrTx/>
-              <a:buSzTx/>
-              <a:buFontTx/>
-              <a:buChar char="•"/>
-              <a:tabLst/>
-            </a:pPr>
-            <a:r>
-              <a:rPr kumimoji="0" lang="en-US" altLang="en-US" sz="1800" b="0" i="0" u="none" strike="noStrike" cap="none" normalizeH="0" baseline="0" dirty="0">
-                <a:ln>
-                  <a:noFill/>
-                </a:ln>
-                <a:solidFill>
-                  <a:schemeClr val="tx1"/>
-                </a:solidFill>
-                <a:effectLst/>
-                <a:latin typeface="Arial" panose="020B0604020202020204" pitchFamily="34" charset="0"/>
-              </a:rPr>
-              <a:t> </a:t>
-            </a:r>
+            <a:endParaRPr lang="en-IN" sz="1600" dirty="0"/>
           </a:p>
         </p:txBody>
       </p:sp>
@@ -11756,6 +13029,117 @@
   <p:clrMapOvr>
     <a:masterClrMapping/>
   </p:clrMapOvr>
+  <mc:AlternateContent xmlns:mc="http://schemas.openxmlformats.org/markup-compatibility/2006">
+    <mc:Choice xmlns:p159="http://schemas.microsoft.com/office/powerpoint/2015/09/main" Requires="p159">
+      <p:transition xmlns:p14="http://schemas.microsoft.com/office/powerpoint/2010/main" spd="slow" p14:dur="2000">
+        <p159:morph option="byObject"/>
+      </p:transition>
+    </mc:Choice>
+    <mc:Fallback>
+      <p:transition spd="slow">
+        <p:fade/>
+      </p:transition>
+    </mc:Fallback>
+  </mc:AlternateContent>
+</p:sld>
+</file>
+
+<file path=ppt/slides/slide6.xml><?xml version="1.0" encoding="utf-8"?>
+<p:sld xmlns:a="http://schemas.openxmlformats.org/drawingml/2006/main" xmlns:r="http://schemas.openxmlformats.org/officeDocument/2006/relationships" xmlns:p="http://schemas.openxmlformats.org/presentationml/2006/main">
+  <p:cSld>
+    <p:spTree>
+      <p:nvGrpSpPr>
+        <p:cNvPr id="1" name=""/>
+        <p:cNvGrpSpPr/>
+        <p:nvPr/>
+      </p:nvGrpSpPr>
+      <p:grpSpPr>
+        <a:xfrm>
+          <a:off x="0" y="0"/>
+          <a:ext cx="0" cy="0"/>
+          <a:chOff x="0" y="0"/>
+          <a:chExt cx="0" cy="0"/>
+        </a:xfrm>
+      </p:grpSpPr>
+      <p:sp>
+        <p:nvSpPr>
+          <p:cNvPr id="20" name="Title 19">
+            <a:extLst>
+              <a:ext uri="{FF2B5EF4-FFF2-40B4-BE49-F238E27FC236}">
+                <a16:creationId xmlns:a16="http://schemas.microsoft.com/office/drawing/2014/main" id="{F4D9A3B7-0368-462F-AD1F-A1EBB171058B}"/>
+              </a:ext>
+            </a:extLst>
+          </p:cNvPr>
+          <p:cNvSpPr>
+            <a:spLocks noGrp="1"/>
+          </p:cNvSpPr>
+          <p:nvPr>
+            <p:ph type="title"/>
+          </p:nvPr>
+        </p:nvSpPr>
+        <p:spPr/>
+        <p:txBody>
+          <a:bodyPr/>
+          <a:lstStyle/>
+          <a:p>
+            <a:r>
+              <a:rPr lang="en-IN" dirty="0"/>
+              <a:t>MetaMask Setup</a:t>
+            </a:r>
+          </a:p>
+        </p:txBody>
+      </p:sp>
+      <p:pic>
+        <p:nvPicPr>
+          <p:cNvPr id="5" name="Content Placeholder 4">
+            <a:extLst>
+              <a:ext uri="{FF2B5EF4-FFF2-40B4-BE49-F238E27FC236}">
+                <a16:creationId xmlns:a16="http://schemas.microsoft.com/office/drawing/2014/main" id="{E8ABE3EC-0C28-4F8C-B3D7-DDE3B2205C65}"/>
+              </a:ext>
+            </a:extLst>
+          </p:cNvPr>
+          <p:cNvPicPr>
+            <a:picLocks noGrp="1" noChangeAspect="1"/>
+          </p:cNvPicPr>
+          <p:nvPr>
+            <p:ph idx="1"/>
+          </p:nvPr>
+        </p:nvPicPr>
+        <p:blipFill>
+          <a:blip r:embed="rId2"/>
+          <a:stretch>
+            <a:fillRect/>
+          </a:stretch>
+        </p:blipFill>
+        <p:spPr>
+          <a:xfrm>
+            <a:off x="2503488" y="2811409"/>
+            <a:ext cx="8915400" cy="2232132"/>
+          </a:xfrm>
+        </p:spPr>
+      </p:pic>
+    </p:spTree>
+    <p:extLst>
+      <p:ext uri="{BB962C8B-B14F-4D97-AF65-F5344CB8AC3E}">
+        <p14:creationId xmlns:p14="http://schemas.microsoft.com/office/powerpoint/2010/main" val="3397090665"/>
+      </p:ext>
+    </p:extLst>
+  </p:cSld>
+  <p:clrMapOvr>
+    <a:masterClrMapping/>
+  </p:clrMapOvr>
+  <mc:AlternateContent xmlns:mc="http://schemas.openxmlformats.org/markup-compatibility/2006">
+    <mc:Choice xmlns:p159="http://schemas.microsoft.com/office/powerpoint/2015/09/main" Requires="p159">
+      <p:transition xmlns:p14="http://schemas.microsoft.com/office/powerpoint/2010/main" spd="slow" p14:dur="2000">
+        <p159:morph option="byObject"/>
+      </p:transition>
+    </mc:Choice>
+    <mc:Fallback>
+      <p:transition spd="slow">
+        <p:fade/>
+      </p:transition>
+    </mc:Fallback>
+  </mc:AlternateContent>
 </p:sld>
 </file>
 
@@ -11776,375 +13160,118 @@
           <a:chExt cx="0" cy="0"/>
         </a:xfrm>
       </p:grpSpPr>
-      <p:sp>
-        <p:nvSpPr>
-          <p:cNvPr id="2" name="Title 1">
+      <p:pic>
+        <p:nvPicPr>
+          <p:cNvPr id="4" name="Picture 3">
             <a:extLst>
               <a:ext uri="{FF2B5EF4-FFF2-40B4-BE49-F238E27FC236}">
-                <a16:creationId xmlns:a16="http://schemas.microsoft.com/office/drawing/2014/main" id="{4E79438F-67E4-4BFF-8264-668287C17429}"/>
+                <a16:creationId xmlns:a16="http://schemas.microsoft.com/office/drawing/2014/main" id="{DB21B7EA-49A0-4A2A-8E9B-DB7B0C651C39}"/>
               </a:ext>
             </a:extLst>
           </p:cNvPr>
-          <p:cNvSpPr>
-            <a:spLocks noGrp="1"/>
-          </p:cNvSpPr>
-          <p:nvPr>
-            <p:ph type="ctrTitle"/>
-          </p:nvPr>
-        </p:nvSpPr>
+          <p:cNvPicPr>
+            <a:picLocks noChangeAspect="1"/>
+          </p:cNvPicPr>
+          <p:nvPr/>
+        </p:nvPicPr>
+        <p:blipFill>
+          <a:blip r:embed="rId2"/>
+          <a:stretch>
+            <a:fillRect/>
+          </a:stretch>
+        </p:blipFill>
         <p:spPr>
           <a:xfrm>
-            <a:off x="1524000" y="1122363"/>
-            <a:ext cx="9144000" cy="1068387"/>
-          </a:xfrm>
-        </p:spPr>
-        <p:txBody>
-          <a:bodyPr/>
-          <a:lstStyle/>
-          <a:p>
-            <a:r>
-              <a:rPr lang="en-IN" dirty="0"/>
-              <a:t>FRONTEND STACK</a:t>
-            </a:r>
-          </a:p>
-        </p:txBody>
-      </p:sp>
-      <p:sp>
-        <p:nvSpPr>
-          <p:cNvPr id="4" name="Rectangle 1">
-            <a:extLst>
-              <a:ext uri="{FF2B5EF4-FFF2-40B4-BE49-F238E27FC236}">
-                <a16:creationId xmlns:a16="http://schemas.microsoft.com/office/drawing/2014/main" id="{79A57022-7C6B-4E5F-B584-003C40E0FCD5}"/>
-              </a:ext>
-            </a:extLst>
-          </p:cNvPr>
-          <p:cNvSpPr>
-            <a:spLocks noGrp="1" noChangeArrowheads="1"/>
-          </p:cNvSpPr>
-          <p:nvPr>
-            <p:ph type="subTitle" idx="1"/>
-          </p:nvPr>
-        </p:nvSpPr>
-        <p:spPr bwMode="auto">
-          <a:xfrm>
-            <a:off x="1590675" y="2706688"/>
-            <a:ext cx="9144000" cy="1655762"/>
+            <a:off x="7983147" y="552450"/>
+            <a:ext cx="4208853" cy="6163546"/>
           </a:xfrm>
           <a:prstGeom prst="rect">
             <a:avLst/>
           </a:prstGeom>
-          <a:noFill/>
-          <a:ln>
-            <a:noFill/>
-          </a:ln>
-          <a:effectLst/>
-          <a:extLst>
-            <a:ext uri="{909E8E84-426E-40DD-AFC4-6F175D3DCCD1}">
-              <a14:hiddenFill xmlns:a14="http://schemas.microsoft.com/office/drawing/2010/main">
-                <a:solidFill>
-                  <a:schemeClr val="accent1"/>
-                </a:solidFill>
-              </a14:hiddenFill>
-            </a:ext>
-            <a:ext uri="{91240B29-F687-4F45-9708-019B960494DF}">
-              <a14:hiddenLine xmlns:a14="http://schemas.microsoft.com/office/drawing/2010/main" w="9525">
-                <a:solidFill>
-                  <a:schemeClr val="tx1"/>
-                </a:solidFill>
-                <a:miter lim="800000"/>
-                <a:headEnd/>
-                <a:tailEnd/>
-              </a14:hiddenLine>
-            </a:ext>
-            <a:ext uri="{AF507438-7753-43E0-B8FC-AC1667EBCBE1}">
-              <a14:hiddenEffects xmlns:a14="http://schemas.microsoft.com/office/drawing/2010/main">
-                <a:effectLst>
-                  <a:outerShdw dist="35921" dir="2700000" algn="ctr" rotWithShape="0">
-                    <a:schemeClr val="bg2"/>
-                  </a:outerShdw>
-                </a:effectLst>
-              </a14:hiddenEffects>
-            </a:ext>
-          </a:extLst>
         </p:spPr>
-        <p:txBody>
-          <a:bodyPr vert="horz" wrap="none" lIns="91440" tIns="45720" rIns="91440" bIns="45720" numCol="1" anchor="ctr" anchorCtr="0" compatLnSpc="1">
-            <a:prstTxWarp prst="textNoShape">
-              <a:avLst/>
-            </a:prstTxWarp>
-            <a:spAutoFit/>
-          </a:bodyPr>
-          <a:lstStyle/>
-          <a:p>
-            <a:pPr marL="0" marR="0" lvl="0" indent="0" algn="l" defTabSz="914400" rtl="0" eaLnBrk="0" fontAlgn="base" latinLnBrk="0" hangingPunct="0">
-              <a:lnSpc>
-                <a:spcPct val="100000"/>
-              </a:lnSpc>
-              <a:spcBef>
-                <a:spcPct val="0"/>
-              </a:spcBef>
-              <a:spcAft>
-                <a:spcPct val="0"/>
-              </a:spcAft>
-              <a:buClrTx/>
-              <a:buSzTx/>
-              <a:buFontTx/>
-              <a:buNone/>
-              <a:tabLst/>
-            </a:pPr>
-            <a:endParaRPr kumimoji="0" lang="en-US" altLang="en-US" sz="1800" b="0" i="0" u="none" strike="noStrike" cap="none" normalizeH="0" baseline="0" dirty="0">
-              <a:ln>
-                <a:noFill/>
-              </a:ln>
-              <a:solidFill>
-                <a:schemeClr val="tx1"/>
-              </a:solidFill>
-              <a:effectLst/>
-              <a:latin typeface="Arial" panose="020B0604020202020204" pitchFamily="34" charset="0"/>
-            </a:endParaRPr>
-          </a:p>
-          <a:p>
-            <a:pPr marL="0" marR="0" lvl="0" indent="0" algn="l" defTabSz="914400" rtl="0" eaLnBrk="0" fontAlgn="base" latinLnBrk="0" hangingPunct="0">
-              <a:lnSpc>
-                <a:spcPct val="100000"/>
-              </a:lnSpc>
-              <a:spcBef>
-                <a:spcPct val="0"/>
-              </a:spcBef>
-              <a:spcAft>
-                <a:spcPct val="0"/>
-              </a:spcAft>
-              <a:buClrTx/>
-              <a:buSzTx/>
-              <a:buFontTx/>
-              <a:buChar char="•"/>
-              <a:tabLst/>
-            </a:pPr>
-            <a:r>
-              <a:rPr kumimoji="0" lang="en-US" altLang="en-US" sz="1800" b="0" i="0" u="none" strike="noStrike" cap="none" normalizeH="0" baseline="0" dirty="0">
-                <a:ln>
-                  <a:noFill/>
-                </a:ln>
-                <a:solidFill>
-                  <a:schemeClr val="tx1"/>
-                </a:solidFill>
-                <a:effectLst/>
-                <a:latin typeface="Arial" panose="020B0604020202020204" pitchFamily="34" charset="0"/>
-              </a:rPr>
-              <a:t>React.js </a:t>
-            </a:r>
-          </a:p>
-          <a:p>
-            <a:pPr marL="0" marR="0" lvl="0" indent="0" algn="l" defTabSz="914400" rtl="0" eaLnBrk="0" fontAlgn="base" latinLnBrk="0" hangingPunct="0">
-              <a:lnSpc>
-                <a:spcPct val="100000"/>
-              </a:lnSpc>
-              <a:spcBef>
-                <a:spcPct val="0"/>
-              </a:spcBef>
-              <a:spcAft>
-                <a:spcPct val="0"/>
-              </a:spcAft>
-              <a:buClrTx/>
-              <a:buSzTx/>
-              <a:buFontTx/>
-              <a:buChar char="•"/>
-              <a:tabLst/>
-            </a:pPr>
-            <a:r>
-              <a:rPr kumimoji="0" lang="en-US" altLang="en-US" sz="1800" b="0" i="0" u="none" strike="noStrike" cap="none" normalizeH="0" baseline="0" dirty="0">
-                <a:ln>
-                  <a:noFill/>
-                </a:ln>
-                <a:solidFill>
-                  <a:schemeClr val="tx1"/>
-                </a:solidFill>
-                <a:effectLst/>
-                <a:latin typeface="Arial" panose="020B0604020202020204" pitchFamily="34" charset="0"/>
-              </a:rPr>
-              <a:t>HTML5 </a:t>
-            </a:r>
-          </a:p>
-          <a:p>
-            <a:pPr marL="0" marR="0" lvl="0" indent="0" algn="l" defTabSz="914400" rtl="0" eaLnBrk="0" fontAlgn="base" latinLnBrk="0" hangingPunct="0">
-              <a:lnSpc>
-                <a:spcPct val="100000"/>
-              </a:lnSpc>
-              <a:spcBef>
-                <a:spcPct val="0"/>
-              </a:spcBef>
-              <a:spcAft>
-                <a:spcPct val="0"/>
-              </a:spcAft>
-              <a:buClrTx/>
-              <a:buSzTx/>
-              <a:buFontTx/>
-              <a:buChar char="•"/>
-              <a:tabLst/>
-            </a:pPr>
-            <a:r>
-              <a:rPr kumimoji="0" lang="en-US" altLang="en-US" sz="1800" b="0" i="0" u="none" strike="noStrike" cap="none" normalizeH="0" baseline="0" dirty="0">
-                <a:ln>
-                  <a:noFill/>
-                </a:ln>
-                <a:solidFill>
-                  <a:schemeClr val="tx1"/>
-                </a:solidFill>
-                <a:effectLst/>
-                <a:latin typeface="Arial" panose="020B0604020202020204" pitchFamily="34" charset="0"/>
-              </a:rPr>
-              <a:t>CSS3 </a:t>
-            </a:r>
-          </a:p>
-          <a:p>
-            <a:pPr marL="0" marR="0" lvl="0" indent="0" algn="l" defTabSz="914400" rtl="0" eaLnBrk="0" fontAlgn="base" latinLnBrk="0" hangingPunct="0">
-              <a:lnSpc>
-                <a:spcPct val="100000"/>
-              </a:lnSpc>
-              <a:spcBef>
-                <a:spcPct val="0"/>
-              </a:spcBef>
-              <a:spcAft>
-                <a:spcPct val="0"/>
-              </a:spcAft>
-              <a:buClrTx/>
-              <a:buSzTx/>
-              <a:buFontTx/>
-              <a:buChar char="•"/>
-              <a:tabLst/>
-            </a:pPr>
-            <a:r>
-              <a:rPr kumimoji="0" lang="en-US" altLang="en-US" sz="1800" b="0" i="0" u="none" strike="noStrike" cap="none" normalizeH="0" baseline="0" dirty="0">
-                <a:ln>
-                  <a:noFill/>
-                </a:ln>
-                <a:solidFill>
-                  <a:schemeClr val="tx1"/>
-                </a:solidFill>
-                <a:effectLst/>
-                <a:latin typeface="Arial" panose="020B0604020202020204" pitchFamily="34" charset="0"/>
-              </a:rPr>
-              <a:t>JavaScript </a:t>
-            </a:r>
-          </a:p>
-          <a:p>
-            <a:pPr marL="0" marR="0" lvl="0" indent="0" algn="l" defTabSz="914400" rtl="0" eaLnBrk="0" fontAlgn="base" latinLnBrk="0" hangingPunct="0">
-              <a:lnSpc>
-                <a:spcPct val="100000"/>
-              </a:lnSpc>
-              <a:spcBef>
-                <a:spcPct val="0"/>
-              </a:spcBef>
-              <a:spcAft>
-                <a:spcPct val="0"/>
-              </a:spcAft>
-              <a:buClrTx/>
-              <a:buSzTx/>
-              <a:buFontTx/>
-              <a:buChar char="•"/>
-              <a:tabLst/>
-            </a:pPr>
-            <a:r>
-              <a:rPr kumimoji="0" lang="en-US" altLang="en-US" sz="1800" b="0" i="0" u="none" strike="noStrike" cap="none" normalizeH="0" baseline="0" dirty="0">
-                <a:ln>
-                  <a:noFill/>
-                </a:ln>
-                <a:solidFill>
-                  <a:schemeClr val="tx1"/>
-                </a:solidFill>
-                <a:effectLst/>
-                <a:latin typeface="Arial" panose="020B0604020202020204" pitchFamily="34" charset="0"/>
-              </a:rPr>
-              <a:t>Tailwind CSS / Bootstrap </a:t>
-            </a:r>
-          </a:p>
-          <a:p>
-            <a:pPr marL="0" marR="0" lvl="0" indent="0" algn="l" defTabSz="914400" rtl="0" eaLnBrk="0" fontAlgn="base" latinLnBrk="0" hangingPunct="0">
-              <a:lnSpc>
-                <a:spcPct val="100000"/>
-              </a:lnSpc>
-              <a:spcBef>
-                <a:spcPct val="0"/>
-              </a:spcBef>
-              <a:spcAft>
-                <a:spcPct val="0"/>
-              </a:spcAft>
-              <a:buClrTx/>
-              <a:buSzTx/>
-              <a:buFontTx/>
-              <a:buChar char="•"/>
-              <a:tabLst/>
-            </a:pPr>
-            <a:r>
-              <a:rPr kumimoji="0" lang="en-US" altLang="en-US" sz="1800" b="0" i="0" u="none" strike="noStrike" cap="none" normalizeH="0" baseline="0" dirty="0" err="1">
-                <a:ln>
-                  <a:noFill/>
-                </a:ln>
-                <a:solidFill>
-                  <a:schemeClr val="tx1"/>
-                </a:solidFill>
-                <a:effectLst/>
-                <a:latin typeface="Arial" panose="020B0604020202020204" pitchFamily="34" charset="0"/>
-              </a:rPr>
-              <a:t>Axios</a:t>
-            </a:r>
-            <a:r>
-              <a:rPr kumimoji="0" lang="en-US" altLang="en-US" sz="1800" b="0" i="0" u="none" strike="noStrike" cap="none" normalizeH="0" baseline="0" dirty="0">
-                <a:ln>
-                  <a:noFill/>
-                </a:ln>
-                <a:solidFill>
-                  <a:schemeClr val="tx1"/>
-                </a:solidFill>
-                <a:effectLst/>
-                <a:latin typeface="Arial" panose="020B0604020202020204" pitchFamily="34" charset="0"/>
-              </a:rPr>
-              <a:t> </a:t>
-            </a:r>
-          </a:p>
-          <a:p>
-            <a:pPr marL="0" marR="0" lvl="0" indent="0" algn="l" defTabSz="914400" rtl="0" eaLnBrk="0" fontAlgn="base" latinLnBrk="0" hangingPunct="0">
-              <a:lnSpc>
-                <a:spcPct val="100000"/>
-              </a:lnSpc>
-              <a:spcBef>
-                <a:spcPct val="0"/>
-              </a:spcBef>
-              <a:spcAft>
-                <a:spcPct val="0"/>
-              </a:spcAft>
-              <a:buClrTx/>
-              <a:buSzTx/>
-              <a:buFontTx/>
-              <a:buChar char="•"/>
-              <a:tabLst/>
-            </a:pPr>
-            <a:r>
-              <a:rPr kumimoji="0" lang="en-US" altLang="en-US" sz="1800" b="0" i="0" u="none" strike="noStrike" cap="none" normalizeH="0" baseline="0" dirty="0">
-                <a:ln>
-                  <a:noFill/>
-                </a:ln>
-                <a:solidFill>
-                  <a:schemeClr val="tx1"/>
-                </a:solidFill>
-                <a:effectLst/>
-                <a:latin typeface="Arial" panose="020B0604020202020204" pitchFamily="34" charset="0"/>
-              </a:rPr>
-              <a:t>React Router DOM </a:t>
-            </a:r>
-          </a:p>
-        </p:txBody>
-      </p:sp>
+      </p:pic>
+      <p:pic>
+        <p:nvPicPr>
+          <p:cNvPr id="5" name="Picture 4">
+            <a:extLst>
+              <a:ext uri="{FF2B5EF4-FFF2-40B4-BE49-F238E27FC236}">
+                <a16:creationId xmlns:a16="http://schemas.microsoft.com/office/drawing/2014/main" id="{46061E20-031A-45E0-912B-1205592FD770}"/>
+              </a:ext>
+            </a:extLst>
+          </p:cNvPr>
+          <p:cNvPicPr>
+            <a:picLocks noChangeAspect="1"/>
+          </p:cNvPicPr>
+          <p:nvPr/>
+        </p:nvPicPr>
+        <p:blipFill>
+          <a:blip r:embed="rId3"/>
+          <a:stretch>
+            <a:fillRect/>
+          </a:stretch>
+        </p:blipFill>
+        <p:spPr>
+          <a:xfrm>
+            <a:off x="3505772" y="476250"/>
+            <a:ext cx="4477375" cy="6239746"/>
+          </a:xfrm>
+          <a:prstGeom prst="rect">
+            <a:avLst/>
+          </a:prstGeom>
+        </p:spPr>
+      </p:pic>
+      <p:pic>
+        <p:nvPicPr>
+          <p:cNvPr id="6" name="Picture 5">
+            <a:extLst>
+              <a:ext uri="{FF2B5EF4-FFF2-40B4-BE49-F238E27FC236}">
+                <a16:creationId xmlns:a16="http://schemas.microsoft.com/office/drawing/2014/main" id="{B9CB145C-2E40-4012-9D55-4306BFA97DA5}"/>
+              </a:ext>
+            </a:extLst>
+          </p:cNvPr>
+          <p:cNvPicPr>
+            <a:picLocks noChangeAspect="1"/>
+          </p:cNvPicPr>
+          <p:nvPr/>
+        </p:nvPicPr>
+        <p:blipFill>
+          <a:blip r:embed="rId4"/>
+          <a:stretch>
+            <a:fillRect/>
+          </a:stretch>
+        </p:blipFill>
+        <p:spPr>
+          <a:xfrm>
+            <a:off x="0" y="619125"/>
+            <a:ext cx="3600450" cy="6096871"/>
+          </a:xfrm>
+          <a:prstGeom prst="rect">
+            <a:avLst/>
+          </a:prstGeom>
+        </p:spPr>
+      </p:pic>
     </p:spTree>
     <p:extLst>
       <p:ext uri="{BB962C8B-B14F-4D97-AF65-F5344CB8AC3E}">
-        <p14:creationId xmlns:p14="http://schemas.microsoft.com/office/powerpoint/2010/main" val="2996786148"/>
+        <p14:creationId xmlns:p14="http://schemas.microsoft.com/office/powerpoint/2010/main" val="3861804611"/>
       </p:ext>
     </p:extLst>
   </p:cSld>
   <p:clrMapOvr>
     <a:masterClrMapping/>
   </p:clrMapOvr>
+  <mc:AlternateContent xmlns:mc="http://schemas.openxmlformats.org/markup-compatibility/2006">
+    <mc:Choice xmlns:p159="http://schemas.microsoft.com/office/powerpoint/2015/09/main" Requires="p159">
+      <p:transition xmlns:p14="http://schemas.microsoft.com/office/powerpoint/2010/main" spd="slow" p14:dur="2000">
+        <p159:morph option="byObject"/>
+      </p:transition>
+    </mc:Choice>
+    <mc:Fallback>
+      <p:transition spd="slow">
+        <p:fade/>
+      </p:transition>
+    </mc:Fallback>
+  </mc:AlternateContent>
 </p:sld>
 </file>
 
@@ -12165,158 +13292,118 @@
           <a:chExt cx="0" cy="0"/>
         </a:xfrm>
       </p:grpSpPr>
-      <p:sp>
-        <p:nvSpPr>
-          <p:cNvPr id="2" name="Title 1">
+      <p:pic>
+        <p:nvPicPr>
+          <p:cNvPr id="5" name="Picture 4">
             <a:extLst>
               <a:ext uri="{FF2B5EF4-FFF2-40B4-BE49-F238E27FC236}">
-                <a16:creationId xmlns:a16="http://schemas.microsoft.com/office/drawing/2014/main" id="{8356614D-0EFA-4EB1-94BD-ABF0321F9081}"/>
+                <a16:creationId xmlns:a16="http://schemas.microsoft.com/office/drawing/2014/main" id="{EDAED2FC-B62F-4739-B374-A43118EC2817}"/>
               </a:ext>
             </a:extLst>
           </p:cNvPr>
-          <p:cNvSpPr>
-            <a:spLocks noGrp="1"/>
-          </p:cNvSpPr>
-          <p:nvPr>
-            <p:ph type="title"/>
-          </p:nvPr>
-        </p:nvSpPr>
-        <p:spPr/>
-        <p:txBody>
-          <a:bodyPr/>
-          <a:lstStyle/>
-          <a:p>
-            <a:r>
-              <a:rPr lang="en-IN" dirty="0"/>
-              <a:t>Blockchain Stack</a:t>
-            </a:r>
-          </a:p>
-        </p:txBody>
-      </p:sp>
-      <p:sp>
-        <p:nvSpPr>
-          <p:cNvPr id="3" name="Content Placeholder 2">
+          <p:cNvPicPr>
+            <a:picLocks noChangeAspect="1"/>
+          </p:cNvPicPr>
+          <p:nvPr/>
+        </p:nvPicPr>
+        <p:blipFill>
+          <a:blip r:embed="rId2"/>
+          <a:stretch>
+            <a:fillRect/>
+          </a:stretch>
+        </p:blipFill>
+        <p:spPr>
+          <a:xfrm>
+            <a:off x="8199301" y="0"/>
+            <a:ext cx="4141267" cy="6858000"/>
+          </a:xfrm>
+          <a:prstGeom prst="rect">
+            <a:avLst/>
+          </a:prstGeom>
+        </p:spPr>
+      </p:pic>
+      <p:pic>
+        <p:nvPicPr>
+          <p:cNvPr id="6" name="Picture 5">
             <a:extLst>
               <a:ext uri="{FF2B5EF4-FFF2-40B4-BE49-F238E27FC236}">
-                <a16:creationId xmlns:a16="http://schemas.microsoft.com/office/drawing/2014/main" id="{B1AEEA2B-915F-4242-877A-256C19DCDC49}"/>
+                <a16:creationId xmlns:a16="http://schemas.microsoft.com/office/drawing/2014/main" id="{54CF1A0E-8FD4-4D5C-B500-7385FC199153}"/>
               </a:ext>
             </a:extLst>
           </p:cNvPr>
-          <p:cNvSpPr>
-            <a:spLocks noGrp="1"/>
-          </p:cNvSpPr>
-          <p:nvPr>
-            <p:ph idx="1"/>
-          </p:nvPr>
-        </p:nvSpPr>
-        <p:spPr/>
-        <p:txBody>
-          <a:bodyPr/>
-          <a:lstStyle/>
-          <a:p>
-            <a:r>
-              <a:rPr lang="en-IN" b="1" dirty="0"/>
-              <a:t>BLOCKCHAIN STACK</a:t>
-            </a:r>
-          </a:p>
-          <a:p>
-            <a:pPr>
-              <a:buFont typeface="Arial" panose="020B0604020202020204" pitchFamily="34" charset="0"/>
-              <a:buChar char="•"/>
-            </a:pPr>
-            <a:r>
-              <a:rPr lang="en-IN" dirty="0"/>
-              <a:t>Ethereum </a:t>
-            </a:r>
-          </a:p>
-          <a:p>
-            <a:pPr>
-              <a:buFont typeface="Arial" panose="020B0604020202020204" pitchFamily="34" charset="0"/>
-              <a:buChar char="•"/>
-            </a:pPr>
-            <a:r>
-              <a:rPr lang="en-IN" dirty="0"/>
-              <a:t>Solidity </a:t>
-            </a:r>
-          </a:p>
-          <a:p>
-            <a:pPr>
-              <a:buFont typeface="Arial" panose="020B0604020202020204" pitchFamily="34" charset="0"/>
-              <a:buChar char="•"/>
-            </a:pPr>
-            <a:r>
-              <a:rPr lang="en-IN" dirty="0" err="1"/>
-              <a:t>Sepolia</a:t>
-            </a:r>
-            <a:r>
-              <a:rPr lang="en-IN" dirty="0"/>
-              <a:t> </a:t>
-            </a:r>
-            <a:r>
-              <a:rPr lang="en-IN" dirty="0" err="1"/>
-              <a:t>Testnet</a:t>
-            </a:r>
-            <a:r>
-              <a:rPr lang="en-IN" dirty="0"/>
-              <a:t> </a:t>
-            </a:r>
-          </a:p>
-          <a:p>
-            <a:pPr>
-              <a:buFont typeface="Arial" panose="020B0604020202020204" pitchFamily="34" charset="0"/>
-              <a:buChar char="•"/>
-            </a:pPr>
-            <a:r>
-              <a:rPr lang="en-IN" dirty="0"/>
-              <a:t>Smart Contracts </a:t>
-            </a:r>
-          </a:p>
-          <a:p>
-            <a:pPr>
-              <a:buFont typeface="Arial" panose="020B0604020202020204" pitchFamily="34" charset="0"/>
-              <a:buChar char="•"/>
-            </a:pPr>
-            <a:r>
-              <a:rPr lang="en-IN" dirty="0" err="1"/>
-              <a:t>MetaMask</a:t>
-            </a:r>
-            <a:r>
-              <a:rPr lang="en-IN" dirty="0"/>
-              <a:t> </a:t>
-            </a:r>
-          </a:p>
-          <a:p>
-            <a:pPr>
-              <a:buFont typeface="Arial" panose="020B0604020202020204" pitchFamily="34" charset="0"/>
-              <a:buChar char="•"/>
-            </a:pPr>
-            <a:r>
-              <a:rPr lang="en-IN" dirty="0"/>
-              <a:t>Hardhat </a:t>
-            </a:r>
-          </a:p>
-          <a:p>
-            <a:pPr>
-              <a:buFont typeface="Arial" panose="020B0604020202020204" pitchFamily="34" charset="0"/>
-              <a:buChar char="•"/>
-            </a:pPr>
-            <a:r>
-              <a:rPr lang="en-IN" dirty="0"/>
-              <a:t>Ethers.js</a:t>
-            </a:r>
-          </a:p>
-        </p:txBody>
-      </p:sp>
+          <p:cNvPicPr>
+            <a:picLocks noChangeAspect="1"/>
+          </p:cNvPicPr>
+          <p:nvPr/>
+        </p:nvPicPr>
+        <p:blipFill>
+          <a:blip r:embed="rId3"/>
+          <a:stretch>
+            <a:fillRect/>
+          </a:stretch>
+        </p:blipFill>
+        <p:spPr>
+          <a:xfrm>
+            <a:off x="4141268" y="0"/>
+            <a:ext cx="4193627" cy="6858000"/>
+          </a:xfrm>
+          <a:prstGeom prst="rect">
+            <a:avLst/>
+          </a:prstGeom>
+        </p:spPr>
+      </p:pic>
+      <p:pic>
+        <p:nvPicPr>
+          <p:cNvPr id="7" name="Picture 6">
+            <a:extLst>
+              <a:ext uri="{FF2B5EF4-FFF2-40B4-BE49-F238E27FC236}">
+                <a16:creationId xmlns:a16="http://schemas.microsoft.com/office/drawing/2014/main" id="{C516E63D-1DB9-49FB-8B8C-672DB5EBAFAA}"/>
+              </a:ext>
+            </a:extLst>
+          </p:cNvPr>
+          <p:cNvPicPr>
+            <a:picLocks noChangeAspect="1"/>
+          </p:cNvPicPr>
+          <p:nvPr/>
+        </p:nvPicPr>
+        <p:blipFill>
+          <a:blip r:embed="rId4"/>
+          <a:stretch>
+            <a:fillRect/>
+          </a:stretch>
+        </p:blipFill>
+        <p:spPr>
+          <a:xfrm>
+            <a:off x="83235" y="0"/>
+            <a:ext cx="4058033" cy="6858000"/>
+          </a:xfrm>
+          <a:prstGeom prst="rect">
+            <a:avLst/>
+          </a:prstGeom>
+        </p:spPr>
+      </p:pic>
     </p:spTree>
     <p:extLst>
       <p:ext uri="{BB962C8B-B14F-4D97-AF65-F5344CB8AC3E}">
-        <p14:creationId xmlns:p14="http://schemas.microsoft.com/office/powerpoint/2010/main" val="2029022322"/>
+        <p14:creationId xmlns:p14="http://schemas.microsoft.com/office/powerpoint/2010/main" val="3412614254"/>
       </p:ext>
     </p:extLst>
   </p:cSld>
   <p:clrMapOvr>
     <a:masterClrMapping/>
   </p:clrMapOvr>
+  <mc:AlternateContent xmlns:mc="http://schemas.openxmlformats.org/markup-compatibility/2006">
+    <mc:Choice xmlns:p159="http://schemas.microsoft.com/office/powerpoint/2015/09/main" Requires="p159">
+      <p:transition xmlns:p14="http://schemas.microsoft.com/office/powerpoint/2010/main" spd="slow" p14:dur="2000">
+        <p159:morph option="byObject"/>
+      </p:transition>
+    </mc:Choice>
+    <mc:Fallback>
+      <p:transition spd="slow">
+        <p:fade/>
+      </p:transition>
+    </mc:Fallback>
+  </mc:AlternateContent>
 </p:sld>
 </file>
 
@@ -12337,77 +13424,57 @@
           <a:chExt cx="0" cy="0"/>
         </a:xfrm>
       </p:grpSpPr>
-      <p:sp>
-        <p:nvSpPr>
-          <p:cNvPr id="2" name="Title 1">
+      <p:pic>
+        <p:nvPicPr>
+          <p:cNvPr id="5" name="Content Placeholder 4">
             <a:extLst>
               <a:ext uri="{FF2B5EF4-FFF2-40B4-BE49-F238E27FC236}">
-                <a16:creationId xmlns:a16="http://schemas.microsoft.com/office/drawing/2014/main" id="{133B0F75-D7DD-4DB2-AF9D-CB2C148BBE3F}"/>
+                <a16:creationId xmlns:a16="http://schemas.microsoft.com/office/drawing/2014/main" id="{E0B16F41-980E-40EC-982B-F438EA0656AC}"/>
               </a:ext>
             </a:extLst>
           </p:cNvPr>
-          <p:cNvSpPr>
-            <a:spLocks noGrp="1"/>
-          </p:cNvSpPr>
-          <p:nvPr>
-            <p:ph type="title"/>
-          </p:nvPr>
-        </p:nvSpPr>
-        <p:spPr/>
-        <p:txBody>
-          <a:bodyPr/>
-          <a:lstStyle/>
-          <a:p>
-            <a:r>
-              <a:rPr lang="en-US" dirty="0"/>
-              <a:t>SYSTEMIC LIMITATIONS</a:t>
-            </a:r>
-            <a:endParaRPr lang="en-IN" dirty="0"/>
-          </a:p>
-        </p:txBody>
-      </p:sp>
-      <p:sp>
-        <p:nvSpPr>
-          <p:cNvPr id="3" name="Content Placeholder 2">
-            <a:extLst>
-              <a:ext uri="{FF2B5EF4-FFF2-40B4-BE49-F238E27FC236}">
-                <a16:creationId xmlns:a16="http://schemas.microsoft.com/office/drawing/2014/main" id="{9E68F4BE-3222-4901-A6C6-4BE44E393987}"/>
-              </a:ext>
-            </a:extLst>
-          </p:cNvPr>
-          <p:cNvSpPr>
-            <a:spLocks noGrp="1"/>
-          </p:cNvSpPr>
+          <p:cNvPicPr>
+            <a:picLocks noGrp="1" noChangeAspect="1"/>
+          </p:cNvPicPr>
           <p:nvPr>
             <p:ph idx="1"/>
           </p:nvPr>
-        </p:nvSpPr>
-        <p:spPr/>
-        <p:txBody>
-          <a:bodyPr/>
-          <a:lstStyle/>
-          <a:p>
-            <a:pPr marL="0" indent="0">
-              <a:buNone/>
-            </a:pPr>
-            <a:r>
-              <a:rPr lang="en-US" dirty="0"/>
-              <a:t>Human Errors: Manual counting and data entry introduce critical errors in large-scale elections. Reporting Delays: Manual tabulation is time-consuming, delaying results and creating uncertainty. Access Barriers: Physical polling stations exclude remote voters and the elderly. </a:t>
-            </a:r>
-            <a:endParaRPr lang="en-IN" dirty="0"/>
-          </a:p>
-        </p:txBody>
-      </p:sp>
+        </p:nvPicPr>
+        <p:blipFill>
+          <a:blip r:embed="rId2"/>
+          <a:stretch>
+            <a:fillRect/>
+          </a:stretch>
+        </p:blipFill>
+        <p:spPr>
+          <a:xfrm>
+            <a:off x="1377285" y="304800"/>
+            <a:ext cx="10677585" cy="6096000"/>
+          </a:xfrm>
+        </p:spPr>
+      </p:pic>
     </p:spTree>
     <p:extLst>
       <p:ext uri="{BB962C8B-B14F-4D97-AF65-F5344CB8AC3E}">
-        <p14:creationId xmlns:p14="http://schemas.microsoft.com/office/powerpoint/2010/main" val="3066902379"/>
+        <p14:creationId xmlns:p14="http://schemas.microsoft.com/office/powerpoint/2010/main" val="1581073474"/>
       </p:ext>
     </p:extLst>
   </p:cSld>
   <p:clrMapOvr>
     <a:masterClrMapping/>
   </p:clrMapOvr>
+  <mc:AlternateContent xmlns:mc="http://schemas.openxmlformats.org/markup-compatibility/2006">
+    <mc:Choice xmlns:p159="http://schemas.microsoft.com/office/powerpoint/2015/09/main" Requires="p159">
+      <p:transition xmlns:p14="http://schemas.microsoft.com/office/powerpoint/2010/main" spd="slow" p14:dur="2000">
+        <p159:morph option="byObject"/>
+      </p:transition>
+    </mc:Choice>
+    <mc:Fallback>
+      <p:transition spd="slow">
+        <p:fade/>
+      </p:transition>
+    </mc:Fallback>
+  </mc:AlternateContent>
 </p:sld>
 </file>
 
